--- a/docs/public/course-assets/course-pptx/in-002.pptx
+++ b/docs/public/course-assets/course-pptx/in-002.pptx
@@ -2,24 +2,24 @@
 <file path=ppt/presentation.xml><?xml version="1.0" encoding="utf-8"?>
 <p:presentation xmlns:p="http://schemas.openxmlformats.org/presentationml/2006/main">
   <p:sldMasterIdLst>
-    <p:sldMasterId xmlns:r="http://schemas.openxmlformats.org/officeDocument/2006/relationships" id="2147483648" r:id="R2894a477067f4f36"/>
+    <p:sldMasterId xmlns:r="http://schemas.openxmlformats.org/officeDocument/2006/relationships" id="2147483648" r:id="R4ac645217c634a5d"/>
   </p:sldMasterIdLst>
   <p:notesMasterIdLst>
-    <p:notesMasterId xmlns:r="http://schemas.openxmlformats.org/officeDocument/2006/relationships" r:id="R4881526c96bc43ff"/>
+    <p:notesMasterId xmlns:r="http://schemas.openxmlformats.org/officeDocument/2006/relationships" r:id="R35f564b25ae447ea"/>
   </p:notesMasterIdLst>
   <p:sldIdLst>
-    <p:sldId xmlns:r="http://schemas.openxmlformats.org/officeDocument/2006/relationships" id="256" r:id="Re33c9056823f48b5"/>
-    <p:sldId xmlns:r="http://schemas.openxmlformats.org/officeDocument/2006/relationships" id="257" r:id="R5f76a4e33c1b4706"/>
-    <p:sldId xmlns:r="http://schemas.openxmlformats.org/officeDocument/2006/relationships" id="258" r:id="R6eecc0d2e7b34486"/>
-    <p:sldId xmlns:r="http://schemas.openxmlformats.org/officeDocument/2006/relationships" id="259" r:id="Rff48d4816f3842c2"/>
-    <p:sldId xmlns:r="http://schemas.openxmlformats.org/officeDocument/2006/relationships" id="260" r:id="Ra745c856af0740d4"/>
-    <p:sldId xmlns:r="http://schemas.openxmlformats.org/officeDocument/2006/relationships" id="261" r:id="Rc03b8fa7f5c64d38"/>
-    <p:sldId xmlns:r="http://schemas.openxmlformats.org/officeDocument/2006/relationships" id="262" r:id="Rcdf7e1777c19490f"/>
-    <p:sldId xmlns:r="http://schemas.openxmlformats.org/officeDocument/2006/relationships" id="263" r:id="Rd9ac07eb5d0e4853"/>
-    <p:sldId xmlns:r="http://schemas.openxmlformats.org/officeDocument/2006/relationships" id="264" r:id="R9fc9ff9c10a94532"/>
-    <p:sldId xmlns:r="http://schemas.openxmlformats.org/officeDocument/2006/relationships" id="265" r:id="R57e55ab13f614ccd"/>
-    <p:sldId xmlns:r="http://schemas.openxmlformats.org/officeDocument/2006/relationships" id="266" r:id="R1638ed91996142f7"/>
-    <p:sldId xmlns:r="http://schemas.openxmlformats.org/officeDocument/2006/relationships" id="267" r:id="R849d119ea49947cb"/>
+    <p:sldId xmlns:r="http://schemas.openxmlformats.org/officeDocument/2006/relationships" id="256" r:id="Rbe5dca254fb447bc"/>
+    <p:sldId xmlns:r="http://schemas.openxmlformats.org/officeDocument/2006/relationships" id="257" r:id="R2c4423325e384d8e"/>
+    <p:sldId xmlns:r="http://schemas.openxmlformats.org/officeDocument/2006/relationships" id="258" r:id="R1e6818867e03403f"/>
+    <p:sldId xmlns:r="http://schemas.openxmlformats.org/officeDocument/2006/relationships" id="259" r:id="R67d366e0ff1a4a12"/>
+    <p:sldId xmlns:r="http://schemas.openxmlformats.org/officeDocument/2006/relationships" id="260" r:id="Rab50fd0fa87c42aa"/>
+    <p:sldId xmlns:r="http://schemas.openxmlformats.org/officeDocument/2006/relationships" id="261" r:id="R17d67a8d1fe94f82"/>
+    <p:sldId xmlns:r="http://schemas.openxmlformats.org/officeDocument/2006/relationships" id="262" r:id="R79b6cceb583d4887"/>
+    <p:sldId xmlns:r="http://schemas.openxmlformats.org/officeDocument/2006/relationships" id="263" r:id="Ra4ffc3c142414e16"/>
+    <p:sldId xmlns:r="http://schemas.openxmlformats.org/officeDocument/2006/relationships" id="264" r:id="R0fe4acbc5fb34bab"/>
+    <p:sldId xmlns:r="http://schemas.openxmlformats.org/officeDocument/2006/relationships" id="265" r:id="R72afce22e52146e7"/>
+    <p:sldId xmlns:r="http://schemas.openxmlformats.org/officeDocument/2006/relationships" id="266" r:id="Ra5823b237bbc4942"/>
+    <p:sldId xmlns:r="http://schemas.openxmlformats.org/officeDocument/2006/relationships" id="267" r:id="R153f2f0ff054484d"/>
   </p:sldIdLst>
   <p:sldSz cx="12192000" cy="6858000"/>
   <p:notesSz cx="6858000" cy="9144000"/>
@@ -1338,7 +1338,7 @@
   </p:cSld>
   <p:clrMap bg1="lt1" tx1="dk1" bg2="lt2" tx2="dk2" accent1="accent1" accent2="accent2" accent3="accent3" accent4="accent4" accent5="accent5" accent6="accent6" hlink="hlink" folHlink="folHlink"/>
   <p:sldLayoutIdLst>
-    <p:sldLayoutId xmlns:r="http://schemas.openxmlformats.org/officeDocument/2006/relationships" id="2147483649" r:id="R70b3e4aefa5e407c"/>
+    <p:sldLayoutId xmlns:r="http://schemas.openxmlformats.org/officeDocument/2006/relationships" id="2147483649" r:id="R55cfab1c31de4705"/>
   </p:sldLayoutIdLst>
   <p:txStyles>
     <p:titleStyle>
@@ -1889,7 +1889,7 @@
           <p:cNvPr id="1" name="cover-rule">
             <a:extLst xmlns:a="http://schemas.openxmlformats.org/drawingml/2006/main">
               <a:ext uri="{FF2B5EF4-FFF2-40B4-BE49-F238E27FC236}">
-                <a16:creationId xmlns:a16="http://schemas.microsoft.com/office/drawing/2014/main" id="{11E1CE89-09B9-471F-B8DE-64BC16896A1B}"/>
+                <a16:creationId xmlns:a16="http://schemas.microsoft.com/office/drawing/2014/main" id="{2DACCBCB-3E97-419D-802C-11D25A3ED3C0}"/>
               </a:ext>
             </a:extLst>
           </p:cNvPr>
@@ -1922,7 +1922,7 @@
           <p:cNvPr id="2" name="cover-ring-1">
             <a:extLst xmlns:a="http://schemas.openxmlformats.org/drawingml/2006/main">
               <a:ext uri="{FF2B5EF4-FFF2-40B4-BE49-F238E27FC236}">
-                <a16:creationId xmlns:a16="http://schemas.microsoft.com/office/drawing/2014/main" id="{5DDDD36E-79BC-4F21-8C8A-B14BA685CB37}"/>
+                <a16:creationId xmlns:a16="http://schemas.microsoft.com/office/drawing/2014/main" id="{47238DC1-7ED8-465E-AC41-5327BF7EE82D}"/>
               </a:ext>
             </a:extLst>
           </p:cNvPr>
@@ -1953,7 +1953,7 @@
           <p:cNvPr id="3" name="cover-ring-2">
             <a:extLst xmlns:a="http://schemas.openxmlformats.org/drawingml/2006/main">
               <a:ext uri="{FF2B5EF4-FFF2-40B4-BE49-F238E27FC236}">
-                <a16:creationId xmlns:a16="http://schemas.microsoft.com/office/drawing/2014/main" id="{ADB01535-A47A-472E-86A0-E6E1362D209B}"/>
+                <a16:creationId xmlns:a16="http://schemas.microsoft.com/office/drawing/2014/main" id="{276A6220-1E59-49D7-AA7C-9754020D1E7C}"/>
               </a:ext>
             </a:extLst>
           </p:cNvPr>
@@ -1984,7 +1984,7 @@
           <p:cNvPr id="4" name="cover-core">
             <a:extLst xmlns:a="http://schemas.openxmlformats.org/drawingml/2006/main">
               <a:ext uri="{FF2B5EF4-FFF2-40B4-BE49-F238E27FC236}">
-                <a16:creationId xmlns:a16="http://schemas.microsoft.com/office/drawing/2014/main" id="{C0D78ED8-3B2D-443F-8EDE-17BDD31D1728}"/>
+                <a16:creationId xmlns:a16="http://schemas.microsoft.com/office/drawing/2014/main" id="{747B2B3A-A399-40E8-895F-9292FCBB65ED}"/>
               </a:ext>
             </a:extLst>
           </p:cNvPr>
@@ -2017,7 +2017,7 @@
           <p:cNvPr id="5" name="cover-line-1">
             <a:extLst xmlns:a="http://schemas.openxmlformats.org/drawingml/2006/main">
               <a:ext uri="{FF2B5EF4-FFF2-40B4-BE49-F238E27FC236}">
-                <a16:creationId xmlns:a16="http://schemas.microsoft.com/office/drawing/2014/main" id="{BEDCB966-120F-4AE6-877D-E11A8BB17CD8}"/>
+                <a16:creationId xmlns:a16="http://schemas.microsoft.com/office/drawing/2014/main" id="{05D97ED3-1DE1-4FD7-A819-12DD30BA9B82}"/>
               </a:ext>
             </a:extLst>
           </p:cNvPr>
@@ -2048,7 +2048,7 @@
           <p:cNvPr id="6" name="cover-line-2">
             <a:extLst xmlns:a="http://schemas.openxmlformats.org/drawingml/2006/main">
               <a:ext uri="{FF2B5EF4-FFF2-40B4-BE49-F238E27FC236}">
-                <a16:creationId xmlns:a16="http://schemas.microsoft.com/office/drawing/2014/main" id="{E7AEF698-88F5-4BA6-8CF4-9BB906372C35}"/>
+                <a16:creationId xmlns:a16="http://schemas.microsoft.com/office/drawing/2014/main" id="{4F53B91A-1DE7-4BFE-A66D-947C4DAC2D5C}"/>
               </a:ext>
             </a:extLst>
           </p:cNvPr>
@@ -2079,7 +2079,7 @@
           <p:cNvPr id="7" name="cover-eyebrow">
             <a:extLst xmlns:a="http://schemas.openxmlformats.org/drawingml/2006/main">
               <a:ext uri="{FF2B5EF4-FFF2-40B4-BE49-F238E27FC236}">
-                <a16:creationId xmlns:a16="http://schemas.microsoft.com/office/drawing/2014/main" id="{6204E464-EE62-4877-A0EA-3BE6A49DEB1E}"/>
+                <a16:creationId xmlns:a16="http://schemas.microsoft.com/office/drawing/2014/main" id="{A7955DB8-0773-423B-9F41-BA7B60D374E2}"/>
               </a:ext>
             </a:extLst>
           </p:cNvPr>
@@ -2137,7 +2137,7 @@
           <p:cNvPr id="8" name="cover-title">
             <a:extLst xmlns:a="http://schemas.openxmlformats.org/drawingml/2006/main">
               <a:ext uri="{FF2B5EF4-FFF2-40B4-BE49-F238E27FC236}">
-                <a16:creationId xmlns:a16="http://schemas.microsoft.com/office/drawing/2014/main" id="{AF31924D-4DF5-478F-BBE3-D04FC615116F}"/>
+                <a16:creationId xmlns:a16="http://schemas.microsoft.com/office/drawing/2014/main" id="{0E9BF783-EF20-4822-B9F3-877661DBE673}"/>
               </a:ext>
             </a:extLst>
           </p:cNvPr>
@@ -2195,7 +2195,7 @@
           <p:cNvPr id="9" name="cover-subtitle">
             <a:extLst xmlns:a="http://schemas.openxmlformats.org/drawingml/2006/main">
               <a:ext uri="{FF2B5EF4-FFF2-40B4-BE49-F238E27FC236}">
-                <a16:creationId xmlns:a16="http://schemas.microsoft.com/office/drawing/2014/main" id="{153E7F7F-3B4F-4833-888F-99D7EDA2A70D}"/>
+                <a16:creationId xmlns:a16="http://schemas.microsoft.com/office/drawing/2014/main" id="{4075DFA0-3695-4F1C-A826-410A127B1CE5}"/>
               </a:ext>
             </a:extLst>
           </p:cNvPr>
@@ -2257,7 +2257,7 @@
           <p:cNvPr id="10" name="cover-lead">
             <a:extLst xmlns:a="http://schemas.openxmlformats.org/drawingml/2006/main">
               <a:ext uri="{FF2B5EF4-FFF2-40B4-BE49-F238E27FC236}">
-                <a16:creationId xmlns:a16="http://schemas.microsoft.com/office/drawing/2014/main" id="{3D6A3A5A-59F0-46BA-A793-2949CF7B118C}"/>
+                <a16:creationId xmlns:a16="http://schemas.microsoft.com/office/drawing/2014/main" id="{8817B154-7851-4E51-8246-A276A94CC2E5}"/>
               </a:ext>
             </a:extLst>
           </p:cNvPr>
@@ -2282,7 +2282,7 @@
         </p:spPr>
         <p:txBody>
           <a:bodyPr xmlns:a="http://schemas.openxmlformats.org/drawingml/2006/main" lIns="0" tIns="0" rIns="0" bIns="0" anchor="t">
-            <a:normAutofit fontScale="82869"/>
+            <a:normAutofit fontScale="83036"/>
           </a:bodyPr>
           <a:lstStyle xmlns:a="http://schemas.openxmlformats.org/drawingml/2006/main"/>
           <a:p xmlns:a="http://schemas.openxmlformats.org/drawingml/2006/main">
@@ -2305,7 +2305,7 @@
                 <a:ea typeface="PingFang SC"/>
                 <a:cs typeface="PingFang SC"/>
               </a:rPr>
-              <a:t>在高校中，AI 最有价值的角色不是“代写者”，而是受约束的助理：它能帮助教师整理材料、设计活动、形成反馈草稿，也能帮助研究者扩展检索式、提取文献信息、检查代码和组织写作结构…</a:t>
+              <a:t>在高校中，AI 最有价值的角色不是“代写者”；而是受约束的助理，它能帮助教师整理材料、设计活动、形成反馈草稿；也能帮助研究者扩展检索式、提取文献信息、检查代码和组织写作结构</a:t>
             </a:r>
           </a:p>
         </p:txBody>
@@ -2315,7 +2315,7 @@
           <p:cNvPr id="11" name="cover-course">
             <a:extLst xmlns:a="http://schemas.openxmlformats.org/drawingml/2006/main">
               <a:ext uri="{FF2B5EF4-FFF2-40B4-BE49-F238E27FC236}">
-                <a16:creationId xmlns:a16="http://schemas.microsoft.com/office/drawing/2014/main" id="{3C5C71E5-9870-427F-B057-58CF8B14D545}"/>
+                <a16:creationId xmlns:a16="http://schemas.microsoft.com/office/drawing/2014/main" id="{8BB18594-E740-4B59-86EC-FEBC1E92DB2B}"/>
               </a:ext>
             </a:extLst>
           </p:cNvPr>
@@ -2373,7 +2373,7 @@
           <p:cNvPr id="12" name="cover-id">
             <a:extLst xmlns:a="http://schemas.openxmlformats.org/drawingml/2006/main">
               <a:ext uri="{FF2B5EF4-FFF2-40B4-BE49-F238E27FC236}">
-                <a16:creationId xmlns:a16="http://schemas.microsoft.com/office/drawing/2014/main" id="{882ACAC0-61A1-493A-815A-D94D0F74D3FF}"/>
+                <a16:creationId xmlns:a16="http://schemas.microsoft.com/office/drawing/2014/main" id="{105E4DBF-05F1-4AE6-A7AF-EFCAA2E46943}"/>
               </a:ext>
             </a:extLst>
           </p:cNvPr>
@@ -2429,7 +2429,7 @@
     </p:spTree>
     <p:extLst>
       <p:ext uri="{BB962C8B-B14F-4D97-AF65-F5344CB8AC3E}">
-        <p14:creationId xmlns:p14="http://schemas.microsoft.com/office/powerpoint/2010/main" val="2022979331"/>
+        <p14:creationId xmlns:p14="http://schemas.microsoft.com/office/powerpoint/2010/main" val="10836584"/>
       </p:ext>
     </p:extLst>
   </p:cSld>
@@ -2460,7 +2460,7 @@
           <p:cNvPr id="1" name="s10-rule">
             <a:extLst xmlns:a="http://schemas.openxmlformats.org/drawingml/2006/main">
               <a:ext uri="{FF2B5EF4-FFF2-40B4-BE49-F238E27FC236}">
-                <a16:creationId xmlns:a16="http://schemas.microsoft.com/office/drawing/2014/main" id="{5184298F-A84A-48C1-AD41-E7B66055F72A}"/>
+                <a16:creationId xmlns:a16="http://schemas.microsoft.com/office/drawing/2014/main" id="{51B01159-A43D-493E-958E-FE049ADDDE96}"/>
               </a:ext>
             </a:extLst>
           </p:cNvPr>
@@ -2493,7 +2493,7 @@
           <p:cNvPr id="2" name="s10-eyebrow">
             <a:extLst xmlns:a="http://schemas.openxmlformats.org/drawingml/2006/main">
               <a:ext uri="{FF2B5EF4-FFF2-40B4-BE49-F238E27FC236}">
-                <a16:creationId xmlns:a16="http://schemas.microsoft.com/office/drawing/2014/main" id="{A8EA9D69-E368-42BB-B4EE-5DB786172CC4}"/>
+                <a16:creationId xmlns:a16="http://schemas.microsoft.com/office/drawing/2014/main" id="{DEA0CDE2-A4C9-44BF-A36D-607ED9981DBD}"/>
               </a:ext>
             </a:extLst>
           </p:cNvPr>
@@ -2551,7 +2551,7 @@
           <p:cNvPr id="3" name="s10-title">
             <a:extLst xmlns:a="http://schemas.openxmlformats.org/drawingml/2006/main">
               <a:ext uri="{FF2B5EF4-FFF2-40B4-BE49-F238E27FC236}">
-                <a16:creationId xmlns:a16="http://schemas.microsoft.com/office/drawing/2014/main" id="{9DBAD2CA-0FBF-4FFB-90AA-6C3C34CAA22C}"/>
+                <a16:creationId xmlns:a16="http://schemas.microsoft.com/office/drawing/2014/main" id="{750B7EFD-776F-44CF-880C-C09699CC949A}"/>
               </a:ext>
             </a:extLst>
           </p:cNvPr>
@@ -2599,7 +2599,7 @@
                 <a:ea typeface="PingFang SC"/>
                 <a:cs typeface="PingFang SC"/>
               </a:rPr>
-              <a:t>把方法落实为可验证的行动</a:t>
+              <a:t>高校教学与科研：一次可验收练习</a:t>
             </a:r>
           </a:p>
         </p:txBody>
@@ -2609,7 +2609,7 @@
           <p:cNvPr id="4" name="s10-footer">
             <a:extLst xmlns:a="http://schemas.openxmlformats.org/drawingml/2006/main">
               <a:ext uri="{FF2B5EF4-FFF2-40B4-BE49-F238E27FC236}">
-                <a16:creationId xmlns:a16="http://schemas.microsoft.com/office/drawing/2014/main" id="{596C5E11-F5AF-4372-9299-C7256B748B92}"/>
+                <a16:creationId xmlns:a16="http://schemas.microsoft.com/office/drawing/2014/main" id="{0903BF09-3C1D-4379-97BB-D73A568F4DA3}"/>
               </a:ext>
             </a:extLst>
           </p:cNvPr>
@@ -2640,7 +2640,7 @@
           <p:cNvPr id="5" name="s10-identity">
             <a:extLst xmlns:a="http://schemas.openxmlformats.org/drawingml/2006/main">
               <a:ext uri="{FF2B5EF4-FFF2-40B4-BE49-F238E27FC236}">
-                <a16:creationId xmlns:a16="http://schemas.microsoft.com/office/drawing/2014/main" id="{8889B4D1-16F6-4F57-BEBB-D5D1B3DB359B}"/>
+                <a16:creationId xmlns:a16="http://schemas.microsoft.com/office/drawing/2014/main" id="{878F4789-E879-44D9-9B5D-3B835D174FE5}"/>
               </a:ext>
             </a:extLst>
           </p:cNvPr>
@@ -2698,7 +2698,7 @@
           <p:cNvPr id="6" name="practice-circle-0">
             <a:extLst xmlns:a="http://schemas.openxmlformats.org/drawingml/2006/main">
               <a:ext uri="{FF2B5EF4-FFF2-40B4-BE49-F238E27FC236}">
-                <a16:creationId xmlns:a16="http://schemas.microsoft.com/office/drawing/2014/main" id="{E6266D12-9901-4AF6-9AAB-A36EDECCB9DD}"/>
+                <a16:creationId xmlns:a16="http://schemas.microsoft.com/office/drawing/2014/main" id="{4ED2AC00-682F-4199-81D3-D458BA1DF57B}"/>
               </a:ext>
             </a:extLst>
           </p:cNvPr>
@@ -2731,7 +2731,7 @@
           <p:cNvPr id="7" name="practice-number-0">
             <a:extLst xmlns:a="http://schemas.openxmlformats.org/drawingml/2006/main">
               <a:ext uri="{FF2B5EF4-FFF2-40B4-BE49-F238E27FC236}">
-                <a16:creationId xmlns:a16="http://schemas.microsoft.com/office/drawing/2014/main" id="{DF3679AA-A628-4C70-B258-B2A15EF8B7D0}"/>
+                <a16:creationId xmlns:a16="http://schemas.microsoft.com/office/drawing/2014/main" id="{C2A2DBBB-8C3A-4447-8C01-B5F9E2FAF4CE}"/>
               </a:ext>
             </a:extLst>
           </p:cNvPr>
@@ -2789,7 +2789,7 @@
           <p:cNvPr id="8" name="practice-item-0">
             <a:extLst xmlns:a="http://schemas.openxmlformats.org/drawingml/2006/main">
               <a:ext uri="{FF2B5EF4-FFF2-40B4-BE49-F238E27FC236}">
-                <a16:creationId xmlns:a16="http://schemas.microsoft.com/office/drawing/2014/main" id="{F94D1C50-8765-4675-9994-11E402C484FC}"/>
+                <a16:creationId xmlns:a16="http://schemas.microsoft.com/office/drawing/2014/main" id="{5EB66D2D-A804-4A6F-82CB-F8F8E3A46C65}"/>
               </a:ext>
             </a:extLst>
           </p:cNvPr>
@@ -2853,7 +2853,7 @@
           <p:cNvPr id="9" name="practice-connector-0">
             <a:extLst xmlns:a="http://schemas.openxmlformats.org/drawingml/2006/main">
               <a:ext uri="{FF2B5EF4-FFF2-40B4-BE49-F238E27FC236}">
-                <a16:creationId xmlns:a16="http://schemas.microsoft.com/office/drawing/2014/main" id="{6AC3D406-D997-4596-AAA1-82372B5066AB}"/>
+                <a16:creationId xmlns:a16="http://schemas.microsoft.com/office/drawing/2014/main" id="{3A8D6AE6-F855-4906-BACF-C42CAC6E706B}"/>
               </a:ext>
             </a:extLst>
           </p:cNvPr>
@@ -2873,7 +2873,7 @@
           <a:noFill xmlns:a="http://schemas.openxmlformats.org/drawingml/2006/main"/>
           <a:ln xmlns:a="http://schemas.openxmlformats.org/drawingml/2006/main" w="28575">
             <a:solidFill>
-              <a:srgbClr val="E5783F"/>
+              <a:srgbClr val="9A3F16"/>
             </a:solidFill>
             <a:prstDash val="solid"/>
           </a:ln>
@@ -2884,7 +2884,7 @@
           <p:cNvPr id="10" name="practice-circle-1">
             <a:extLst xmlns:a="http://schemas.openxmlformats.org/drawingml/2006/main">
               <a:ext uri="{FF2B5EF4-FFF2-40B4-BE49-F238E27FC236}">
-                <a16:creationId xmlns:a16="http://schemas.microsoft.com/office/drawing/2014/main" id="{B60C94F6-32A6-4B30-A3AC-00139875EC33}"/>
+                <a16:creationId xmlns:a16="http://schemas.microsoft.com/office/drawing/2014/main" id="{21123B31-3D06-4723-BCAA-DE13BC290967}"/>
               </a:ext>
             </a:extLst>
           </p:cNvPr>
@@ -2917,7 +2917,7 @@
           <p:cNvPr id="11" name="practice-number-1">
             <a:extLst xmlns:a="http://schemas.openxmlformats.org/drawingml/2006/main">
               <a:ext uri="{FF2B5EF4-FFF2-40B4-BE49-F238E27FC236}">
-                <a16:creationId xmlns:a16="http://schemas.microsoft.com/office/drawing/2014/main" id="{BA8D1E1E-5C45-4778-8DB8-27C8E1EE9944}"/>
+                <a16:creationId xmlns:a16="http://schemas.microsoft.com/office/drawing/2014/main" id="{1AE69A98-2D3B-4574-8EC8-7239859E57C1}"/>
               </a:ext>
             </a:extLst>
           </p:cNvPr>
@@ -2975,7 +2975,7 @@
           <p:cNvPr id="12" name="practice-item-1">
             <a:extLst xmlns:a="http://schemas.openxmlformats.org/drawingml/2006/main">
               <a:ext uri="{FF2B5EF4-FFF2-40B4-BE49-F238E27FC236}">
-                <a16:creationId xmlns:a16="http://schemas.microsoft.com/office/drawing/2014/main" id="{899DFFE2-170B-4938-836C-6DD4F084567B}"/>
+                <a16:creationId xmlns:a16="http://schemas.microsoft.com/office/drawing/2014/main" id="{5E7D564B-37DE-4EFE-B226-160E64FE9160}"/>
               </a:ext>
             </a:extLst>
           </p:cNvPr>
@@ -3039,7 +3039,7 @@
           <p:cNvPr id="13" name="practice-connector-1">
             <a:extLst xmlns:a="http://schemas.openxmlformats.org/drawingml/2006/main">
               <a:ext uri="{FF2B5EF4-FFF2-40B4-BE49-F238E27FC236}">
-                <a16:creationId xmlns:a16="http://schemas.microsoft.com/office/drawing/2014/main" id="{49D470E5-2D1E-425F-ADDD-1A0DCC01E6C0}"/>
+                <a16:creationId xmlns:a16="http://schemas.microsoft.com/office/drawing/2014/main" id="{A41C350B-C80F-4251-8475-A1322E3F1751}"/>
               </a:ext>
             </a:extLst>
           </p:cNvPr>
@@ -3059,7 +3059,7 @@
           <a:noFill xmlns:a="http://schemas.openxmlformats.org/drawingml/2006/main"/>
           <a:ln xmlns:a="http://schemas.openxmlformats.org/drawingml/2006/main" w="28575">
             <a:solidFill>
-              <a:srgbClr val="E5783F"/>
+              <a:srgbClr val="9A3F16"/>
             </a:solidFill>
             <a:prstDash val="solid"/>
           </a:ln>
@@ -3070,7 +3070,7 @@
           <p:cNvPr id="14" name="practice-circle-2">
             <a:extLst xmlns:a="http://schemas.openxmlformats.org/drawingml/2006/main">
               <a:ext uri="{FF2B5EF4-FFF2-40B4-BE49-F238E27FC236}">
-                <a16:creationId xmlns:a16="http://schemas.microsoft.com/office/drawing/2014/main" id="{99C10D95-B939-42EE-8536-F88655F43886}"/>
+                <a16:creationId xmlns:a16="http://schemas.microsoft.com/office/drawing/2014/main" id="{100B4B1C-24DC-456B-AD27-54062AD76F74}"/>
               </a:ext>
             </a:extLst>
           </p:cNvPr>
@@ -3088,7 +3088,7 @@
             <a:avLst/>
           </a:prstGeom>
           <a:solidFill xmlns:a="http://schemas.openxmlformats.org/drawingml/2006/main">
-            <a:srgbClr val="E5783F"/>
+            <a:srgbClr val="9A3F16"/>
           </a:solidFill>
           <a:ln xmlns:a="http://schemas.openxmlformats.org/drawingml/2006/main" w="28575">
             <a:solidFill>
@@ -3103,7 +3103,7 @@
           <p:cNvPr id="15" name="practice-number-2">
             <a:extLst xmlns:a="http://schemas.openxmlformats.org/drawingml/2006/main">
               <a:ext uri="{FF2B5EF4-FFF2-40B4-BE49-F238E27FC236}">
-                <a16:creationId xmlns:a16="http://schemas.microsoft.com/office/drawing/2014/main" id="{AF4B73FD-FA64-418F-9302-7D3125FCE8C7}"/>
+                <a16:creationId xmlns:a16="http://schemas.microsoft.com/office/drawing/2014/main" id="{000DE37D-81CA-4ED7-96A9-35819F03C0C5}"/>
               </a:ext>
             </a:extLst>
           </p:cNvPr>
@@ -3161,7 +3161,7 @@
           <p:cNvPr id="16" name="practice-item-2">
             <a:extLst xmlns:a="http://schemas.openxmlformats.org/drawingml/2006/main">
               <a:ext uri="{FF2B5EF4-FFF2-40B4-BE49-F238E27FC236}">
-                <a16:creationId xmlns:a16="http://schemas.microsoft.com/office/drawing/2014/main" id="{7A32B9BD-346F-4083-987C-6194C28E27FF}"/>
+                <a16:creationId xmlns:a16="http://schemas.microsoft.com/office/drawing/2014/main" id="{F99C05AA-967A-4664-9DC1-314895B2C50E}"/>
               </a:ext>
             </a:extLst>
           </p:cNvPr>
@@ -3185,7 +3185,7 @@
           </a:solidFill>
           <a:ln xmlns:a="http://schemas.openxmlformats.org/drawingml/2006/main" w="19050">
             <a:solidFill>
-              <a:srgbClr val="E5783F"/>
+              <a:srgbClr val="9A3F16"/>
             </a:solidFill>
             <a:prstDash val="solid"/>
           </a:ln>
@@ -3223,7 +3223,7 @@
     </p:spTree>
     <p:extLst>
       <p:ext uri="{BB962C8B-B14F-4D97-AF65-F5344CB8AC3E}">
-        <p14:creationId xmlns:p14="http://schemas.microsoft.com/office/powerpoint/2010/main" val="38758402"/>
+        <p14:creationId xmlns:p14="http://schemas.microsoft.com/office/powerpoint/2010/main" val="1141113071"/>
       </p:ext>
     </p:extLst>
   </p:cSld>
@@ -3254,7 +3254,7 @@
           <p:cNvPr id="1" name="s11-rule">
             <a:extLst xmlns:a="http://schemas.openxmlformats.org/drawingml/2006/main">
               <a:ext uri="{FF2B5EF4-FFF2-40B4-BE49-F238E27FC236}">
-                <a16:creationId xmlns:a16="http://schemas.microsoft.com/office/drawing/2014/main" id="{25CDA3FD-285F-480E-93AC-F3A63C3610E2}"/>
+                <a16:creationId xmlns:a16="http://schemas.microsoft.com/office/drawing/2014/main" id="{0FF87196-0AA3-4DD7-8928-403AB89E8E75}"/>
               </a:ext>
             </a:extLst>
           </p:cNvPr>
@@ -3287,7 +3287,7 @@
           <p:cNvPr id="2" name="s11-eyebrow">
             <a:extLst xmlns:a="http://schemas.openxmlformats.org/drawingml/2006/main">
               <a:ext uri="{FF2B5EF4-FFF2-40B4-BE49-F238E27FC236}">
-                <a16:creationId xmlns:a16="http://schemas.microsoft.com/office/drawing/2014/main" id="{23CEF54B-CF50-47C9-BAC7-CDE1D0FA2656}"/>
+                <a16:creationId xmlns:a16="http://schemas.microsoft.com/office/drawing/2014/main" id="{F11C78E1-65E5-4735-821B-2E3683AEDB8F}"/>
               </a:ext>
             </a:extLst>
           </p:cNvPr>
@@ -3345,7 +3345,7 @@
           <p:cNvPr id="3" name="s11-title">
             <a:extLst xmlns:a="http://schemas.openxmlformats.org/drawingml/2006/main">
               <a:ext uri="{FF2B5EF4-FFF2-40B4-BE49-F238E27FC236}">
-                <a16:creationId xmlns:a16="http://schemas.microsoft.com/office/drawing/2014/main" id="{BC6D044F-F932-4DD8-9185-0716BFD0A776}"/>
+                <a16:creationId xmlns:a16="http://schemas.microsoft.com/office/drawing/2014/main" id="{FBBF43C4-BB92-4A4F-A081-16CA14F565B9}"/>
               </a:ext>
             </a:extLst>
           </p:cNvPr>
@@ -3393,7 +3393,7 @@
                 <a:ea typeface="PingFang SC"/>
                 <a:cs typeface="PingFang SC"/>
               </a:rPr>
-              <a:t>带走三条可复用的判断原则</a:t>
+              <a:t>高校教学与科研：判断时先抓住三点</a:t>
             </a:r>
           </a:p>
         </p:txBody>
@@ -3403,7 +3403,7 @@
           <p:cNvPr id="4" name="s11-footer">
             <a:extLst xmlns:a="http://schemas.openxmlformats.org/drawingml/2006/main">
               <a:ext uri="{FF2B5EF4-FFF2-40B4-BE49-F238E27FC236}">
-                <a16:creationId xmlns:a16="http://schemas.microsoft.com/office/drawing/2014/main" id="{7D4614D2-14D7-4FB7-A073-D293C940C499}"/>
+                <a16:creationId xmlns:a16="http://schemas.microsoft.com/office/drawing/2014/main" id="{B98DB1FC-BE3E-4F37-A5ED-F27802B397D5}"/>
               </a:ext>
             </a:extLst>
           </p:cNvPr>
@@ -3434,7 +3434,7 @@
           <p:cNvPr id="5" name="s11-identity">
             <a:extLst xmlns:a="http://schemas.openxmlformats.org/drawingml/2006/main">
               <a:ext uri="{FF2B5EF4-FFF2-40B4-BE49-F238E27FC236}">
-                <a16:creationId xmlns:a16="http://schemas.microsoft.com/office/drawing/2014/main" id="{548F2FA1-58E6-42E0-9E03-24AAA1EBD3DF}"/>
+                <a16:creationId xmlns:a16="http://schemas.microsoft.com/office/drawing/2014/main" id="{D0E725F3-F393-46A6-91B6-08353763F462}"/>
               </a:ext>
             </a:extLst>
           </p:cNvPr>
@@ -3492,7 +3492,7 @@
           <p:cNvPr id="6" name="recap-circle-0">
             <a:extLst xmlns:a="http://schemas.openxmlformats.org/drawingml/2006/main">
               <a:ext uri="{FF2B5EF4-FFF2-40B4-BE49-F238E27FC236}">
-                <a16:creationId xmlns:a16="http://schemas.microsoft.com/office/drawing/2014/main" id="{4FDA2BEC-64BB-4265-81C6-E7297AFFF6C5}"/>
+                <a16:creationId xmlns:a16="http://schemas.microsoft.com/office/drawing/2014/main" id="{A78BF569-8DDE-42D3-BA25-2EC07BF162A4}"/>
               </a:ext>
             </a:extLst>
           </p:cNvPr>
@@ -3525,7 +3525,7 @@
           <p:cNvPr id="7" name="recap-number-0">
             <a:extLst xmlns:a="http://schemas.openxmlformats.org/drawingml/2006/main">
               <a:ext uri="{FF2B5EF4-FFF2-40B4-BE49-F238E27FC236}">
-                <a16:creationId xmlns:a16="http://schemas.microsoft.com/office/drawing/2014/main" id="{E7144146-CF6E-4504-87AC-18F9D88D62F9}"/>
+                <a16:creationId xmlns:a16="http://schemas.microsoft.com/office/drawing/2014/main" id="{89C8B96C-5116-4D4B-966D-094DC7E270E4}"/>
               </a:ext>
             </a:extLst>
           </p:cNvPr>
@@ -3583,7 +3583,7 @@
           <p:cNvPr id="8" name="recap-item-0">
             <a:extLst xmlns:a="http://schemas.openxmlformats.org/drawingml/2006/main">
               <a:ext uri="{FF2B5EF4-FFF2-40B4-BE49-F238E27FC236}">
-                <a16:creationId xmlns:a16="http://schemas.microsoft.com/office/drawing/2014/main" id="{27B572BD-4FC1-453D-A5B9-536C50B9B13C}"/>
+                <a16:creationId xmlns:a16="http://schemas.microsoft.com/office/drawing/2014/main" id="{6D1EE3A5-2699-4B4C-B39C-8358465A7EC7}"/>
               </a:ext>
             </a:extLst>
           </p:cNvPr>
@@ -3647,7 +3647,7 @@
           <p:cNvPr id="9" name="recap-connector-0">
             <a:extLst xmlns:a="http://schemas.openxmlformats.org/drawingml/2006/main">
               <a:ext uri="{FF2B5EF4-FFF2-40B4-BE49-F238E27FC236}">
-                <a16:creationId xmlns:a16="http://schemas.microsoft.com/office/drawing/2014/main" id="{D30E8A4E-242E-47F1-BE08-36BD34B7928C}"/>
+                <a16:creationId xmlns:a16="http://schemas.microsoft.com/office/drawing/2014/main" id="{4AED9580-9E15-4FDF-BACF-BE2DE6D6A8FB}"/>
               </a:ext>
             </a:extLst>
           </p:cNvPr>
@@ -3667,7 +3667,7 @@
           <a:noFill xmlns:a="http://schemas.openxmlformats.org/drawingml/2006/main"/>
           <a:ln xmlns:a="http://schemas.openxmlformats.org/drawingml/2006/main" w="28575">
             <a:solidFill>
-              <a:srgbClr val="E5783F"/>
+              <a:srgbClr val="9A3F16"/>
             </a:solidFill>
             <a:prstDash val="solid"/>
           </a:ln>
@@ -3678,7 +3678,7 @@
           <p:cNvPr id="10" name="recap-circle-1">
             <a:extLst xmlns:a="http://schemas.openxmlformats.org/drawingml/2006/main">
               <a:ext uri="{FF2B5EF4-FFF2-40B4-BE49-F238E27FC236}">
-                <a16:creationId xmlns:a16="http://schemas.microsoft.com/office/drawing/2014/main" id="{DA0C7997-D267-4098-9225-E0FA124AC206}"/>
+                <a16:creationId xmlns:a16="http://schemas.microsoft.com/office/drawing/2014/main" id="{B4463250-69B3-483F-9DF5-AC2610AB0C31}"/>
               </a:ext>
             </a:extLst>
           </p:cNvPr>
@@ -3711,7 +3711,7 @@
           <p:cNvPr id="11" name="recap-number-1">
             <a:extLst xmlns:a="http://schemas.openxmlformats.org/drawingml/2006/main">
               <a:ext uri="{FF2B5EF4-FFF2-40B4-BE49-F238E27FC236}">
-                <a16:creationId xmlns:a16="http://schemas.microsoft.com/office/drawing/2014/main" id="{66EEE8D9-8ED4-494E-9C40-42B04FB432A1}"/>
+                <a16:creationId xmlns:a16="http://schemas.microsoft.com/office/drawing/2014/main" id="{6ECD1A80-E784-4E69-BB91-43F6788EC9C5}"/>
               </a:ext>
             </a:extLst>
           </p:cNvPr>
@@ -3769,7 +3769,7 @@
           <p:cNvPr id="12" name="recap-item-1">
             <a:extLst xmlns:a="http://schemas.openxmlformats.org/drawingml/2006/main">
               <a:ext uri="{FF2B5EF4-FFF2-40B4-BE49-F238E27FC236}">
-                <a16:creationId xmlns:a16="http://schemas.microsoft.com/office/drawing/2014/main" id="{F7C9E882-40D0-46DB-9F88-4CF94CE464EE}"/>
+                <a16:creationId xmlns:a16="http://schemas.microsoft.com/office/drawing/2014/main" id="{10497790-C653-4A47-B668-572FED78CF03}"/>
               </a:ext>
             </a:extLst>
           </p:cNvPr>
@@ -3833,7 +3833,7 @@
           <p:cNvPr id="13" name="recap-connector-1">
             <a:extLst xmlns:a="http://schemas.openxmlformats.org/drawingml/2006/main">
               <a:ext uri="{FF2B5EF4-FFF2-40B4-BE49-F238E27FC236}">
-                <a16:creationId xmlns:a16="http://schemas.microsoft.com/office/drawing/2014/main" id="{FF15A1D0-CF4E-4686-B93C-94809F430F7F}"/>
+                <a16:creationId xmlns:a16="http://schemas.microsoft.com/office/drawing/2014/main" id="{510107D7-EF7B-4309-8796-ADDE6008C2B0}"/>
               </a:ext>
             </a:extLst>
           </p:cNvPr>
@@ -3853,7 +3853,7 @@
           <a:noFill xmlns:a="http://schemas.openxmlformats.org/drawingml/2006/main"/>
           <a:ln xmlns:a="http://schemas.openxmlformats.org/drawingml/2006/main" w="28575">
             <a:solidFill>
-              <a:srgbClr val="E5783F"/>
+              <a:srgbClr val="9A3F16"/>
             </a:solidFill>
             <a:prstDash val="solid"/>
           </a:ln>
@@ -3864,7 +3864,7 @@
           <p:cNvPr id="14" name="recap-circle-2">
             <a:extLst xmlns:a="http://schemas.openxmlformats.org/drawingml/2006/main">
               <a:ext uri="{FF2B5EF4-FFF2-40B4-BE49-F238E27FC236}">
-                <a16:creationId xmlns:a16="http://schemas.microsoft.com/office/drawing/2014/main" id="{69755ACA-FE46-4A13-BC87-52E467E84569}"/>
+                <a16:creationId xmlns:a16="http://schemas.microsoft.com/office/drawing/2014/main" id="{A83988EF-73CF-419E-B6DC-CC2D5115E0C4}"/>
               </a:ext>
             </a:extLst>
           </p:cNvPr>
@@ -3882,7 +3882,7 @@
             <a:avLst/>
           </a:prstGeom>
           <a:solidFill xmlns:a="http://schemas.openxmlformats.org/drawingml/2006/main">
-            <a:srgbClr val="E5783F"/>
+            <a:srgbClr val="9A3F16"/>
           </a:solidFill>
           <a:ln xmlns:a="http://schemas.openxmlformats.org/drawingml/2006/main" w="28575">
             <a:solidFill>
@@ -3897,7 +3897,7 @@
           <p:cNvPr id="15" name="recap-number-2">
             <a:extLst xmlns:a="http://schemas.openxmlformats.org/drawingml/2006/main">
               <a:ext uri="{FF2B5EF4-FFF2-40B4-BE49-F238E27FC236}">
-                <a16:creationId xmlns:a16="http://schemas.microsoft.com/office/drawing/2014/main" id="{6C877115-507E-46B4-B6DE-98EC5773F2BD}"/>
+                <a16:creationId xmlns:a16="http://schemas.microsoft.com/office/drawing/2014/main" id="{B9992ECB-82F0-4C81-96C9-B7388EB19605}"/>
               </a:ext>
             </a:extLst>
           </p:cNvPr>
@@ -3955,7 +3955,7 @@
           <p:cNvPr id="16" name="recap-item-2">
             <a:extLst xmlns:a="http://schemas.openxmlformats.org/drawingml/2006/main">
               <a:ext uri="{FF2B5EF4-FFF2-40B4-BE49-F238E27FC236}">
-                <a16:creationId xmlns:a16="http://schemas.microsoft.com/office/drawing/2014/main" id="{70BF6928-A572-4BBA-89D8-587F0AFE013B}"/>
+                <a16:creationId xmlns:a16="http://schemas.microsoft.com/office/drawing/2014/main" id="{4D90ACB0-AB5F-4629-AF43-DE71D51DB8AC}"/>
               </a:ext>
             </a:extLst>
           </p:cNvPr>
@@ -3979,7 +3979,7 @@
           </a:solidFill>
           <a:ln xmlns:a="http://schemas.openxmlformats.org/drawingml/2006/main" w="19050">
             <a:solidFill>
-              <a:srgbClr val="E5783F"/>
+              <a:srgbClr val="9A3F16"/>
             </a:solidFill>
             <a:prstDash val="solid"/>
           </a:ln>
@@ -4009,7 +4009,7 @@
                 <a:ea typeface="PingFang SC"/>
                 <a:cs typeface="PingFang SC"/>
               </a:rPr>
-              <a:t>不同学校、课程、期刊和资助机构对 AI 使用的规则可能不同</a:t>
+              <a:t>AI 使用规则因学校、课程与交付场景而异</a:t>
             </a:r>
           </a:p>
         </p:txBody>
@@ -4017,7 +4017,7 @@
     </p:spTree>
     <p:extLst>
       <p:ext uri="{BB962C8B-B14F-4D97-AF65-F5344CB8AC3E}">
-        <p14:creationId xmlns:p14="http://schemas.microsoft.com/office/powerpoint/2010/main" val="840882330"/>
+        <p14:creationId xmlns:p14="http://schemas.microsoft.com/office/powerpoint/2010/main" val="1919789317"/>
       </p:ext>
     </p:extLst>
   </p:cSld>
@@ -4048,7 +4048,7 @@
           <p:cNvPr id="1" name="s12-rule">
             <a:extLst xmlns:a="http://schemas.openxmlformats.org/drawingml/2006/main">
               <a:ext uri="{FF2B5EF4-FFF2-40B4-BE49-F238E27FC236}">
-                <a16:creationId xmlns:a16="http://schemas.microsoft.com/office/drawing/2014/main" id="{F52CC413-139D-433B-BB98-4DB50FB008AB}"/>
+                <a16:creationId xmlns:a16="http://schemas.microsoft.com/office/drawing/2014/main" id="{F98E6445-C0B2-42A7-8752-1F0D633304B5}"/>
               </a:ext>
             </a:extLst>
           </p:cNvPr>
@@ -4081,7 +4081,7 @@
           <p:cNvPr id="2" name="s12-eyebrow">
             <a:extLst xmlns:a="http://schemas.openxmlformats.org/drawingml/2006/main">
               <a:ext uri="{FF2B5EF4-FFF2-40B4-BE49-F238E27FC236}">
-                <a16:creationId xmlns:a16="http://schemas.microsoft.com/office/drawing/2014/main" id="{54A8C3CC-B5C0-4AC0-9628-1C12D34510B0}"/>
+                <a16:creationId xmlns:a16="http://schemas.microsoft.com/office/drawing/2014/main" id="{B94CE64E-1829-4912-B16B-4A57D3298345}"/>
               </a:ext>
             </a:extLst>
           </p:cNvPr>
@@ -4139,7 +4139,7 @@
           <p:cNvPr id="3" name="s12-title">
             <a:extLst xmlns:a="http://schemas.openxmlformats.org/drawingml/2006/main">
               <a:ext uri="{FF2B5EF4-FFF2-40B4-BE49-F238E27FC236}">
-                <a16:creationId xmlns:a16="http://schemas.microsoft.com/office/drawing/2014/main" id="{BBC7CB78-AE36-44F9-884A-785C803F0529}"/>
+                <a16:creationId xmlns:a16="http://schemas.microsoft.com/office/drawing/2014/main" id="{D3BD8FB5-7FDE-449C-A169-155A87255181}"/>
               </a:ext>
             </a:extLst>
           </p:cNvPr>
@@ -4187,7 +4187,7 @@
                 <a:ea typeface="PingFang SC"/>
                 <a:cs typeface="PingFang SC"/>
               </a:rPr>
-              <a:t>从公开重制课件回到可核对的学习资料</a:t>
+              <a:t>高校教学与科研：依据、边界与延伸</a:t>
             </a:r>
           </a:p>
         </p:txBody>
@@ -4197,7 +4197,7 @@
           <p:cNvPr id="4" name="s12-footer">
             <a:extLst xmlns:a="http://schemas.openxmlformats.org/drawingml/2006/main">
               <a:ext uri="{FF2B5EF4-FFF2-40B4-BE49-F238E27FC236}">
-                <a16:creationId xmlns:a16="http://schemas.microsoft.com/office/drawing/2014/main" id="{62C5B375-8409-40FA-9B21-715AE4E36FE1}"/>
+                <a16:creationId xmlns:a16="http://schemas.microsoft.com/office/drawing/2014/main" id="{C6FEC910-24F1-4BF7-B73F-7F5393A9AB49}"/>
               </a:ext>
             </a:extLst>
           </p:cNvPr>
@@ -4228,7 +4228,7 @@
           <p:cNvPr id="5" name="s12-identity">
             <a:extLst xmlns:a="http://schemas.openxmlformats.org/drawingml/2006/main">
               <a:ext uri="{FF2B5EF4-FFF2-40B4-BE49-F238E27FC236}">
-                <a16:creationId xmlns:a16="http://schemas.microsoft.com/office/drawing/2014/main" id="{C6482599-A04A-4A97-BE2C-053D345B2516}"/>
+                <a16:creationId xmlns:a16="http://schemas.microsoft.com/office/drawing/2014/main" id="{37170F0F-95DD-4182-B839-D52C0110B6E1}"/>
               </a:ext>
             </a:extLst>
           </p:cNvPr>
@@ -4286,7 +4286,7 @@
           <p:cNvPr id="6" name="source-0">
             <a:extLst xmlns:a="http://schemas.openxmlformats.org/drawingml/2006/main">
               <a:ext uri="{FF2B5EF4-FFF2-40B4-BE49-F238E27FC236}">
-                <a16:creationId xmlns:a16="http://schemas.microsoft.com/office/drawing/2014/main" id="{17B3231D-1D78-40CC-9600-6F87F7842974}"/>
+                <a16:creationId xmlns:a16="http://schemas.microsoft.com/office/drawing/2014/main" id="{173DEA55-0BDD-4F44-84E2-BD8E40E4096E}"/>
               </a:ext>
             </a:extLst>
           </p:cNvPr>
@@ -4310,7 +4310,7 @@
           </a:solidFill>
           <a:ln xmlns:a="http://schemas.openxmlformats.org/drawingml/2006/main" w="9525">
             <a:solidFill>
-              <a:srgbClr val="E5783F"/>
+              <a:srgbClr val="9A3F16"/>
             </a:solidFill>
             <a:prstDash val="solid"/>
           </a:ln>
@@ -4350,7 +4350,7 @@
           <p:cNvPr id="7" name="source-1">
             <a:extLst xmlns:a="http://schemas.openxmlformats.org/drawingml/2006/main">
               <a:ext uri="{FF2B5EF4-FFF2-40B4-BE49-F238E27FC236}">
-                <a16:creationId xmlns:a16="http://schemas.microsoft.com/office/drawing/2014/main" id="{D849E755-04BC-4356-8BBA-3C9BE9127DEE}"/>
+                <a16:creationId xmlns:a16="http://schemas.microsoft.com/office/drawing/2014/main" id="{A0906979-1AE2-4308-8D7B-67D08B84A743}"/>
               </a:ext>
             </a:extLst>
           </p:cNvPr>
@@ -4414,7 +4414,7 @@
           <p:cNvPr id="8" name="source-2">
             <a:extLst xmlns:a="http://schemas.openxmlformats.org/drawingml/2006/main">
               <a:ext uri="{FF2B5EF4-FFF2-40B4-BE49-F238E27FC236}">
-                <a16:creationId xmlns:a16="http://schemas.microsoft.com/office/drawing/2014/main" id="{AEAB320C-0DB5-42C7-AE47-7CE78731FE43}"/>
+                <a16:creationId xmlns:a16="http://schemas.microsoft.com/office/drawing/2014/main" id="{F40BB57F-363E-4C06-B1F2-66460B53F628}"/>
               </a:ext>
             </a:extLst>
           </p:cNvPr>
@@ -4478,7 +4478,7 @@
           <p:cNvPr id="9" name="source-3">
             <a:extLst xmlns:a="http://schemas.openxmlformats.org/drawingml/2006/main">
               <a:ext uri="{FF2B5EF4-FFF2-40B4-BE49-F238E27FC236}">
-                <a16:creationId xmlns:a16="http://schemas.microsoft.com/office/drawing/2014/main" id="{BFB5C154-3A2A-4AA1-8034-5FB1D255150C}"/>
+                <a16:creationId xmlns:a16="http://schemas.microsoft.com/office/drawing/2014/main" id="{94C332EB-7564-41BF-8B1F-547F03B3407D}"/>
               </a:ext>
             </a:extLst>
           </p:cNvPr>
@@ -4542,7 +4542,7 @@
           <p:cNvPr id="10" name="s12-takeaway-rule">
             <a:extLst xmlns:a="http://schemas.openxmlformats.org/drawingml/2006/main">
               <a:ext uri="{FF2B5EF4-FFF2-40B4-BE49-F238E27FC236}">
-                <a16:creationId xmlns:a16="http://schemas.microsoft.com/office/drawing/2014/main" id="{8A3FBB32-6856-460D-8AEC-88309E488470}"/>
+                <a16:creationId xmlns:a16="http://schemas.microsoft.com/office/drawing/2014/main" id="{E3306A5F-1C63-4284-8CC6-E1C3910E5B48}"/>
               </a:ext>
             </a:extLst>
           </p:cNvPr>
@@ -4575,7 +4575,7 @@
           <p:cNvPr id="11" name="s12-takeaway">
             <a:extLst xmlns:a="http://schemas.openxmlformats.org/drawingml/2006/main">
               <a:ext uri="{FF2B5EF4-FFF2-40B4-BE49-F238E27FC236}">
-                <a16:creationId xmlns:a16="http://schemas.microsoft.com/office/drawing/2014/main" id="{CD0177FE-A521-4466-9FD9-4B83DF3D9DFD}"/>
+                <a16:creationId xmlns:a16="http://schemas.microsoft.com/office/drawing/2014/main" id="{537A492C-E393-4177-BF9E-5C948AE5F52E}"/>
               </a:ext>
             </a:extLst>
           </p:cNvPr>
@@ -4631,7 +4631,7 @@
     </p:spTree>
     <p:extLst>
       <p:ext uri="{BB962C8B-B14F-4D97-AF65-F5344CB8AC3E}">
-        <p14:creationId xmlns:p14="http://schemas.microsoft.com/office/powerpoint/2010/main" val="2016043438"/>
+        <p14:creationId xmlns:p14="http://schemas.microsoft.com/office/powerpoint/2010/main" val="1885095283"/>
       </p:ext>
     </p:extLst>
   </p:cSld>
@@ -4662,7 +4662,7 @@
           <p:cNvPr id="1" name="s2-rule">
             <a:extLst xmlns:a="http://schemas.openxmlformats.org/drawingml/2006/main">
               <a:ext uri="{FF2B5EF4-FFF2-40B4-BE49-F238E27FC236}">
-                <a16:creationId xmlns:a16="http://schemas.microsoft.com/office/drawing/2014/main" id="{96627683-1659-4E5A-9BFD-DD77AA31EDA5}"/>
+                <a16:creationId xmlns:a16="http://schemas.microsoft.com/office/drawing/2014/main" id="{4B1A0175-CEC0-4848-84A6-A3C7F479DA7D}"/>
               </a:ext>
             </a:extLst>
           </p:cNvPr>
@@ -4695,7 +4695,7 @@
           <p:cNvPr id="2" name="s2-eyebrow">
             <a:extLst xmlns:a="http://schemas.openxmlformats.org/drawingml/2006/main">
               <a:ext uri="{FF2B5EF4-FFF2-40B4-BE49-F238E27FC236}">
-                <a16:creationId xmlns:a16="http://schemas.microsoft.com/office/drawing/2014/main" id="{FE5DD405-EE47-4ED7-95B2-1A365C0D1727}"/>
+                <a16:creationId xmlns:a16="http://schemas.microsoft.com/office/drawing/2014/main" id="{1A7849F0-71F9-4E15-906D-3A14E2E82B88}"/>
               </a:ext>
             </a:extLst>
           </p:cNvPr>
@@ -4753,7 +4753,7 @@
           <p:cNvPr id="3" name="s2-title">
             <a:extLst xmlns:a="http://schemas.openxmlformats.org/drawingml/2006/main">
               <a:ext uri="{FF2B5EF4-FFF2-40B4-BE49-F238E27FC236}">
-                <a16:creationId xmlns:a16="http://schemas.microsoft.com/office/drawing/2014/main" id="{ED9B7BEE-A07B-429B-9AB1-F4756346055D}"/>
+                <a16:creationId xmlns:a16="http://schemas.microsoft.com/office/drawing/2014/main" id="{5C86B859-46E3-4BD1-8141-E838B5B23D0D}"/>
               </a:ext>
             </a:extLst>
           </p:cNvPr>
@@ -4801,7 +4801,7 @@
                 <a:ea typeface="PingFang SC"/>
                 <a:cs typeface="PingFang SC"/>
               </a:rPr>
-              <a:t>学完这一节，你能完成这些判断与行动</a:t>
+              <a:t>高校教学与科研：4项学习结果</a:t>
             </a:r>
           </a:p>
         </p:txBody>
@@ -4811,7 +4811,7 @@
           <p:cNvPr id="4" name="s2-footer">
             <a:extLst xmlns:a="http://schemas.openxmlformats.org/drawingml/2006/main">
               <a:ext uri="{FF2B5EF4-FFF2-40B4-BE49-F238E27FC236}">
-                <a16:creationId xmlns:a16="http://schemas.microsoft.com/office/drawing/2014/main" id="{CB8AF36E-4B46-4865-97EC-09C8D9EEAEFF}"/>
+                <a16:creationId xmlns:a16="http://schemas.microsoft.com/office/drawing/2014/main" id="{607AAF1B-21A4-4C12-8E6E-888D410036B5}"/>
               </a:ext>
             </a:extLst>
           </p:cNvPr>
@@ -4842,7 +4842,7 @@
           <p:cNvPr id="5" name="s2-identity">
             <a:extLst xmlns:a="http://schemas.openxmlformats.org/drawingml/2006/main">
               <a:ext uri="{FF2B5EF4-FFF2-40B4-BE49-F238E27FC236}">
-                <a16:creationId xmlns:a16="http://schemas.microsoft.com/office/drawing/2014/main" id="{FA4C93E7-3A00-4AEE-8087-A01D1A4B6F9C}"/>
+                <a16:creationId xmlns:a16="http://schemas.microsoft.com/office/drawing/2014/main" id="{910C66CF-AD59-4F5C-B18E-B44C35A8CC21}"/>
               </a:ext>
             </a:extLst>
           </p:cNvPr>
@@ -4900,7 +4900,7 @@
           <p:cNvPr id="6" name="objective-1">
             <a:extLst xmlns:a="http://schemas.openxmlformats.org/drawingml/2006/main">
               <a:ext uri="{FF2B5EF4-FFF2-40B4-BE49-F238E27FC236}">
-                <a16:creationId xmlns:a16="http://schemas.microsoft.com/office/drawing/2014/main" id="{102E6122-9A7D-4CDC-8E7A-0240A5AD7B8A}"/>
+                <a16:creationId xmlns:a16="http://schemas.microsoft.com/office/drawing/2014/main" id="{3B08D7D9-D286-4D24-B2FB-169B83F356D3}"/>
               </a:ext>
             </a:extLst>
           </p:cNvPr>
@@ -4987,7 +4987,7 @@
           <p:cNvPr id="7" name="objective-2">
             <a:extLst xmlns:a="http://schemas.openxmlformats.org/drawingml/2006/main">
               <a:ext uri="{FF2B5EF4-FFF2-40B4-BE49-F238E27FC236}">
-                <a16:creationId xmlns:a16="http://schemas.microsoft.com/office/drawing/2014/main" id="{BF1382D5-6C2C-4CB2-8570-15EE12641AFA}"/>
+                <a16:creationId xmlns:a16="http://schemas.microsoft.com/office/drawing/2014/main" id="{12DDCF4B-A2F2-409A-A4C7-00B160C25A91}"/>
               </a:ext>
             </a:extLst>
           </p:cNvPr>
@@ -5074,7 +5074,7 @@
           <p:cNvPr id="8" name="objective-3">
             <a:extLst xmlns:a="http://schemas.openxmlformats.org/drawingml/2006/main">
               <a:ext uri="{FF2B5EF4-FFF2-40B4-BE49-F238E27FC236}">
-                <a16:creationId xmlns:a16="http://schemas.microsoft.com/office/drawing/2014/main" id="{CCA136BC-6297-43B3-A81D-211624F9CEFF}"/>
+                <a16:creationId xmlns:a16="http://schemas.microsoft.com/office/drawing/2014/main" id="{0B1FD452-D35A-4BE2-8BC9-B76318E7C65F}"/>
               </a:ext>
             </a:extLst>
           </p:cNvPr>
@@ -5161,7 +5161,7 @@
           <p:cNvPr id="9" name="objective-4">
             <a:extLst xmlns:a="http://schemas.openxmlformats.org/drawingml/2006/main">
               <a:ext uri="{FF2B5EF4-FFF2-40B4-BE49-F238E27FC236}">
-                <a16:creationId xmlns:a16="http://schemas.microsoft.com/office/drawing/2014/main" id="{79F81B1B-AD00-4A0B-AF28-8A4B8CDE19CC}"/>
+                <a16:creationId xmlns:a16="http://schemas.microsoft.com/office/drawing/2014/main" id="{AC348C58-811A-4D88-9856-15E91B5A67F1}"/>
               </a:ext>
             </a:extLst>
           </p:cNvPr>
@@ -5185,7 +5185,7 @@
           </a:solidFill>
           <a:ln xmlns:a="http://schemas.openxmlformats.org/drawingml/2006/main" w="19050">
             <a:solidFill>
-              <a:srgbClr val="E5783F"/>
+              <a:srgbClr val="9A3F16"/>
             </a:solidFill>
             <a:prstDash val="solid"/>
           </a:ln>
@@ -5246,7 +5246,7 @@
     </p:spTree>
     <p:extLst>
       <p:ext uri="{BB962C8B-B14F-4D97-AF65-F5344CB8AC3E}">
-        <p14:creationId xmlns:p14="http://schemas.microsoft.com/office/powerpoint/2010/main" val="518972136"/>
+        <p14:creationId xmlns:p14="http://schemas.microsoft.com/office/powerpoint/2010/main" val="561244598"/>
       </p:ext>
     </p:extLst>
   </p:cSld>
@@ -5277,7 +5277,7 @@
           <p:cNvPr id="1" name="s3-rule">
             <a:extLst xmlns:a="http://schemas.openxmlformats.org/drawingml/2006/main">
               <a:ext uri="{FF2B5EF4-FFF2-40B4-BE49-F238E27FC236}">
-                <a16:creationId xmlns:a16="http://schemas.microsoft.com/office/drawing/2014/main" id="{9DABF336-11E7-44BE-898E-EC651F1CE108}"/>
+                <a16:creationId xmlns:a16="http://schemas.microsoft.com/office/drawing/2014/main" id="{121067E2-6336-4DD6-983F-1A8ED53ABD27}"/>
               </a:ext>
             </a:extLst>
           </p:cNvPr>
@@ -5310,7 +5310,7 @@
           <p:cNvPr id="2" name="s3-eyebrow">
             <a:extLst xmlns:a="http://schemas.openxmlformats.org/drawingml/2006/main">
               <a:ext uri="{FF2B5EF4-FFF2-40B4-BE49-F238E27FC236}">
-                <a16:creationId xmlns:a16="http://schemas.microsoft.com/office/drawing/2014/main" id="{71501FC5-7692-45AD-96DD-4175453BE3C3}"/>
+                <a16:creationId xmlns:a16="http://schemas.microsoft.com/office/drawing/2014/main" id="{6509E9A8-3A6F-40ED-823C-1C56AA6C0CE4}"/>
               </a:ext>
             </a:extLst>
           </p:cNvPr>
@@ -5368,7 +5368,7 @@
           <p:cNvPr id="3" name="s3-title">
             <a:extLst xmlns:a="http://schemas.openxmlformats.org/drawingml/2006/main">
               <a:ext uri="{FF2B5EF4-FFF2-40B4-BE49-F238E27FC236}">
-                <a16:creationId xmlns:a16="http://schemas.microsoft.com/office/drawing/2014/main" id="{69F11109-9DAD-43B3-878D-1F3AC1F12B9C}"/>
+                <a16:creationId xmlns:a16="http://schemas.microsoft.com/office/drawing/2014/main" id="{355DA54D-9EEF-4BA0-BBE5-D60FF698FD84}"/>
               </a:ext>
             </a:extLst>
           </p:cNvPr>
@@ -5426,7 +5426,7 @@
           <p:cNvPr id="4" name="s3-footer">
             <a:extLst xmlns:a="http://schemas.openxmlformats.org/drawingml/2006/main">
               <a:ext uri="{FF2B5EF4-FFF2-40B4-BE49-F238E27FC236}">
-                <a16:creationId xmlns:a16="http://schemas.microsoft.com/office/drawing/2014/main" id="{8701C9E1-3798-4113-B262-6AA2CAA4FC73}"/>
+                <a16:creationId xmlns:a16="http://schemas.microsoft.com/office/drawing/2014/main" id="{A5118215-9F60-4451-9C18-2C69B7B564D4}"/>
               </a:ext>
             </a:extLst>
           </p:cNvPr>
@@ -5457,7 +5457,7 @@
           <p:cNvPr id="5" name="s3-identity">
             <a:extLst xmlns:a="http://schemas.openxmlformats.org/drawingml/2006/main">
               <a:ext uri="{FF2B5EF4-FFF2-40B4-BE49-F238E27FC236}">
-                <a16:creationId xmlns:a16="http://schemas.microsoft.com/office/drawing/2014/main" id="{BB28944D-039D-4FC8-8B69-0C064F8B360C}"/>
+                <a16:creationId xmlns:a16="http://schemas.microsoft.com/office/drawing/2014/main" id="{DFE24633-8BE0-41F0-A9FB-80841AE22925}"/>
               </a:ext>
             </a:extLst>
           </p:cNvPr>
@@ -5515,7 +5515,7 @@
           <p:cNvPr id="6" name="core-no-0">
             <a:extLst xmlns:a="http://schemas.openxmlformats.org/drawingml/2006/main">
               <a:ext uri="{FF2B5EF4-FFF2-40B4-BE49-F238E27FC236}">
-                <a16:creationId xmlns:a16="http://schemas.microsoft.com/office/drawing/2014/main" id="{1C224271-E82F-4911-8410-83BF6A4CE35F}"/>
+                <a16:creationId xmlns:a16="http://schemas.microsoft.com/office/drawing/2014/main" id="{7E8828F4-4AB6-4E26-9A72-784C3AA7D3EB}"/>
               </a:ext>
             </a:extLst>
           </p:cNvPr>
@@ -5547,7 +5547,7 @@
             <a:pPr algn="l">
               <a:defRPr sz="2250" b="1">
                 <a:solidFill>
-                  <a:srgbClr val="E5783F"/>
+                  <a:srgbClr val="9A3F16"/>
                 </a:solidFill>
                 <a:latin typeface="PingFang SC"/>
                 <a:ea typeface="PingFang SC"/>
@@ -5557,7 +5557,7 @@
             <a:r>
               <a:rPr sz="2250" b="1">
                 <a:solidFill>
-                  <a:srgbClr val="E5783F"/>
+                  <a:srgbClr val="9A3F16"/>
                 </a:solidFill>
                 <a:latin typeface="PingFang SC"/>
                 <a:ea typeface="PingFang SC"/>
@@ -5573,7 +5573,7 @@
           <p:cNvPr id="7" name="core-label-0">
             <a:extLst xmlns:a="http://schemas.openxmlformats.org/drawingml/2006/main">
               <a:ext uri="{FF2B5EF4-FFF2-40B4-BE49-F238E27FC236}">
-                <a16:creationId xmlns:a16="http://schemas.microsoft.com/office/drawing/2014/main" id="{44EC294D-2547-4441-A60C-24C774023247}"/>
+                <a16:creationId xmlns:a16="http://schemas.microsoft.com/office/drawing/2014/main" id="{FE984A42-B406-4FD0-929B-36FE752906C8}"/>
               </a:ext>
             </a:extLst>
           </p:cNvPr>
@@ -5631,7 +5631,7 @@
           <p:cNvPr id="8" name="core-body-0">
             <a:extLst xmlns:a="http://schemas.openxmlformats.org/drawingml/2006/main">
               <a:ext uri="{FF2B5EF4-FFF2-40B4-BE49-F238E27FC236}">
-                <a16:creationId xmlns:a16="http://schemas.microsoft.com/office/drawing/2014/main" id="{BC03582C-16F4-49A1-91C8-2B264791FC11}"/>
+                <a16:creationId xmlns:a16="http://schemas.microsoft.com/office/drawing/2014/main" id="{2EC19516-B1EA-4513-B910-3F55616F8970}"/>
               </a:ext>
             </a:extLst>
           </p:cNvPr>
@@ -5655,14 +5655,14 @@
           </a:solidFill>
           <a:ln xmlns:a="http://schemas.openxmlformats.org/drawingml/2006/main" w="19050">
             <a:solidFill>
-              <a:srgbClr val="E5783F"/>
+              <a:srgbClr val="9A3F16"/>
             </a:solidFill>
             <a:prstDash val="solid"/>
           </a:ln>
         </p:spPr>
         <p:txBody>
           <a:bodyPr xmlns:a="http://schemas.openxmlformats.org/drawingml/2006/main" lIns="152400" tIns="133350" rIns="152400" bIns="133350" anchor="ctr">
-            <a:normAutofit fontScale="76545"/>
+            <a:normAutofit fontScale="89303"/>
           </a:bodyPr>
           <a:lstStyle xmlns:a="http://schemas.openxmlformats.org/drawingml/2006/main"/>
           <a:p xmlns:a="http://schemas.openxmlformats.org/drawingml/2006/main">
@@ -5685,7 +5685,7 @@
                 <a:ea typeface="PingFang SC"/>
                 <a:cs typeface="PingFang SC"/>
               </a:rPr>
-              <a:t>第一步是确定学习目标与评价证据，再让 AI 提供辅助。教师可以输入课程主题、学生基础、课时和可使用资料，请 AI 生成案例、问题梯度或活动草案，但要逐项检查概念是否正确、难度是否合适…</a:t>
+              <a:t>第一步是确定学习目标与评价证据；再让 AI 提供辅助；教师可以输入课程主题、学生基础、课时和可使用资料；请 AI 生成案例、问题梯度或活动草案</a:t>
             </a:r>
           </a:p>
         </p:txBody>
@@ -5695,7 +5695,7 @@
           <p:cNvPr id="9" name="core-no-1">
             <a:extLst xmlns:a="http://schemas.openxmlformats.org/drawingml/2006/main">
               <a:ext uri="{FF2B5EF4-FFF2-40B4-BE49-F238E27FC236}">
-                <a16:creationId xmlns:a16="http://schemas.microsoft.com/office/drawing/2014/main" id="{A117F392-5165-45CF-924C-DE0D778DB6F1}"/>
+                <a16:creationId xmlns:a16="http://schemas.microsoft.com/office/drawing/2014/main" id="{19CF86D0-D9F1-4BA7-9CB1-DA99ED19390C}"/>
               </a:ext>
             </a:extLst>
           </p:cNvPr>
@@ -5727,7 +5727,7 @@
             <a:pPr algn="l">
               <a:defRPr sz="2250" b="1">
                 <a:solidFill>
-                  <a:srgbClr val="E5783F"/>
+                  <a:srgbClr val="9A3F16"/>
                 </a:solidFill>
                 <a:latin typeface="PingFang SC"/>
                 <a:ea typeface="PingFang SC"/>
@@ -5737,7 +5737,7 @@
             <a:r>
               <a:rPr sz="2250" b="1">
                 <a:solidFill>
-                  <a:srgbClr val="E5783F"/>
+                  <a:srgbClr val="9A3F16"/>
                 </a:solidFill>
                 <a:latin typeface="PingFang SC"/>
                 <a:ea typeface="PingFang SC"/>
@@ -5753,7 +5753,7 @@
           <p:cNvPr id="10" name="core-body-1">
             <a:extLst xmlns:a="http://schemas.openxmlformats.org/drawingml/2006/main">
               <a:ext uri="{FF2B5EF4-FFF2-40B4-BE49-F238E27FC236}">
-                <a16:creationId xmlns:a16="http://schemas.microsoft.com/office/drawing/2014/main" id="{3AB6BAC5-921C-4792-8FDD-D1E9D458FFF6}"/>
+                <a16:creationId xmlns:a16="http://schemas.microsoft.com/office/drawing/2014/main" id="{970D36B9-F17B-498C-B578-12CC02647D07}"/>
               </a:ext>
             </a:extLst>
           </p:cNvPr>
@@ -5807,7 +5807,7 @@
                 <a:ea typeface="PingFang SC"/>
                 <a:cs typeface="PingFang SC"/>
               </a:rPr>
-              <a:t>课堂实施前，应保留教师批准的版本并准备无 AI 的替代方案。实施中可以用 AI 汇总匿名问题或生成练习反馈，但不能把模型评分直接当作最终成绩。形成性反馈适合关注“哪里还没有理解…</a:t>
+              <a:t>课堂实施前，应保留教师批准的版本并准备无 AI 的替代方案；实施中可以用 AI 汇总匿名问题或生成练习反馈；但不能把模型评分直接当作最终成绩</a:t>
             </a:r>
           </a:p>
         </p:txBody>
@@ -5817,7 +5817,7 @@
           <p:cNvPr id="11" name="core-no-2">
             <a:extLst xmlns:a="http://schemas.openxmlformats.org/drawingml/2006/main">
               <a:ext uri="{FF2B5EF4-FFF2-40B4-BE49-F238E27FC236}">
-                <a16:creationId xmlns:a16="http://schemas.microsoft.com/office/drawing/2014/main" id="{33EFC884-EC4B-40BE-9C31-254B59C16474}"/>
+                <a16:creationId xmlns:a16="http://schemas.microsoft.com/office/drawing/2014/main" id="{FB1BA0F5-19BC-4450-AB23-3A481A9FEF31}"/>
               </a:ext>
             </a:extLst>
           </p:cNvPr>
@@ -5849,7 +5849,7 @@
             <a:pPr algn="l">
               <a:defRPr sz="2250" b="1">
                 <a:solidFill>
-                  <a:srgbClr val="E5783F"/>
+                  <a:srgbClr val="9A3F16"/>
                 </a:solidFill>
                 <a:latin typeface="PingFang SC"/>
                 <a:ea typeface="PingFang SC"/>
@@ -5859,7 +5859,7 @@
             <a:r>
               <a:rPr sz="2250" b="1">
                 <a:solidFill>
-                  <a:srgbClr val="E5783F"/>
+                  <a:srgbClr val="9A3F16"/>
                 </a:solidFill>
                 <a:latin typeface="PingFang SC"/>
                 <a:ea typeface="PingFang SC"/>
@@ -5875,7 +5875,7 @@
           <p:cNvPr id="12" name="core-body-2">
             <a:extLst xmlns:a="http://schemas.openxmlformats.org/drawingml/2006/main">
               <a:ext uri="{FF2B5EF4-FFF2-40B4-BE49-F238E27FC236}">
-                <a16:creationId xmlns:a16="http://schemas.microsoft.com/office/drawing/2014/main" id="{1B972F1D-AE7D-4119-B1E1-8919EF5A61DB}"/>
+                <a16:creationId xmlns:a16="http://schemas.microsoft.com/office/drawing/2014/main" id="{C83B683C-637F-40AA-B98F-5B4ED731DE42}"/>
               </a:ext>
             </a:extLst>
           </p:cNvPr>
@@ -5939,7 +5939,7 @@
           <p:cNvPr id="13" name="s3-takeaway-rule">
             <a:extLst xmlns:a="http://schemas.openxmlformats.org/drawingml/2006/main">
               <a:ext uri="{FF2B5EF4-FFF2-40B4-BE49-F238E27FC236}">
-                <a16:creationId xmlns:a16="http://schemas.microsoft.com/office/drawing/2014/main" id="{99014817-A21F-4EDC-A4CF-54D6480D65D0}"/>
+                <a16:creationId xmlns:a16="http://schemas.microsoft.com/office/drawing/2014/main" id="{6F627B29-1745-47E8-8AEA-0238D98B6455}"/>
               </a:ext>
             </a:extLst>
           </p:cNvPr>
@@ -5972,7 +5972,7 @@
           <p:cNvPr id="14" name="s3-takeaway">
             <a:extLst xmlns:a="http://schemas.openxmlformats.org/drawingml/2006/main">
               <a:ext uri="{FF2B5EF4-FFF2-40B4-BE49-F238E27FC236}">
-                <a16:creationId xmlns:a16="http://schemas.microsoft.com/office/drawing/2014/main" id="{FB869666-BD30-42A2-B967-4755771F65CA}"/>
+                <a16:creationId xmlns:a16="http://schemas.microsoft.com/office/drawing/2014/main" id="{BC069BAC-9ED5-4509-9573-C1B4E21A009E}"/>
               </a:ext>
             </a:extLst>
           </p:cNvPr>
@@ -6028,7 +6028,7 @@
     </p:spTree>
     <p:extLst>
       <p:ext uri="{BB962C8B-B14F-4D97-AF65-F5344CB8AC3E}">
-        <p14:creationId xmlns:p14="http://schemas.microsoft.com/office/powerpoint/2010/main" val="1320073518"/>
+        <p14:creationId xmlns:p14="http://schemas.microsoft.com/office/powerpoint/2010/main" val="444549138"/>
       </p:ext>
     </p:extLst>
   </p:cSld>
@@ -6059,7 +6059,7 @@
           <p:cNvPr id="1" name="s4-rule">
             <a:extLst xmlns:a="http://schemas.openxmlformats.org/drawingml/2006/main">
               <a:ext uri="{FF2B5EF4-FFF2-40B4-BE49-F238E27FC236}">
-                <a16:creationId xmlns:a16="http://schemas.microsoft.com/office/drawing/2014/main" id="{C11E11E0-0FD6-43F6-B597-3167E5779E1C}"/>
+                <a16:creationId xmlns:a16="http://schemas.microsoft.com/office/drawing/2014/main" id="{451DC4D2-C7AA-44A5-99EF-32CF63F1F570}"/>
               </a:ext>
             </a:extLst>
           </p:cNvPr>
@@ -6092,7 +6092,7 @@
           <p:cNvPr id="2" name="s4-eyebrow">
             <a:extLst xmlns:a="http://schemas.openxmlformats.org/drawingml/2006/main">
               <a:ext uri="{FF2B5EF4-FFF2-40B4-BE49-F238E27FC236}">
-                <a16:creationId xmlns:a16="http://schemas.microsoft.com/office/drawing/2014/main" id="{57B6663D-573F-4CB0-B502-EE3DF038D5C4}"/>
+                <a16:creationId xmlns:a16="http://schemas.microsoft.com/office/drawing/2014/main" id="{76641E01-CB83-4A91-8066-B511E523F2DD}"/>
               </a:ext>
             </a:extLst>
           </p:cNvPr>
@@ -6150,7 +6150,7 @@
           <p:cNvPr id="3" name="s4-title">
             <a:extLst xmlns:a="http://schemas.openxmlformats.org/drawingml/2006/main">
               <a:ext uri="{FF2B5EF4-FFF2-40B4-BE49-F238E27FC236}">
-                <a16:creationId xmlns:a16="http://schemas.microsoft.com/office/drawing/2014/main" id="{6568E814-6E68-46CC-B4BC-A146FE875405}"/>
+                <a16:creationId xmlns:a16="http://schemas.microsoft.com/office/drawing/2014/main" id="{4E8F590D-951A-40D6-8E70-0A8FB431BF33}"/>
               </a:ext>
             </a:extLst>
           </p:cNvPr>
@@ -6208,7 +6208,7 @@
           <p:cNvPr id="4" name="s4-footer">
             <a:extLst xmlns:a="http://schemas.openxmlformats.org/drawingml/2006/main">
               <a:ext uri="{FF2B5EF4-FFF2-40B4-BE49-F238E27FC236}">
-                <a16:creationId xmlns:a16="http://schemas.microsoft.com/office/drawing/2014/main" id="{F0AA2E58-AEA9-4A40-8BBB-2A025E1A20E2}"/>
+                <a16:creationId xmlns:a16="http://schemas.microsoft.com/office/drawing/2014/main" id="{A11D57E2-7091-4004-9C17-F0600BC6A4C8}"/>
               </a:ext>
             </a:extLst>
           </p:cNvPr>
@@ -6239,7 +6239,7 @@
           <p:cNvPr id="5" name="s4-identity">
             <a:extLst xmlns:a="http://schemas.openxmlformats.org/drawingml/2006/main">
               <a:ext uri="{FF2B5EF4-FFF2-40B4-BE49-F238E27FC236}">
-                <a16:creationId xmlns:a16="http://schemas.microsoft.com/office/drawing/2014/main" id="{4B349A81-0706-41FF-BE78-E10EE1F5BF0E}"/>
+                <a16:creationId xmlns:a16="http://schemas.microsoft.com/office/drawing/2014/main" id="{052C1CF5-7EE2-4D3F-91C5-71DC49F9C23F}"/>
               </a:ext>
             </a:extLst>
           </p:cNvPr>
@@ -6297,7 +6297,7 @@
           <p:cNvPr id="6" name="core-no-0">
             <a:extLst xmlns:a="http://schemas.openxmlformats.org/drawingml/2006/main">
               <a:ext uri="{FF2B5EF4-FFF2-40B4-BE49-F238E27FC236}">
-                <a16:creationId xmlns:a16="http://schemas.microsoft.com/office/drawing/2014/main" id="{F3F43B45-8286-43DC-BB5E-9C7BEF8C1DA2}"/>
+                <a16:creationId xmlns:a16="http://schemas.microsoft.com/office/drawing/2014/main" id="{FDFE2643-BDF4-44AA-BDC6-120137B3A761}"/>
               </a:ext>
             </a:extLst>
           </p:cNvPr>
@@ -6329,7 +6329,7 @@
             <a:pPr algn="l">
               <a:defRPr sz="2250" b="1">
                 <a:solidFill>
-                  <a:srgbClr val="E5783F"/>
+                  <a:srgbClr val="9A3F16"/>
                 </a:solidFill>
                 <a:latin typeface="PingFang SC"/>
                 <a:ea typeface="PingFang SC"/>
@@ -6339,7 +6339,7 @@
             <a:r>
               <a:rPr sz="2250" b="1">
                 <a:solidFill>
-                  <a:srgbClr val="E5783F"/>
+                  <a:srgbClr val="9A3F16"/>
                 </a:solidFill>
                 <a:latin typeface="PingFang SC"/>
                 <a:ea typeface="PingFang SC"/>
@@ -6355,7 +6355,7 @@
           <p:cNvPr id="7" name="core-label-0">
             <a:extLst xmlns:a="http://schemas.openxmlformats.org/drawingml/2006/main">
               <a:ext uri="{FF2B5EF4-FFF2-40B4-BE49-F238E27FC236}">
-                <a16:creationId xmlns:a16="http://schemas.microsoft.com/office/drawing/2014/main" id="{980AD753-8DA1-4EC3-835A-2EA8C5EBAD2C}"/>
+                <a16:creationId xmlns:a16="http://schemas.microsoft.com/office/drawing/2014/main" id="{A1F7A70E-748A-4D83-A262-0F03D6DD4177}"/>
               </a:ext>
             </a:extLst>
           </p:cNvPr>
@@ -6413,7 +6413,7 @@
           <p:cNvPr id="8" name="core-body-0">
             <a:extLst xmlns:a="http://schemas.openxmlformats.org/drawingml/2006/main">
               <a:ext uri="{FF2B5EF4-FFF2-40B4-BE49-F238E27FC236}">
-                <a16:creationId xmlns:a16="http://schemas.microsoft.com/office/drawing/2014/main" id="{CB83DE12-929C-4B1C-A933-3A9B25BBE6F5}"/>
+                <a16:creationId xmlns:a16="http://schemas.microsoft.com/office/drawing/2014/main" id="{FEF5A99D-9580-466C-A0A2-21D959705DD2}"/>
               </a:ext>
             </a:extLst>
           </p:cNvPr>
@@ -6437,7 +6437,7 @@
           </a:solidFill>
           <a:ln xmlns:a="http://schemas.openxmlformats.org/drawingml/2006/main" w="19050">
             <a:solidFill>
-              <a:srgbClr val="E5783F"/>
+              <a:srgbClr val="9A3F16"/>
             </a:solidFill>
             <a:prstDash val="solid"/>
           </a:ln>
@@ -6467,7 +6467,7 @@
                 <a:ea typeface="PingFang SC"/>
                 <a:cs typeface="PingFang SC"/>
               </a:rPr>
-              <a:t>研究者应先提出问题、边界和纳入排除标准，再选择适合的学术数据库、机构知识库或专业索引。AI 可以帮助扩展同义词、构造检索式和初步分类，但不应成为唯一检索入口。检索日期、数据库…</a:t>
+              <a:t>研究者应先提出问题、边界和纳入排除标准；再选择适合的学术数据库、机构知识库或专业索引；AI 可以帮助扩展同义词、构造检索式和初步分类；但不应成为唯一检索入口</a:t>
             </a:r>
           </a:p>
         </p:txBody>
@@ -6477,7 +6477,7 @@
           <p:cNvPr id="9" name="core-no-1">
             <a:extLst xmlns:a="http://schemas.openxmlformats.org/drawingml/2006/main">
               <a:ext uri="{FF2B5EF4-FFF2-40B4-BE49-F238E27FC236}">
-                <a16:creationId xmlns:a16="http://schemas.microsoft.com/office/drawing/2014/main" id="{C60D3A06-45EA-4483-848B-53FA3D1C330E}"/>
+                <a16:creationId xmlns:a16="http://schemas.microsoft.com/office/drawing/2014/main" id="{F04A019B-F957-4EED-9959-6977889B7CC6}"/>
               </a:ext>
             </a:extLst>
           </p:cNvPr>
@@ -6509,7 +6509,7 @@
             <a:pPr algn="l">
               <a:defRPr sz="2250" b="1">
                 <a:solidFill>
-                  <a:srgbClr val="E5783F"/>
+                  <a:srgbClr val="9A3F16"/>
                 </a:solidFill>
                 <a:latin typeface="PingFang SC"/>
                 <a:ea typeface="PingFang SC"/>
@@ -6519,7 +6519,7 @@
             <a:r>
               <a:rPr sz="2250" b="1">
                 <a:solidFill>
-                  <a:srgbClr val="E5783F"/>
+                  <a:srgbClr val="9A3F16"/>
                 </a:solidFill>
                 <a:latin typeface="PingFang SC"/>
                 <a:ea typeface="PingFang SC"/>
@@ -6535,7 +6535,7 @@
           <p:cNvPr id="10" name="core-body-1">
             <a:extLst xmlns:a="http://schemas.openxmlformats.org/drawingml/2006/main">
               <a:ext uri="{FF2B5EF4-FFF2-40B4-BE49-F238E27FC236}">
-                <a16:creationId xmlns:a16="http://schemas.microsoft.com/office/drawing/2014/main" id="{55165D3D-36F8-42F1-BF3A-503C9A1CC801}"/>
+                <a16:creationId xmlns:a16="http://schemas.microsoft.com/office/drawing/2014/main" id="{442155EF-5D2B-4CF5-9398-EF32A869239B}"/>
               </a:ext>
             </a:extLst>
           </p:cNvPr>
@@ -6589,7 +6589,7 @@
                 <a:ea typeface="PingFang SC"/>
                 <a:cs typeface="PingFang SC"/>
               </a:rPr>
-              <a:t>对每条候选文献，必须回到可识别的原始记录或全文，核对题名、作者、年份、载体、页码或 DOI，并阅读支持相关主张的上下文。模型给出的书目条目只能视为待核线索；找不到原文…</a:t>
+              <a:t>对每条候选文献，必须回到可识别的原始记录或全文；核对题名、作者、年份、载体、页码或 DOI；并阅读支持相关主张的上下文；模型给出的书目条目只能视为待核线索</a:t>
             </a:r>
           </a:p>
         </p:txBody>
@@ -6599,7 +6599,7 @@
           <p:cNvPr id="11" name="core-no-2">
             <a:extLst xmlns:a="http://schemas.openxmlformats.org/drawingml/2006/main">
               <a:ext uri="{FF2B5EF4-FFF2-40B4-BE49-F238E27FC236}">
-                <a16:creationId xmlns:a16="http://schemas.microsoft.com/office/drawing/2014/main" id="{4B2B3F97-0E3F-4323-BAB5-F67315C00696}"/>
+                <a16:creationId xmlns:a16="http://schemas.microsoft.com/office/drawing/2014/main" id="{46BBA28C-24F7-4970-AA02-0A7A8B55772B}"/>
               </a:ext>
             </a:extLst>
           </p:cNvPr>
@@ -6631,7 +6631,7 @@
             <a:pPr algn="l">
               <a:defRPr sz="2250" b="1">
                 <a:solidFill>
-                  <a:srgbClr val="E5783F"/>
+                  <a:srgbClr val="9A3F16"/>
                 </a:solidFill>
                 <a:latin typeface="PingFang SC"/>
                 <a:ea typeface="PingFang SC"/>
@@ -6641,7 +6641,7 @@
             <a:r>
               <a:rPr sz="2250" b="1">
                 <a:solidFill>
-                  <a:srgbClr val="E5783F"/>
+                  <a:srgbClr val="9A3F16"/>
                 </a:solidFill>
                 <a:latin typeface="PingFang SC"/>
                 <a:ea typeface="PingFang SC"/>
@@ -6657,7 +6657,7 @@
           <p:cNvPr id="12" name="core-body-2">
             <a:extLst xmlns:a="http://schemas.openxmlformats.org/drawingml/2006/main">
               <a:ext uri="{FF2B5EF4-FFF2-40B4-BE49-F238E27FC236}">
-                <a16:creationId xmlns:a16="http://schemas.microsoft.com/office/drawing/2014/main" id="{8F47A3F4-94F8-4074-B599-7996516948F0}"/>
+                <a16:creationId xmlns:a16="http://schemas.microsoft.com/office/drawing/2014/main" id="{48754933-FC6B-4DCB-8C0E-E7283206E3C2}"/>
               </a:ext>
             </a:extLst>
           </p:cNvPr>
@@ -6721,7 +6721,7 @@
           <p:cNvPr id="13" name="s4-takeaway-rule">
             <a:extLst xmlns:a="http://schemas.openxmlformats.org/drawingml/2006/main">
               <a:ext uri="{FF2B5EF4-FFF2-40B4-BE49-F238E27FC236}">
-                <a16:creationId xmlns:a16="http://schemas.microsoft.com/office/drawing/2014/main" id="{2F155EB8-BE8B-4362-B38F-E6DA53500D50}"/>
+                <a16:creationId xmlns:a16="http://schemas.microsoft.com/office/drawing/2014/main" id="{4AB11204-8F87-450A-9A54-40E86736B4D4}"/>
               </a:ext>
             </a:extLst>
           </p:cNvPr>
@@ -6754,7 +6754,7 @@
           <p:cNvPr id="14" name="s4-takeaway">
             <a:extLst xmlns:a="http://schemas.openxmlformats.org/drawingml/2006/main">
               <a:ext uri="{FF2B5EF4-FFF2-40B4-BE49-F238E27FC236}">
-                <a16:creationId xmlns:a16="http://schemas.microsoft.com/office/drawing/2014/main" id="{FD9ED9AE-D508-4118-9482-1558403410A4}"/>
+                <a16:creationId xmlns:a16="http://schemas.microsoft.com/office/drawing/2014/main" id="{115D7F66-E3C8-4FDD-A8A7-1928F4772CB6}"/>
               </a:ext>
             </a:extLst>
           </p:cNvPr>
@@ -6810,7 +6810,7 @@
     </p:spTree>
     <p:extLst>
       <p:ext uri="{BB962C8B-B14F-4D97-AF65-F5344CB8AC3E}">
-        <p14:creationId xmlns:p14="http://schemas.microsoft.com/office/powerpoint/2010/main" val="388463886"/>
+        <p14:creationId xmlns:p14="http://schemas.microsoft.com/office/powerpoint/2010/main" val="1048604826"/>
       </p:ext>
     </p:extLst>
   </p:cSld>
@@ -6841,7 +6841,7 @@
           <p:cNvPr id="1" name="s5-rule">
             <a:extLst xmlns:a="http://schemas.openxmlformats.org/drawingml/2006/main">
               <a:ext uri="{FF2B5EF4-FFF2-40B4-BE49-F238E27FC236}">
-                <a16:creationId xmlns:a16="http://schemas.microsoft.com/office/drawing/2014/main" id="{42234913-9627-4EE6-A6A4-B4F69B1C2A86}"/>
+                <a16:creationId xmlns:a16="http://schemas.microsoft.com/office/drawing/2014/main" id="{51BD56FD-F91F-4EC7-BCEC-19FB8A1FF13D}"/>
               </a:ext>
             </a:extLst>
           </p:cNvPr>
@@ -6874,7 +6874,7 @@
           <p:cNvPr id="2" name="s5-eyebrow">
             <a:extLst xmlns:a="http://schemas.openxmlformats.org/drawingml/2006/main">
               <a:ext uri="{FF2B5EF4-FFF2-40B4-BE49-F238E27FC236}">
-                <a16:creationId xmlns:a16="http://schemas.microsoft.com/office/drawing/2014/main" id="{4438761B-5C1A-48EC-ACCD-3F12FC0ADC41}"/>
+                <a16:creationId xmlns:a16="http://schemas.microsoft.com/office/drawing/2014/main" id="{53D6BA12-4FEE-409D-9D81-936E68B6E70B}"/>
               </a:ext>
             </a:extLst>
           </p:cNvPr>
@@ -6932,7 +6932,7 @@
           <p:cNvPr id="3" name="s5-title">
             <a:extLst xmlns:a="http://schemas.openxmlformats.org/drawingml/2006/main">
               <a:ext uri="{FF2B5EF4-FFF2-40B4-BE49-F238E27FC236}">
-                <a16:creationId xmlns:a16="http://schemas.microsoft.com/office/drawing/2014/main" id="{F4682961-89EE-4522-A556-CE2D284B79B9}"/>
+                <a16:creationId xmlns:a16="http://schemas.microsoft.com/office/drawing/2014/main" id="{DAA5186D-E4FC-4211-BE68-6EF223A5CEAC}"/>
               </a:ext>
             </a:extLst>
           </p:cNvPr>
@@ -6990,7 +6990,7 @@
           <p:cNvPr id="4" name="s5-footer">
             <a:extLst xmlns:a="http://schemas.openxmlformats.org/drawingml/2006/main">
               <a:ext uri="{FF2B5EF4-FFF2-40B4-BE49-F238E27FC236}">
-                <a16:creationId xmlns:a16="http://schemas.microsoft.com/office/drawing/2014/main" id="{0B68D730-C63E-447F-88CE-DE8A2A17D06A}"/>
+                <a16:creationId xmlns:a16="http://schemas.microsoft.com/office/drawing/2014/main" id="{5F089C95-8C86-4F27-92B0-0ACFE747EF3D}"/>
               </a:ext>
             </a:extLst>
           </p:cNvPr>
@@ -7021,7 +7021,7 @@
           <p:cNvPr id="5" name="s5-identity">
             <a:extLst xmlns:a="http://schemas.openxmlformats.org/drawingml/2006/main">
               <a:ext uri="{FF2B5EF4-FFF2-40B4-BE49-F238E27FC236}">
-                <a16:creationId xmlns:a16="http://schemas.microsoft.com/office/drawing/2014/main" id="{61C84596-E49F-484B-B3A9-D416BE67F3B0}"/>
+                <a16:creationId xmlns:a16="http://schemas.microsoft.com/office/drawing/2014/main" id="{9A900957-699D-4A8B-98F9-9D1054783079}"/>
               </a:ext>
             </a:extLst>
           </p:cNvPr>
@@ -7079,7 +7079,7 @@
           <p:cNvPr id="6" name="core-no-0">
             <a:extLst xmlns:a="http://schemas.openxmlformats.org/drawingml/2006/main">
               <a:ext uri="{FF2B5EF4-FFF2-40B4-BE49-F238E27FC236}">
-                <a16:creationId xmlns:a16="http://schemas.microsoft.com/office/drawing/2014/main" id="{CFB9E2E7-4AF3-4DE4-AB5B-797583271FCC}"/>
+                <a16:creationId xmlns:a16="http://schemas.microsoft.com/office/drawing/2014/main" id="{354D691D-8646-466B-90A5-8E858D319F27}"/>
               </a:ext>
             </a:extLst>
           </p:cNvPr>
@@ -7111,7 +7111,7 @@
             <a:pPr algn="l">
               <a:defRPr sz="2250" b="1">
                 <a:solidFill>
-                  <a:srgbClr val="E5783F"/>
+                  <a:srgbClr val="9A3F16"/>
                 </a:solidFill>
                 <a:latin typeface="PingFang SC"/>
                 <a:ea typeface="PingFang SC"/>
@@ -7121,7 +7121,7 @@
             <a:r>
               <a:rPr sz="2250" b="1">
                 <a:solidFill>
-                  <a:srgbClr val="E5783F"/>
+                  <a:srgbClr val="9A3F16"/>
                 </a:solidFill>
                 <a:latin typeface="PingFang SC"/>
                 <a:ea typeface="PingFang SC"/>
@@ -7137,7 +7137,7 @@
           <p:cNvPr id="7" name="core-label-0">
             <a:extLst xmlns:a="http://schemas.openxmlformats.org/drawingml/2006/main">
               <a:ext uri="{FF2B5EF4-FFF2-40B4-BE49-F238E27FC236}">
-                <a16:creationId xmlns:a16="http://schemas.microsoft.com/office/drawing/2014/main" id="{EEF2DF96-D6A0-4BAD-93E5-D78B2FB4D6E6}"/>
+                <a16:creationId xmlns:a16="http://schemas.microsoft.com/office/drawing/2014/main" id="{F3AAB50C-200E-45F9-BF17-C9BF320B8948}"/>
               </a:ext>
             </a:extLst>
           </p:cNvPr>
@@ -7195,7 +7195,7 @@
           <p:cNvPr id="8" name="core-body-0">
             <a:extLst xmlns:a="http://schemas.openxmlformats.org/drawingml/2006/main">
               <a:ext uri="{FF2B5EF4-FFF2-40B4-BE49-F238E27FC236}">
-                <a16:creationId xmlns:a16="http://schemas.microsoft.com/office/drawing/2014/main" id="{B282FC87-7224-44E9-91EB-93AE3B93D068}"/>
+                <a16:creationId xmlns:a16="http://schemas.microsoft.com/office/drawing/2014/main" id="{BB76D4F7-0527-4167-AF7A-57C1B8DC7BE0}"/>
               </a:ext>
             </a:extLst>
           </p:cNvPr>
@@ -7219,7 +7219,7 @@
           </a:solidFill>
           <a:ln xmlns:a="http://schemas.openxmlformats.org/drawingml/2006/main" w="19050">
             <a:solidFill>
-              <a:srgbClr val="E5783F"/>
+              <a:srgbClr val="9A3F16"/>
             </a:solidFill>
             <a:prstDash val="solid"/>
           </a:ln>
@@ -7249,7 +7249,7 @@
                 <a:ea typeface="PingFang SC"/>
                 <a:cs typeface="PingFang SC"/>
               </a:rPr>
-              <a:t>AI 可以解释报错、补充测试或提出代码修改，但研究者需要记录软件与依赖版本、硬件环境、数据版本、预处理、参数、随机种子和评价脚本。自动生成的代码必须经过代码审查、单元测试和独立运行…</a:t>
+              <a:t>AI 可以解释报错、补充测试或提出代码修改；但研究者需要记录软件与依赖版本、硬件环境、数据版本、预处理、参数、随机种子和评价脚本；自动生成的代码必须经过代码审查、单元测试和独立运行</a:t>
             </a:r>
           </a:p>
         </p:txBody>
@@ -7259,7 +7259,7 @@
           <p:cNvPr id="9" name="core-no-1">
             <a:extLst xmlns:a="http://schemas.openxmlformats.org/drawingml/2006/main">
               <a:ext uri="{FF2B5EF4-FFF2-40B4-BE49-F238E27FC236}">
-                <a16:creationId xmlns:a16="http://schemas.microsoft.com/office/drawing/2014/main" id="{658BB456-2BFF-4031-B7E5-E93E9ACF9A32}"/>
+                <a16:creationId xmlns:a16="http://schemas.microsoft.com/office/drawing/2014/main" id="{84886C55-B172-4BAF-B4C8-4F48FD887338}"/>
               </a:ext>
             </a:extLst>
           </p:cNvPr>
@@ -7291,7 +7291,7 @@
             <a:pPr algn="l">
               <a:defRPr sz="2250" b="1">
                 <a:solidFill>
-                  <a:srgbClr val="E5783F"/>
+                  <a:srgbClr val="9A3F16"/>
                 </a:solidFill>
                 <a:latin typeface="PingFang SC"/>
                 <a:ea typeface="PingFang SC"/>
@@ -7301,7 +7301,7 @@
             <a:r>
               <a:rPr sz="2250" b="1">
                 <a:solidFill>
-                  <a:srgbClr val="E5783F"/>
+                  <a:srgbClr val="9A3F16"/>
                 </a:solidFill>
                 <a:latin typeface="PingFang SC"/>
                 <a:ea typeface="PingFang SC"/>
@@ -7317,7 +7317,7 @@
           <p:cNvPr id="10" name="core-body-1">
             <a:extLst xmlns:a="http://schemas.openxmlformats.org/drawingml/2006/main">
               <a:ext uri="{FF2B5EF4-FFF2-40B4-BE49-F238E27FC236}">
-                <a16:creationId xmlns:a16="http://schemas.microsoft.com/office/drawing/2014/main" id="{7098049E-5EBE-4FA8-A2C1-F251055F199A}"/>
+                <a16:creationId xmlns:a16="http://schemas.microsoft.com/office/drawing/2014/main" id="{814336FE-D608-4BF6-BCE4-E3A9D7A0219D}"/>
               </a:ext>
             </a:extLst>
           </p:cNvPr>
@@ -7371,7 +7371,7 @@
                 <a:ea typeface="PingFang SC"/>
                 <a:cs typeface="PingFang SC"/>
               </a:rPr>
-              <a:t>复现至少回答三个问题：使用相同资料能否得到相同结果；改变合理参数后结论是否稳定；失败结果和偏离原研究的部分是否如实记录。若原数据受限，应说明取得条件并提供可公开的替代验证…</a:t>
+              <a:t>复现至少回答三个问题；使用相同资料能否得到相同结果；改变合理参数后结论是否稳定；失败结果和偏离原研究的部分是否如实记录；若原数据受限，应说明取得条件并提供可公开的替代验证</a:t>
             </a:r>
           </a:p>
         </p:txBody>
@@ -7381,7 +7381,7 @@
           <p:cNvPr id="11" name="s5-takeaway-rule">
             <a:extLst xmlns:a="http://schemas.openxmlformats.org/drawingml/2006/main">
               <a:ext uri="{FF2B5EF4-FFF2-40B4-BE49-F238E27FC236}">
-                <a16:creationId xmlns:a16="http://schemas.microsoft.com/office/drawing/2014/main" id="{0014CB40-F4AC-4783-95F6-F60A8DCF77CB}"/>
+                <a16:creationId xmlns:a16="http://schemas.microsoft.com/office/drawing/2014/main" id="{7B339AC7-30F3-47EB-BDAD-42992E18F9F9}"/>
               </a:ext>
             </a:extLst>
           </p:cNvPr>
@@ -7414,7 +7414,7 @@
           <p:cNvPr id="12" name="s5-takeaway">
             <a:extLst xmlns:a="http://schemas.openxmlformats.org/drawingml/2006/main">
               <a:ext uri="{FF2B5EF4-FFF2-40B4-BE49-F238E27FC236}">
-                <a16:creationId xmlns:a16="http://schemas.microsoft.com/office/drawing/2014/main" id="{5E0EBC9C-EB5A-487C-9931-881720B907CB}"/>
+                <a16:creationId xmlns:a16="http://schemas.microsoft.com/office/drawing/2014/main" id="{AC9F39BA-B494-456E-9DC6-5E0F77349F61}"/>
               </a:ext>
             </a:extLst>
           </p:cNvPr>
@@ -7470,7 +7470,7 @@
     </p:spTree>
     <p:extLst>
       <p:ext uri="{BB962C8B-B14F-4D97-AF65-F5344CB8AC3E}">
-        <p14:creationId xmlns:p14="http://schemas.microsoft.com/office/powerpoint/2010/main" val="26573650"/>
+        <p14:creationId xmlns:p14="http://schemas.microsoft.com/office/powerpoint/2010/main" val="39224669"/>
       </p:ext>
     </p:extLst>
   </p:cSld>
@@ -7501,7 +7501,7 @@
           <p:cNvPr id="1" name="s6-rule">
             <a:extLst xmlns:a="http://schemas.openxmlformats.org/drawingml/2006/main">
               <a:ext uri="{FF2B5EF4-FFF2-40B4-BE49-F238E27FC236}">
-                <a16:creationId xmlns:a16="http://schemas.microsoft.com/office/drawing/2014/main" id="{345A7DAD-99E1-4FCD-98FE-51D7943DB717}"/>
+                <a16:creationId xmlns:a16="http://schemas.microsoft.com/office/drawing/2014/main" id="{222F7CC3-7A5E-4678-8DD5-F51945BB93F0}"/>
               </a:ext>
             </a:extLst>
           </p:cNvPr>
@@ -7534,7 +7534,7 @@
           <p:cNvPr id="2" name="s6-eyebrow">
             <a:extLst xmlns:a="http://schemas.openxmlformats.org/drawingml/2006/main">
               <a:ext uri="{FF2B5EF4-FFF2-40B4-BE49-F238E27FC236}">
-                <a16:creationId xmlns:a16="http://schemas.microsoft.com/office/drawing/2014/main" id="{D39404CA-CD5C-4FD6-A34F-CD04F5379A3C}"/>
+                <a16:creationId xmlns:a16="http://schemas.microsoft.com/office/drawing/2014/main" id="{D34C7BF2-5A65-4290-9236-4153D5303556}"/>
               </a:ext>
             </a:extLst>
           </p:cNvPr>
@@ -7592,7 +7592,7 @@
           <p:cNvPr id="3" name="s6-title">
             <a:extLst xmlns:a="http://schemas.openxmlformats.org/drawingml/2006/main">
               <a:ext uri="{FF2B5EF4-FFF2-40B4-BE49-F238E27FC236}">
-                <a16:creationId xmlns:a16="http://schemas.microsoft.com/office/drawing/2014/main" id="{F60AA430-FB23-4A83-B55E-FD5B6C3DC094}"/>
+                <a16:creationId xmlns:a16="http://schemas.microsoft.com/office/drawing/2014/main" id="{DA18BC29-064A-4A3F-B9D3-27B2EB0BE800}"/>
               </a:ext>
             </a:extLst>
           </p:cNvPr>
@@ -7650,7 +7650,7 @@
           <p:cNvPr id="4" name="s6-footer">
             <a:extLst xmlns:a="http://schemas.openxmlformats.org/drawingml/2006/main">
               <a:ext uri="{FF2B5EF4-FFF2-40B4-BE49-F238E27FC236}">
-                <a16:creationId xmlns:a16="http://schemas.microsoft.com/office/drawing/2014/main" id="{2BF043C9-5CE8-433D-8D12-33F4D89D5347}"/>
+                <a16:creationId xmlns:a16="http://schemas.microsoft.com/office/drawing/2014/main" id="{1A1BDFA3-8A14-47AC-9785-B8D337D57725}"/>
               </a:ext>
             </a:extLst>
           </p:cNvPr>
@@ -7681,7 +7681,7 @@
           <p:cNvPr id="5" name="s6-identity">
             <a:extLst xmlns:a="http://schemas.openxmlformats.org/drawingml/2006/main">
               <a:ext uri="{FF2B5EF4-FFF2-40B4-BE49-F238E27FC236}">
-                <a16:creationId xmlns:a16="http://schemas.microsoft.com/office/drawing/2014/main" id="{6D4E4552-55A8-4EDA-B87E-8919F13422AA}"/>
+                <a16:creationId xmlns:a16="http://schemas.microsoft.com/office/drawing/2014/main" id="{1FBCFD83-CE22-4C7C-9DC3-4D98F8638C19}"/>
               </a:ext>
             </a:extLst>
           </p:cNvPr>
@@ -7739,7 +7739,7 @@
           <p:cNvPr id="6" name="core-no-0">
             <a:extLst xmlns:a="http://schemas.openxmlformats.org/drawingml/2006/main">
               <a:ext uri="{FF2B5EF4-FFF2-40B4-BE49-F238E27FC236}">
-                <a16:creationId xmlns:a16="http://schemas.microsoft.com/office/drawing/2014/main" id="{2298E0D3-153B-4603-9A3B-04DEAA0644B4}"/>
+                <a16:creationId xmlns:a16="http://schemas.microsoft.com/office/drawing/2014/main" id="{D40E3511-35C8-4993-A506-44FAF8817EF9}"/>
               </a:ext>
             </a:extLst>
           </p:cNvPr>
@@ -7771,7 +7771,7 @@
             <a:pPr algn="l">
               <a:defRPr sz="2250" b="1">
                 <a:solidFill>
-                  <a:srgbClr val="E5783F"/>
+                  <a:srgbClr val="9A3F16"/>
                 </a:solidFill>
                 <a:latin typeface="PingFang SC"/>
                 <a:ea typeface="PingFang SC"/>
@@ -7781,7 +7781,7 @@
             <a:r>
               <a:rPr sz="2250" b="1">
                 <a:solidFill>
-                  <a:srgbClr val="E5783F"/>
+                  <a:srgbClr val="9A3F16"/>
                 </a:solidFill>
                 <a:latin typeface="PingFang SC"/>
                 <a:ea typeface="PingFang SC"/>
@@ -7797,7 +7797,7 @@
           <p:cNvPr id="7" name="core-label-0">
             <a:extLst xmlns:a="http://schemas.openxmlformats.org/drawingml/2006/main">
               <a:ext uri="{FF2B5EF4-FFF2-40B4-BE49-F238E27FC236}">
-                <a16:creationId xmlns:a16="http://schemas.microsoft.com/office/drawing/2014/main" id="{A1205643-E28B-4AE3-A5D7-1C81F65E9DEE}"/>
+                <a16:creationId xmlns:a16="http://schemas.microsoft.com/office/drawing/2014/main" id="{E1EFF362-47AB-4D87-B4A4-88F3030CCA97}"/>
               </a:ext>
             </a:extLst>
           </p:cNvPr>
@@ -7855,7 +7855,7 @@
           <p:cNvPr id="8" name="core-body-0">
             <a:extLst xmlns:a="http://schemas.openxmlformats.org/drawingml/2006/main">
               <a:ext uri="{FF2B5EF4-FFF2-40B4-BE49-F238E27FC236}">
-                <a16:creationId xmlns:a16="http://schemas.microsoft.com/office/drawing/2014/main" id="{8A7CEBA6-D549-40F2-B7AC-01625F240C02}"/>
+                <a16:creationId xmlns:a16="http://schemas.microsoft.com/office/drawing/2014/main" id="{E84C17FE-E9FF-4023-B5D2-F99BC41E4A5D}"/>
               </a:ext>
             </a:extLst>
           </p:cNvPr>
@@ -7879,7 +7879,7 @@
           </a:solidFill>
           <a:ln xmlns:a="http://schemas.openxmlformats.org/drawingml/2006/main" w="19050">
             <a:solidFill>
-              <a:srgbClr val="E5783F"/>
+              <a:srgbClr val="9A3F16"/>
             </a:solidFill>
             <a:prstDash val="solid"/>
           </a:ln>
@@ -7909,7 +7909,7 @@
                 <a:ea typeface="PingFang SC"/>
                 <a:cs typeface="PingFang SC"/>
               </a:rPr>
-              <a:t>学生作业、成绩、课堂录音、访谈、医疗或生物信息，以及尚未公开的研究数据，都可能具有敏感性。使用前应确认法律、伦理审批、知情同意、学校制度和服务商条款允许什么。只提供完成任务所需的最少字段…</a:t>
+              <a:t>学生作业、成绩、课堂录音、访谈、医疗或生物信息；以及尚未公开的研究数据；都可能具有敏感性，使用前应确认法律、伦理审批、知情同意、学校制度和服务商条款允许什么；只提供完成任务所需的最少字段</a:t>
             </a:r>
           </a:p>
         </p:txBody>
@@ -7919,7 +7919,7 @@
           <p:cNvPr id="9" name="core-no-1">
             <a:extLst xmlns:a="http://schemas.openxmlformats.org/drawingml/2006/main">
               <a:ext uri="{FF2B5EF4-FFF2-40B4-BE49-F238E27FC236}">
-                <a16:creationId xmlns:a16="http://schemas.microsoft.com/office/drawing/2014/main" id="{BCB20DA4-BF11-43FC-9123-BA13136F1E1D}"/>
+                <a16:creationId xmlns:a16="http://schemas.microsoft.com/office/drawing/2014/main" id="{AB14C750-DA2D-40D3-BADA-DE09F8491927}"/>
               </a:ext>
             </a:extLst>
           </p:cNvPr>
@@ -7951,7 +7951,7 @@
             <a:pPr algn="l">
               <a:defRPr sz="2250" b="1">
                 <a:solidFill>
-                  <a:srgbClr val="E5783F"/>
+                  <a:srgbClr val="9A3F16"/>
                 </a:solidFill>
                 <a:latin typeface="PingFang SC"/>
                 <a:ea typeface="PingFang SC"/>
@@ -7961,7 +7961,7 @@
             <a:r>
               <a:rPr sz="2250" b="1">
                 <a:solidFill>
-                  <a:srgbClr val="E5783F"/>
+                  <a:srgbClr val="9A3F16"/>
                 </a:solidFill>
                 <a:latin typeface="PingFang SC"/>
                 <a:ea typeface="PingFang SC"/>
@@ -7977,7 +7977,7 @@
           <p:cNvPr id="10" name="core-body-1">
             <a:extLst xmlns:a="http://schemas.openxmlformats.org/drawingml/2006/main">
               <a:ext uri="{FF2B5EF4-FFF2-40B4-BE49-F238E27FC236}">
-                <a16:creationId xmlns:a16="http://schemas.microsoft.com/office/drawing/2014/main" id="{7DFEF1C5-B0BE-4A2A-9B43-3078A3B0D9A8}"/>
+                <a16:creationId xmlns:a16="http://schemas.microsoft.com/office/drawing/2014/main" id="{726E6B46-B6C6-4304-AB91-09A096C71FBE}"/>
               </a:ext>
             </a:extLst>
           </p:cNvPr>
@@ -8041,7 +8041,7 @@
           <p:cNvPr id="11" name="s6-takeaway-rule">
             <a:extLst xmlns:a="http://schemas.openxmlformats.org/drawingml/2006/main">
               <a:ext uri="{FF2B5EF4-FFF2-40B4-BE49-F238E27FC236}">
-                <a16:creationId xmlns:a16="http://schemas.microsoft.com/office/drawing/2014/main" id="{4E1AF146-9725-4674-8A04-C7A6DEEF4C49}"/>
+                <a16:creationId xmlns:a16="http://schemas.microsoft.com/office/drawing/2014/main" id="{BF8E5992-498B-4EFB-9CFD-95C0EA8CF85D}"/>
               </a:ext>
             </a:extLst>
           </p:cNvPr>
@@ -8074,7 +8074,7 @@
           <p:cNvPr id="12" name="s6-takeaway">
             <a:extLst xmlns:a="http://schemas.openxmlformats.org/drawingml/2006/main">
               <a:ext uri="{FF2B5EF4-FFF2-40B4-BE49-F238E27FC236}">
-                <a16:creationId xmlns:a16="http://schemas.microsoft.com/office/drawing/2014/main" id="{8DF4BF4B-7836-4FFE-88F4-1F4EDFF7AE02}"/>
+                <a16:creationId xmlns:a16="http://schemas.microsoft.com/office/drawing/2014/main" id="{F8999300-1E5C-478E-993E-CA383153970A}"/>
               </a:ext>
             </a:extLst>
           </p:cNvPr>
@@ -8130,7 +8130,7 @@
     </p:spTree>
     <p:extLst>
       <p:ext uri="{BB962C8B-B14F-4D97-AF65-F5344CB8AC3E}">
-        <p14:creationId xmlns:p14="http://schemas.microsoft.com/office/powerpoint/2010/main" val="1118663502"/>
+        <p14:creationId xmlns:p14="http://schemas.microsoft.com/office/powerpoint/2010/main" val="255875189"/>
       </p:ext>
     </p:extLst>
   </p:cSld>
@@ -8161,7 +8161,7 @@
           <p:cNvPr id="1" name="s7-rule">
             <a:extLst xmlns:a="http://schemas.openxmlformats.org/drawingml/2006/main">
               <a:ext uri="{FF2B5EF4-FFF2-40B4-BE49-F238E27FC236}">
-                <a16:creationId xmlns:a16="http://schemas.microsoft.com/office/drawing/2014/main" id="{CE3BC9BF-B0B7-4DA9-949D-276604B9527E}"/>
+                <a16:creationId xmlns:a16="http://schemas.microsoft.com/office/drawing/2014/main" id="{E07B0B43-4600-4D79-9173-46489456F920}"/>
               </a:ext>
             </a:extLst>
           </p:cNvPr>
@@ -8194,7 +8194,7 @@
           <p:cNvPr id="2" name="s7-eyebrow">
             <a:extLst xmlns:a="http://schemas.openxmlformats.org/drawingml/2006/main">
               <a:ext uri="{FF2B5EF4-FFF2-40B4-BE49-F238E27FC236}">
-                <a16:creationId xmlns:a16="http://schemas.microsoft.com/office/drawing/2014/main" id="{1A288403-33F0-40F2-99FB-9E2E17D9F4C1}"/>
+                <a16:creationId xmlns:a16="http://schemas.microsoft.com/office/drawing/2014/main" id="{5A5AB65D-A097-406D-8380-9D181BA28D6E}"/>
               </a:ext>
             </a:extLst>
           </p:cNvPr>
@@ -8252,7 +8252,7 @@
           <p:cNvPr id="3" name="s7-title">
             <a:extLst xmlns:a="http://schemas.openxmlformats.org/drawingml/2006/main">
               <a:ext uri="{FF2B5EF4-FFF2-40B4-BE49-F238E27FC236}">
-                <a16:creationId xmlns:a16="http://schemas.microsoft.com/office/drawing/2014/main" id="{FAA6C042-3A72-4C6D-A770-A9E4277DDDB9}"/>
+                <a16:creationId xmlns:a16="http://schemas.microsoft.com/office/drawing/2014/main" id="{2400C8F2-8A8A-4220-B38C-C2B8795F9480}"/>
               </a:ext>
             </a:extLst>
           </p:cNvPr>
@@ -8277,7 +8277,7 @@
         </p:spPr>
         <p:txBody>
           <a:bodyPr xmlns:a="http://schemas.openxmlformats.org/drawingml/2006/main" lIns="0" tIns="0" rIns="0" bIns="0" anchor="ctr">
-            <a:normAutofit fontScale="94835"/>
+            <a:normAutofit fontScale="100000"/>
           </a:bodyPr>
           <a:lstStyle xmlns:a="http://schemas.openxmlformats.org/drawingml/2006/main"/>
           <a:p xmlns:a="http://schemas.openxmlformats.org/drawingml/2006/main">
@@ -8300,7 +8300,7 @@
                 <a:ea typeface="PingFang SC"/>
                 <a:cs typeface="PingFang SC"/>
               </a:rPr>
-              <a:t>不同学校、课程、期刊和资助机构对 AI 使用的规则可能不同</a:t>
+              <a:t>AI 使用规则因学校、课程与交付场景而异</a:t>
             </a:r>
           </a:p>
         </p:txBody>
@@ -8310,7 +8310,7 @@
           <p:cNvPr id="4" name="s7-footer">
             <a:extLst xmlns:a="http://schemas.openxmlformats.org/drawingml/2006/main">
               <a:ext uri="{FF2B5EF4-FFF2-40B4-BE49-F238E27FC236}">
-                <a16:creationId xmlns:a16="http://schemas.microsoft.com/office/drawing/2014/main" id="{0370BDF6-3DE6-458E-BB63-7F4E9654DE9F}"/>
+                <a16:creationId xmlns:a16="http://schemas.microsoft.com/office/drawing/2014/main" id="{8880E282-EBAE-4FC8-A46D-D62A2687E30A}"/>
               </a:ext>
             </a:extLst>
           </p:cNvPr>
@@ -8341,7 +8341,7 @@
           <p:cNvPr id="5" name="s7-identity">
             <a:extLst xmlns:a="http://schemas.openxmlformats.org/drawingml/2006/main">
               <a:ext uri="{FF2B5EF4-FFF2-40B4-BE49-F238E27FC236}">
-                <a16:creationId xmlns:a16="http://schemas.microsoft.com/office/drawing/2014/main" id="{3A41CE78-A177-428A-BF0F-2B6DC2BEC8EE}"/>
+                <a16:creationId xmlns:a16="http://schemas.microsoft.com/office/drawing/2014/main" id="{AA166EF0-7A74-4077-A92C-DD32823CF1A7}"/>
               </a:ext>
             </a:extLst>
           </p:cNvPr>
@@ -8399,7 +8399,7 @@
           <p:cNvPr id="6" name="core-no-0">
             <a:extLst xmlns:a="http://schemas.openxmlformats.org/drawingml/2006/main">
               <a:ext uri="{FF2B5EF4-FFF2-40B4-BE49-F238E27FC236}">
-                <a16:creationId xmlns:a16="http://schemas.microsoft.com/office/drawing/2014/main" id="{F69C3CF1-E6C5-44FD-A038-9DA3B79B832B}"/>
+                <a16:creationId xmlns:a16="http://schemas.microsoft.com/office/drawing/2014/main" id="{0BCDBA0F-2015-4B27-A2D2-4954F5C3E33B}"/>
               </a:ext>
             </a:extLst>
           </p:cNvPr>
@@ -8431,7 +8431,7 @@
             <a:pPr algn="l">
               <a:defRPr sz="2250" b="1">
                 <a:solidFill>
-                  <a:srgbClr val="E5783F"/>
+                  <a:srgbClr val="9A3F16"/>
                 </a:solidFill>
                 <a:latin typeface="PingFang SC"/>
                 <a:ea typeface="PingFang SC"/>
@@ -8441,7 +8441,7 @@
             <a:r>
               <a:rPr sz="2250" b="1">
                 <a:solidFill>
-                  <a:srgbClr val="E5783F"/>
+                  <a:srgbClr val="9A3F16"/>
                 </a:solidFill>
                 <a:latin typeface="PingFang SC"/>
                 <a:ea typeface="PingFang SC"/>
@@ -8457,7 +8457,7 @@
           <p:cNvPr id="7" name="core-label-0">
             <a:extLst xmlns:a="http://schemas.openxmlformats.org/drawingml/2006/main">
               <a:ext uri="{FF2B5EF4-FFF2-40B4-BE49-F238E27FC236}">
-                <a16:creationId xmlns:a16="http://schemas.microsoft.com/office/drawing/2014/main" id="{D8060011-9D4E-4DF7-A8AF-B6D42B41592A}"/>
+                <a16:creationId xmlns:a16="http://schemas.microsoft.com/office/drawing/2014/main" id="{71427AA7-2B9B-4DD2-82A9-E0BF6ACBE85B}"/>
               </a:ext>
             </a:extLst>
           </p:cNvPr>
@@ -8515,7 +8515,7 @@
           <p:cNvPr id="8" name="core-body-0">
             <a:extLst xmlns:a="http://schemas.openxmlformats.org/drawingml/2006/main">
               <a:ext uri="{FF2B5EF4-FFF2-40B4-BE49-F238E27FC236}">
-                <a16:creationId xmlns:a16="http://schemas.microsoft.com/office/drawing/2014/main" id="{D90AD8EB-4A4D-46AC-9689-179E2D467DD2}"/>
+                <a16:creationId xmlns:a16="http://schemas.microsoft.com/office/drawing/2014/main" id="{0EF2D161-BDAB-4BB9-A556-79B6418B6346}"/>
               </a:ext>
             </a:extLst>
           </p:cNvPr>
@@ -8539,7 +8539,7 @@
           </a:solidFill>
           <a:ln xmlns:a="http://schemas.openxmlformats.org/drawingml/2006/main" w="19050">
             <a:solidFill>
-              <a:srgbClr val="E5783F"/>
+              <a:srgbClr val="9A3F16"/>
             </a:solidFill>
             <a:prstDash val="solid"/>
           </a:ln>
@@ -8569,7 +8569,7 @@
                 <a:ea typeface="PingFang SC"/>
                 <a:cs typeface="PingFang SC"/>
               </a:rPr>
-              <a:t>不同学校、课程、期刊和资助机构对 AI 使用的规则可能不同，提交前必须查阅适用要求，并按要求披露使用目的与范围。不得把 AI 生成的文字、图像、代码或分析冒充为未经辅助的原创成果…</a:t>
+              <a:t>不同学校、课程、期刊和资助机构对 AI 使用的规则可能不同；提交前必须查阅适用要求；并按要求披露使用目的与范围；不得把 AI 生成的文字、图像、代码或分析冒充为未经辅助的原创成果</a:t>
             </a:r>
           </a:p>
         </p:txBody>
@@ -8579,7 +8579,7 @@
           <p:cNvPr id="9" name="core-no-1">
             <a:extLst xmlns:a="http://schemas.openxmlformats.org/drawingml/2006/main">
               <a:ext uri="{FF2B5EF4-FFF2-40B4-BE49-F238E27FC236}">
-                <a16:creationId xmlns:a16="http://schemas.microsoft.com/office/drawing/2014/main" id="{6EB3445A-8C8F-44D6-8BA5-02B4744129E1}"/>
+                <a16:creationId xmlns:a16="http://schemas.microsoft.com/office/drawing/2014/main" id="{388A058F-F291-4316-81C1-438F9AF56E06}"/>
               </a:ext>
             </a:extLst>
           </p:cNvPr>
@@ -8611,7 +8611,7 @@
             <a:pPr algn="l">
               <a:defRPr sz="2250" b="1">
                 <a:solidFill>
-                  <a:srgbClr val="E5783F"/>
+                  <a:srgbClr val="9A3F16"/>
                 </a:solidFill>
                 <a:latin typeface="PingFang SC"/>
                 <a:ea typeface="PingFang SC"/>
@@ -8621,7 +8621,7 @@
             <a:r>
               <a:rPr sz="2250" b="1">
                 <a:solidFill>
-                  <a:srgbClr val="E5783F"/>
+                  <a:srgbClr val="9A3F16"/>
                 </a:solidFill>
                 <a:latin typeface="PingFang SC"/>
                 <a:ea typeface="PingFang SC"/>
@@ -8637,7 +8637,7 @@
           <p:cNvPr id="10" name="core-body-1">
             <a:extLst xmlns:a="http://schemas.openxmlformats.org/drawingml/2006/main">
               <a:ext uri="{FF2B5EF4-FFF2-40B4-BE49-F238E27FC236}">
-                <a16:creationId xmlns:a16="http://schemas.microsoft.com/office/drawing/2014/main" id="{3FF1CD23-7DEF-4B5A-A35E-B8D509CF62E6}"/>
+                <a16:creationId xmlns:a16="http://schemas.microsoft.com/office/drawing/2014/main" id="{15C34962-7117-4A27-B76C-A6F85BA89D95}"/>
               </a:ext>
             </a:extLst>
           </p:cNvPr>
@@ -8691,7 +8691,7 @@
                 <a:ea typeface="PingFang SC"/>
                 <a:cs typeface="PingFang SC"/>
               </a:rPr>
-              <a:t>模型不能核准最终文本、回应质疑、披露利益冲突或对研究诚信承担责任，因此不能替代作者。署名者必须能够解释方法、核验所有引用、确认数据和图表、审查版权与隐私，并对发表内容负责…</a:t>
+              <a:t>模型不能核准最终文本、回应质疑、披露利益冲突或对研究诚信承担责任；因此不能替代作者，署名者必须能够解释方法、核验所有引用、确认数据和图表、审查版权与隐私</a:t>
             </a:r>
           </a:p>
         </p:txBody>
@@ -8701,7 +8701,7 @@
           <p:cNvPr id="11" name="s7-takeaway-rule">
             <a:extLst xmlns:a="http://schemas.openxmlformats.org/drawingml/2006/main">
               <a:ext uri="{FF2B5EF4-FFF2-40B4-BE49-F238E27FC236}">
-                <a16:creationId xmlns:a16="http://schemas.microsoft.com/office/drawing/2014/main" id="{00A0B3A2-592A-4291-8D1F-6098F44205A5}"/>
+                <a16:creationId xmlns:a16="http://schemas.microsoft.com/office/drawing/2014/main" id="{3C1C980E-7BD7-46AB-A6CD-B957503E1F3F}"/>
               </a:ext>
             </a:extLst>
           </p:cNvPr>
@@ -8734,7 +8734,7 @@
           <p:cNvPr id="12" name="s7-takeaway">
             <a:extLst xmlns:a="http://schemas.openxmlformats.org/drawingml/2006/main">
               <a:ext uri="{FF2B5EF4-FFF2-40B4-BE49-F238E27FC236}">
-                <a16:creationId xmlns:a16="http://schemas.microsoft.com/office/drawing/2014/main" id="{BDD5BD0D-150B-492A-97D5-A4E93AC3FB1C}"/>
+                <a16:creationId xmlns:a16="http://schemas.microsoft.com/office/drawing/2014/main" id="{088B56EB-F9B4-4133-8273-B092CAA14DA7}"/>
               </a:ext>
             </a:extLst>
           </p:cNvPr>
@@ -8782,7 +8782,7 @@
                 <a:ea typeface="PingFang SC"/>
                 <a:cs typeface="PingFang SC"/>
               </a:rPr>
-              <a:t>不同学校、课程、期刊和资助机构对 AI 使用的规则可能不同</a:t>
+              <a:t>AI 使用规则因学校、课程与交付场景而异</a:t>
             </a:r>
           </a:p>
         </p:txBody>
@@ -8790,7 +8790,7 @@
     </p:spTree>
     <p:extLst>
       <p:ext uri="{BB962C8B-B14F-4D97-AF65-F5344CB8AC3E}">
-        <p14:creationId xmlns:p14="http://schemas.microsoft.com/office/powerpoint/2010/main" val="734572044"/>
+        <p14:creationId xmlns:p14="http://schemas.microsoft.com/office/powerpoint/2010/main" val="1348470408"/>
       </p:ext>
     </p:extLst>
   </p:cSld>
@@ -8821,7 +8821,7 @@
           <p:cNvPr id="1" name="s8-rule">
             <a:extLst xmlns:a="http://schemas.openxmlformats.org/drawingml/2006/main">
               <a:ext uri="{FF2B5EF4-FFF2-40B4-BE49-F238E27FC236}">
-                <a16:creationId xmlns:a16="http://schemas.microsoft.com/office/drawing/2014/main" id="{AFC67784-0E8D-4210-AC94-2FBD9578C995}"/>
+                <a16:creationId xmlns:a16="http://schemas.microsoft.com/office/drawing/2014/main" id="{A503FCD6-521D-47F9-A637-B4941B079AE9}"/>
               </a:ext>
             </a:extLst>
           </p:cNvPr>
@@ -8854,7 +8854,7 @@
           <p:cNvPr id="2" name="s8-eyebrow">
             <a:extLst xmlns:a="http://schemas.openxmlformats.org/drawingml/2006/main">
               <a:ext uri="{FF2B5EF4-FFF2-40B4-BE49-F238E27FC236}">
-                <a16:creationId xmlns:a16="http://schemas.microsoft.com/office/drawing/2014/main" id="{398B1CA3-97FB-41A5-A657-55C09D83F89F}"/>
+                <a16:creationId xmlns:a16="http://schemas.microsoft.com/office/drawing/2014/main" id="{8E7B2B36-AF26-43DE-B064-84DD25482D6B}"/>
               </a:ext>
             </a:extLst>
           </p:cNvPr>
@@ -8912,7 +8912,7 @@
           <p:cNvPr id="3" name="s8-title">
             <a:extLst xmlns:a="http://schemas.openxmlformats.org/drawingml/2006/main">
               <a:ext uri="{FF2B5EF4-FFF2-40B4-BE49-F238E27FC236}">
-                <a16:creationId xmlns:a16="http://schemas.microsoft.com/office/drawing/2014/main" id="{91C58201-44AA-46EA-B4AF-4844852ED259}"/>
+                <a16:creationId xmlns:a16="http://schemas.microsoft.com/office/drawing/2014/main" id="{A26A158A-4B3C-4A77-BCBF-72C1967A775E}"/>
               </a:ext>
             </a:extLst>
           </p:cNvPr>
@@ -8960,7 +8960,7 @@
                 <a:ea typeface="PingFang SC"/>
                 <a:cs typeface="PingFang SC"/>
               </a:rPr>
-              <a:t>教学活动的双重核验必须经过边界验证</a:t>
+              <a:t>教学材料与学习评价需要双重核验</a:t>
             </a:r>
           </a:p>
         </p:txBody>
@@ -8970,7 +8970,7 @@
           <p:cNvPr id="4" name="s8-footer">
             <a:extLst xmlns:a="http://schemas.openxmlformats.org/drawingml/2006/main">
               <a:ext uri="{FF2B5EF4-FFF2-40B4-BE49-F238E27FC236}">
-                <a16:creationId xmlns:a16="http://schemas.microsoft.com/office/drawing/2014/main" id="{51F38731-FEEE-4376-9AAF-0C99C7FB47DA}"/>
+                <a16:creationId xmlns:a16="http://schemas.microsoft.com/office/drawing/2014/main" id="{14459321-5832-499D-AE98-97E04F6C1EE9}"/>
               </a:ext>
             </a:extLst>
           </p:cNvPr>
@@ -9001,7 +9001,7 @@
           <p:cNvPr id="5" name="s8-identity">
             <a:extLst xmlns:a="http://schemas.openxmlformats.org/drawingml/2006/main">
               <a:ext uri="{FF2B5EF4-FFF2-40B4-BE49-F238E27FC236}">
-                <a16:creationId xmlns:a16="http://schemas.microsoft.com/office/drawing/2014/main" id="{53C44C1F-47FE-4512-9266-DEC79AF12BE4}"/>
+                <a16:creationId xmlns:a16="http://schemas.microsoft.com/office/drawing/2014/main" id="{BED4824E-4F93-484B-897D-A7EBFFBD8408}"/>
               </a:ext>
             </a:extLst>
           </p:cNvPr>
@@ -9059,7 +9059,7 @@
           <p:cNvPr id="6" name="case-title">
             <a:extLst xmlns:a="http://schemas.openxmlformats.org/drawingml/2006/main">
               <a:ext uri="{FF2B5EF4-FFF2-40B4-BE49-F238E27FC236}">
-                <a16:creationId xmlns:a16="http://schemas.microsoft.com/office/drawing/2014/main" id="{451D9B7D-AD7C-4174-9BB7-05D50253A407}"/>
+                <a16:creationId xmlns:a16="http://schemas.microsoft.com/office/drawing/2014/main" id="{5B9DA836-57C2-43DE-8A1A-C0C037E3AF02}"/>
               </a:ext>
             </a:extLst>
           </p:cNvPr>
@@ -9123,7 +9123,7 @@
           <p:cNvPr id="7" name="case-row-0">
             <a:extLst xmlns:a="http://schemas.openxmlformats.org/drawingml/2006/main">
               <a:ext uri="{FF2B5EF4-FFF2-40B4-BE49-F238E27FC236}">
-                <a16:creationId xmlns:a16="http://schemas.microsoft.com/office/drawing/2014/main" id="{53B1A82D-54C3-4F85-A8C7-982F8AEF0D24}"/>
+                <a16:creationId xmlns:a16="http://schemas.microsoft.com/office/drawing/2014/main" id="{C46ECFB0-F495-43BD-B524-7B4E5474318C}"/>
               </a:ext>
             </a:extLst>
           </p:cNvPr>
@@ -9187,7 +9187,7 @@
           <p:cNvPr id="8" name="case-row-1">
             <a:extLst xmlns:a="http://schemas.openxmlformats.org/drawingml/2006/main">
               <a:ext uri="{FF2B5EF4-FFF2-40B4-BE49-F238E27FC236}">
-                <a16:creationId xmlns:a16="http://schemas.microsoft.com/office/drawing/2014/main" id="{CB519221-273C-4847-A776-610C20741207}"/>
+                <a16:creationId xmlns:a16="http://schemas.microsoft.com/office/drawing/2014/main" id="{EC4C55DC-AD1C-4A0E-9B1F-22E2EC898D82}"/>
               </a:ext>
             </a:extLst>
           </p:cNvPr>
@@ -9251,7 +9251,7 @@
           <p:cNvPr id="9" name="case-row-2">
             <a:extLst xmlns:a="http://schemas.openxmlformats.org/drawingml/2006/main">
               <a:ext uri="{FF2B5EF4-FFF2-40B4-BE49-F238E27FC236}">
-                <a16:creationId xmlns:a16="http://schemas.microsoft.com/office/drawing/2014/main" id="{870A6C90-16D9-4464-93D7-34FBD46F4C96}"/>
+                <a16:creationId xmlns:a16="http://schemas.microsoft.com/office/drawing/2014/main" id="{B80C74F3-806C-4130-8C23-CE55D2F4E495}"/>
               </a:ext>
             </a:extLst>
           </p:cNvPr>
@@ -9315,7 +9315,7 @@
           <p:cNvPr id="10" name="case-row-3">
             <a:extLst xmlns:a="http://schemas.openxmlformats.org/drawingml/2006/main">
               <a:ext uri="{FF2B5EF4-FFF2-40B4-BE49-F238E27FC236}">
-                <a16:creationId xmlns:a16="http://schemas.microsoft.com/office/drawing/2014/main" id="{555B4E79-1F64-412F-9154-D2166D302BF8}"/>
+                <a16:creationId xmlns:a16="http://schemas.microsoft.com/office/drawing/2014/main" id="{472E0F98-0BE1-43D7-8D35-368477B1481C}"/>
               </a:ext>
             </a:extLst>
           </p:cNvPr>
@@ -9339,7 +9339,7 @@
           </a:solidFill>
           <a:ln xmlns:a="http://schemas.openxmlformats.org/drawingml/2006/main" w="9525">
             <a:solidFill>
-              <a:srgbClr val="E5783F"/>
+              <a:srgbClr val="9A3F16"/>
             </a:solidFill>
             <a:prstDash val="solid"/>
           </a:ln>
@@ -9379,7 +9379,7 @@
           <p:cNvPr id="11" name="s8-takeaway-rule">
             <a:extLst xmlns:a="http://schemas.openxmlformats.org/drawingml/2006/main">
               <a:ext uri="{FF2B5EF4-FFF2-40B4-BE49-F238E27FC236}">
-                <a16:creationId xmlns:a16="http://schemas.microsoft.com/office/drawing/2014/main" id="{D1068F27-5605-4770-9FF0-4BF528F986BF}"/>
+                <a16:creationId xmlns:a16="http://schemas.microsoft.com/office/drawing/2014/main" id="{02514BCD-3C55-4007-A52F-7FDFD3B6173C}"/>
               </a:ext>
             </a:extLst>
           </p:cNvPr>
@@ -9412,7 +9412,7 @@
           <p:cNvPr id="12" name="s8-takeaway">
             <a:extLst xmlns:a="http://schemas.openxmlformats.org/drawingml/2006/main">
               <a:ext uri="{FF2B5EF4-FFF2-40B4-BE49-F238E27FC236}">
-                <a16:creationId xmlns:a16="http://schemas.microsoft.com/office/drawing/2014/main" id="{599BC3DD-FFB4-4B2E-B9F2-59AD22D004D8}"/>
+                <a16:creationId xmlns:a16="http://schemas.microsoft.com/office/drawing/2014/main" id="{8663A544-A583-4EE1-94B5-DB75B3B1AC1B}"/>
               </a:ext>
             </a:extLst>
           </p:cNvPr>
@@ -9460,7 +9460,7 @@
                 <a:ea typeface="PingFang SC"/>
                 <a:cs typeface="PingFang SC"/>
               </a:rPr>
-              <a:t>教学活动的双重核验必须经过边界验证</a:t>
+              <a:t>教学材料与学习评价需要双重核验</a:t>
             </a:r>
           </a:p>
         </p:txBody>
@@ -9468,7 +9468,7 @@
     </p:spTree>
     <p:extLst>
       <p:ext uri="{BB962C8B-B14F-4D97-AF65-F5344CB8AC3E}">
-        <p14:creationId xmlns:p14="http://schemas.microsoft.com/office/powerpoint/2010/main" val="162444605"/>
+        <p14:creationId xmlns:p14="http://schemas.microsoft.com/office/powerpoint/2010/main" val="2037485197"/>
       </p:ext>
     </p:extLst>
   </p:cSld>
@@ -9499,7 +9499,7 @@
           <p:cNvPr id="1" name="s9-rule">
             <a:extLst xmlns:a="http://schemas.openxmlformats.org/drawingml/2006/main">
               <a:ext uri="{FF2B5EF4-FFF2-40B4-BE49-F238E27FC236}">
-                <a16:creationId xmlns:a16="http://schemas.microsoft.com/office/drawing/2014/main" id="{D931F673-9C2A-4176-A6FE-60BC2FAA7BDB}"/>
+                <a16:creationId xmlns:a16="http://schemas.microsoft.com/office/drawing/2014/main" id="{A8C318BA-960A-44B9-8F7F-2DA8C6BAA3B6}"/>
               </a:ext>
             </a:extLst>
           </p:cNvPr>
@@ -9532,7 +9532,7 @@
           <p:cNvPr id="2" name="s9-eyebrow">
             <a:extLst xmlns:a="http://schemas.openxmlformats.org/drawingml/2006/main">
               <a:ext uri="{FF2B5EF4-FFF2-40B4-BE49-F238E27FC236}">
-                <a16:creationId xmlns:a16="http://schemas.microsoft.com/office/drawing/2014/main" id="{3B121B3B-EE76-4EC4-971F-D900DAE8EB69}"/>
+                <a16:creationId xmlns:a16="http://schemas.microsoft.com/office/drawing/2014/main" id="{E453A525-789A-451F-936E-EE91977422C5}"/>
               </a:ext>
             </a:extLst>
           </p:cNvPr>
@@ -9590,7 +9590,7 @@
           <p:cNvPr id="3" name="s9-title">
             <a:extLst xmlns:a="http://schemas.openxmlformats.org/drawingml/2006/main">
               <a:ext uri="{FF2B5EF4-FFF2-40B4-BE49-F238E27FC236}">
-                <a16:creationId xmlns:a16="http://schemas.microsoft.com/office/drawing/2014/main" id="{565A569D-2B71-4C33-B208-3E0BB8E56365}"/>
+                <a16:creationId xmlns:a16="http://schemas.microsoft.com/office/drawing/2014/main" id="{9543254C-A8BE-445F-BA0E-CB7EE47F4FC0}"/>
               </a:ext>
             </a:extLst>
           </p:cNvPr>
@@ -9638,7 +9638,7 @@
                 <a:ea typeface="PingFang SC"/>
                 <a:cs typeface="PingFang SC"/>
               </a:rPr>
-              <a:t>文献检索与实验复现必须经过边界验证</a:t>
+              <a:t>检索式、依赖与数据版本共同决定可复现性</a:t>
             </a:r>
           </a:p>
         </p:txBody>
@@ -9648,7 +9648,7 @@
           <p:cNvPr id="4" name="s9-footer">
             <a:extLst xmlns:a="http://schemas.openxmlformats.org/drawingml/2006/main">
               <a:ext uri="{FF2B5EF4-FFF2-40B4-BE49-F238E27FC236}">
-                <a16:creationId xmlns:a16="http://schemas.microsoft.com/office/drawing/2014/main" id="{8BFF8522-5335-410F-8941-9A5E6111B182}"/>
+                <a16:creationId xmlns:a16="http://schemas.microsoft.com/office/drawing/2014/main" id="{5D52A407-7EB3-4D99-8359-97246202B9C8}"/>
               </a:ext>
             </a:extLst>
           </p:cNvPr>
@@ -9679,7 +9679,7 @@
           <p:cNvPr id="5" name="s9-identity">
             <a:extLst xmlns:a="http://schemas.openxmlformats.org/drawingml/2006/main">
               <a:ext uri="{FF2B5EF4-FFF2-40B4-BE49-F238E27FC236}">
-                <a16:creationId xmlns:a16="http://schemas.microsoft.com/office/drawing/2014/main" id="{197967D3-77E2-4189-AE04-19F589E2200D}"/>
+                <a16:creationId xmlns:a16="http://schemas.microsoft.com/office/drawing/2014/main" id="{33497479-AFF8-43B0-AC4F-B2943C980A83}"/>
               </a:ext>
             </a:extLst>
           </p:cNvPr>
@@ -9737,7 +9737,7 @@
           <p:cNvPr id="6" name="case-title">
             <a:extLst xmlns:a="http://schemas.openxmlformats.org/drawingml/2006/main">
               <a:ext uri="{FF2B5EF4-FFF2-40B4-BE49-F238E27FC236}">
-                <a16:creationId xmlns:a16="http://schemas.microsoft.com/office/drawing/2014/main" id="{D0464FAF-DA44-4DCC-A455-B4E74F29DAD8}"/>
+                <a16:creationId xmlns:a16="http://schemas.microsoft.com/office/drawing/2014/main" id="{ACAFC79A-F827-4885-9094-F140E12A246D}"/>
               </a:ext>
             </a:extLst>
           </p:cNvPr>
@@ -9801,7 +9801,7 @@
           <p:cNvPr id="7" name="case-row-0">
             <a:extLst xmlns:a="http://schemas.openxmlformats.org/drawingml/2006/main">
               <a:ext uri="{FF2B5EF4-FFF2-40B4-BE49-F238E27FC236}">
-                <a16:creationId xmlns:a16="http://schemas.microsoft.com/office/drawing/2014/main" id="{7BBF117A-2318-4556-B92F-9B6A59C4912F}"/>
+                <a16:creationId xmlns:a16="http://schemas.microsoft.com/office/drawing/2014/main" id="{BA10DCA1-8F8D-4551-B243-876EFD434B16}"/>
               </a:ext>
             </a:extLst>
           </p:cNvPr>
@@ -9865,7 +9865,7 @@
           <p:cNvPr id="8" name="case-row-1">
             <a:extLst xmlns:a="http://schemas.openxmlformats.org/drawingml/2006/main">
               <a:ext uri="{FF2B5EF4-FFF2-40B4-BE49-F238E27FC236}">
-                <a16:creationId xmlns:a16="http://schemas.microsoft.com/office/drawing/2014/main" id="{F87E604C-FAA1-4418-BDAE-B2228A72280E}"/>
+                <a16:creationId xmlns:a16="http://schemas.microsoft.com/office/drawing/2014/main" id="{82DA8D35-8A56-498E-9DC5-1F8992522E7D}"/>
               </a:ext>
             </a:extLst>
           </p:cNvPr>
@@ -9929,7 +9929,7 @@
           <p:cNvPr id="9" name="case-row-2">
             <a:extLst xmlns:a="http://schemas.openxmlformats.org/drawingml/2006/main">
               <a:ext uri="{FF2B5EF4-FFF2-40B4-BE49-F238E27FC236}">
-                <a16:creationId xmlns:a16="http://schemas.microsoft.com/office/drawing/2014/main" id="{B3C348D7-DA55-49D3-A0AB-983E23F67CA7}"/>
+                <a16:creationId xmlns:a16="http://schemas.microsoft.com/office/drawing/2014/main" id="{AF079D24-EE99-4DFC-BBC5-AED588DB1323}"/>
               </a:ext>
             </a:extLst>
           </p:cNvPr>
@@ -9993,7 +9993,7 @@
           <p:cNvPr id="10" name="case-row-3">
             <a:extLst xmlns:a="http://schemas.openxmlformats.org/drawingml/2006/main">
               <a:ext uri="{FF2B5EF4-FFF2-40B4-BE49-F238E27FC236}">
-                <a16:creationId xmlns:a16="http://schemas.microsoft.com/office/drawing/2014/main" id="{4C43B5B3-E7B8-4441-AFD2-F0E6CD75DB33}"/>
+                <a16:creationId xmlns:a16="http://schemas.microsoft.com/office/drawing/2014/main" id="{1B726C20-26A7-4F0F-B900-F6C2DFD7C83F}"/>
               </a:ext>
             </a:extLst>
           </p:cNvPr>
@@ -10017,7 +10017,7 @@
           </a:solidFill>
           <a:ln xmlns:a="http://schemas.openxmlformats.org/drawingml/2006/main" w="9525">
             <a:solidFill>
-              <a:srgbClr val="E5783F"/>
+              <a:srgbClr val="9A3F16"/>
             </a:solidFill>
             <a:prstDash val="solid"/>
           </a:ln>
@@ -10057,7 +10057,7 @@
           <p:cNvPr id="11" name="s9-takeaway-rule">
             <a:extLst xmlns:a="http://schemas.openxmlformats.org/drawingml/2006/main">
               <a:ext uri="{FF2B5EF4-FFF2-40B4-BE49-F238E27FC236}">
-                <a16:creationId xmlns:a16="http://schemas.microsoft.com/office/drawing/2014/main" id="{7EC9BD80-5473-4E92-BB46-5F7B73A69764}"/>
+                <a16:creationId xmlns:a16="http://schemas.microsoft.com/office/drawing/2014/main" id="{A349B2B6-FECC-40C0-98B6-93BC9B67C4A8}"/>
               </a:ext>
             </a:extLst>
           </p:cNvPr>
@@ -10090,7 +10090,7 @@
           <p:cNvPr id="12" name="s9-takeaway">
             <a:extLst xmlns:a="http://schemas.openxmlformats.org/drawingml/2006/main">
               <a:ext uri="{FF2B5EF4-FFF2-40B4-BE49-F238E27FC236}">
-                <a16:creationId xmlns:a16="http://schemas.microsoft.com/office/drawing/2014/main" id="{C9A7723D-923E-4883-A3F7-1C62E29C9EB8}"/>
+                <a16:creationId xmlns:a16="http://schemas.microsoft.com/office/drawing/2014/main" id="{18BF66FE-697A-47F5-9102-FE031C4C0288}"/>
               </a:ext>
             </a:extLst>
           </p:cNvPr>
@@ -10138,7 +10138,7 @@
                 <a:ea typeface="PingFang SC"/>
                 <a:cs typeface="PingFang SC"/>
               </a:rPr>
-              <a:t>文献检索与实验复现必须经过边界验证</a:t>
+              <a:t>检索式、依赖与数据版本共同决定可复现性</a:t>
             </a:r>
           </a:p>
         </p:txBody>
@@ -10146,7 +10146,7 @@
     </p:spTree>
     <p:extLst>
       <p:ext uri="{BB962C8B-B14F-4D97-AF65-F5344CB8AC3E}">
-        <p14:creationId xmlns:p14="http://schemas.microsoft.com/office/powerpoint/2010/main" val="180059613"/>
+        <p14:creationId xmlns:p14="http://schemas.microsoft.com/office/powerpoint/2010/main" val="1183301078"/>
       </p:ext>
     </p:extLst>
   </p:cSld>

--- a/docs/public/course-assets/course-pptx/in-002.pptx
+++ b/docs/public/course-assets/course-pptx/in-002.pptx
@@ -2,24 +2,24 @@
 <file path=ppt/presentation.xml><?xml version="1.0" encoding="utf-8"?>
 <p:presentation xmlns:p="http://schemas.openxmlformats.org/presentationml/2006/main">
   <p:sldMasterIdLst>
-    <p:sldMasterId xmlns:r="http://schemas.openxmlformats.org/officeDocument/2006/relationships" id="2147483648" r:id="R4ac645217c634a5d"/>
+    <p:sldMasterId xmlns:r="http://schemas.openxmlformats.org/officeDocument/2006/relationships" id="2147483648" r:id="R88b593751d974e75"/>
   </p:sldMasterIdLst>
   <p:notesMasterIdLst>
-    <p:notesMasterId xmlns:r="http://schemas.openxmlformats.org/officeDocument/2006/relationships" r:id="R35f564b25ae447ea"/>
+    <p:notesMasterId xmlns:r="http://schemas.openxmlformats.org/officeDocument/2006/relationships" r:id="R1d6734759889452f"/>
   </p:notesMasterIdLst>
   <p:sldIdLst>
-    <p:sldId xmlns:r="http://schemas.openxmlformats.org/officeDocument/2006/relationships" id="256" r:id="Rbe5dca254fb447bc"/>
-    <p:sldId xmlns:r="http://schemas.openxmlformats.org/officeDocument/2006/relationships" id="257" r:id="R2c4423325e384d8e"/>
-    <p:sldId xmlns:r="http://schemas.openxmlformats.org/officeDocument/2006/relationships" id="258" r:id="R1e6818867e03403f"/>
-    <p:sldId xmlns:r="http://schemas.openxmlformats.org/officeDocument/2006/relationships" id="259" r:id="R67d366e0ff1a4a12"/>
-    <p:sldId xmlns:r="http://schemas.openxmlformats.org/officeDocument/2006/relationships" id="260" r:id="Rab50fd0fa87c42aa"/>
-    <p:sldId xmlns:r="http://schemas.openxmlformats.org/officeDocument/2006/relationships" id="261" r:id="R17d67a8d1fe94f82"/>
-    <p:sldId xmlns:r="http://schemas.openxmlformats.org/officeDocument/2006/relationships" id="262" r:id="R79b6cceb583d4887"/>
-    <p:sldId xmlns:r="http://schemas.openxmlformats.org/officeDocument/2006/relationships" id="263" r:id="Ra4ffc3c142414e16"/>
-    <p:sldId xmlns:r="http://schemas.openxmlformats.org/officeDocument/2006/relationships" id="264" r:id="R0fe4acbc5fb34bab"/>
-    <p:sldId xmlns:r="http://schemas.openxmlformats.org/officeDocument/2006/relationships" id="265" r:id="R72afce22e52146e7"/>
-    <p:sldId xmlns:r="http://schemas.openxmlformats.org/officeDocument/2006/relationships" id="266" r:id="Ra5823b237bbc4942"/>
-    <p:sldId xmlns:r="http://schemas.openxmlformats.org/officeDocument/2006/relationships" id="267" r:id="R153f2f0ff054484d"/>
+    <p:sldId xmlns:r="http://schemas.openxmlformats.org/officeDocument/2006/relationships" id="256" r:id="Rb13ae2e015f5420c"/>
+    <p:sldId xmlns:r="http://schemas.openxmlformats.org/officeDocument/2006/relationships" id="257" r:id="R181fe130d05544d7"/>
+    <p:sldId xmlns:r="http://schemas.openxmlformats.org/officeDocument/2006/relationships" id="258" r:id="Ra1d6a3594d9c49e2"/>
+    <p:sldId xmlns:r="http://schemas.openxmlformats.org/officeDocument/2006/relationships" id="259" r:id="Rdd9a2e921978438e"/>
+    <p:sldId xmlns:r="http://schemas.openxmlformats.org/officeDocument/2006/relationships" id="260" r:id="R9f1616eb5f4e4fb4"/>
+    <p:sldId xmlns:r="http://schemas.openxmlformats.org/officeDocument/2006/relationships" id="261" r:id="R6710c9d221b84929"/>
+    <p:sldId xmlns:r="http://schemas.openxmlformats.org/officeDocument/2006/relationships" id="262" r:id="R92859e1c358e4889"/>
+    <p:sldId xmlns:r="http://schemas.openxmlformats.org/officeDocument/2006/relationships" id="263" r:id="R2451d5e255d24886"/>
+    <p:sldId xmlns:r="http://schemas.openxmlformats.org/officeDocument/2006/relationships" id="264" r:id="R62730b39c4a14e2c"/>
+    <p:sldId xmlns:r="http://schemas.openxmlformats.org/officeDocument/2006/relationships" id="265" r:id="R5bc17e507ace4596"/>
+    <p:sldId xmlns:r="http://schemas.openxmlformats.org/officeDocument/2006/relationships" id="266" r:id="R489804f0b3d04660"/>
+    <p:sldId xmlns:r="http://schemas.openxmlformats.org/officeDocument/2006/relationships" id="267" r:id="R36b390b67ede4872"/>
   </p:sldIdLst>
   <p:sldSz cx="12192000" cy="6858000"/>
   <p:notesSz cx="6858000" cy="9144000"/>
@@ -1338,7 +1338,7 @@
   </p:cSld>
   <p:clrMap bg1="lt1" tx1="dk1" bg2="lt2" tx2="dk2" accent1="accent1" accent2="accent2" accent3="accent3" accent4="accent4" accent5="accent5" accent6="accent6" hlink="hlink" folHlink="folHlink"/>
   <p:sldLayoutIdLst>
-    <p:sldLayoutId xmlns:r="http://schemas.openxmlformats.org/officeDocument/2006/relationships" id="2147483649" r:id="R55cfab1c31de4705"/>
+    <p:sldLayoutId xmlns:r="http://schemas.openxmlformats.org/officeDocument/2006/relationships" id="2147483649" r:id="R9ec54ccf683a4923"/>
   </p:sldLayoutIdLst>
   <p:txStyles>
     <p:titleStyle>
@@ -1889,7 +1889,7 @@
           <p:cNvPr id="1" name="cover-rule">
             <a:extLst xmlns:a="http://schemas.openxmlformats.org/drawingml/2006/main">
               <a:ext uri="{FF2B5EF4-FFF2-40B4-BE49-F238E27FC236}">
-                <a16:creationId xmlns:a16="http://schemas.microsoft.com/office/drawing/2014/main" id="{2DACCBCB-3E97-419D-802C-11D25A3ED3C0}"/>
+                <a16:creationId xmlns:a16="http://schemas.microsoft.com/office/drawing/2014/main" id="{93E04176-AED5-430A-B436-71DBFD58224D}"/>
               </a:ext>
             </a:extLst>
           </p:cNvPr>
@@ -1922,7 +1922,7 @@
           <p:cNvPr id="2" name="cover-ring-1">
             <a:extLst xmlns:a="http://schemas.openxmlformats.org/drawingml/2006/main">
               <a:ext uri="{FF2B5EF4-FFF2-40B4-BE49-F238E27FC236}">
-                <a16:creationId xmlns:a16="http://schemas.microsoft.com/office/drawing/2014/main" id="{47238DC1-7ED8-465E-AC41-5327BF7EE82D}"/>
+                <a16:creationId xmlns:a16="http://schemas.microsoft.com/office/drawing/2014/main" id="{73D3F9BA-FE77-452B-9BC2-E05D75DDF5B3}"/>
               </a:ext>
             </a:extLst>
           </p:cNvPr>
@@ -1953,7 +1953,7 @@
           <p:cNvPr id="3" name="cover-ring-2">
             <a:extLst xmlns:a="http://schemas.openxmlformats.org/drawingml/2006/main">
               <a:ext uri="{FF2B5EF4-FFF2-40B4-BE49-F238E27FC236}">
-                <a16:creationId xmlns:a16="http://schemas.microsoft.com/office/drawing/2014/main" id="{276A6220-1E59-49D7-AA7C-9754020D1E7C}"/>
+                <a16:creationId xmlns:a16="http://schemas.microsoft.com/office/drawing/2014/main" id="{79873EB5-9357-48FA-A49E-E730AC809A68}"/>
               </a:ext>
             </a:extLst>
           </p:cNvPr>
@@ -1984,7 +1984,7 @@
           <p:cNvPr id="4" name="cover-core">
             <a:extLst xmlns:a="http://schemas.openxmlformats.org/drawingml/2006/main">
               <a:ext uri="{FF2B5EF4-FFF2-40B4-BE49-F238E27FC236}">
-                <a16:creationId xmlns:a16="http://schemas.microsoft.com/office/drawing/2014/main" id="{747B2B3A-A399-40E8-895F-9292FCBB65ED}"/>
+                <a16:creationId xmlns:a16="http://schemas.microsoft.com/office/drawing/2014/main" id="{C98F04FA-DB1C-4FF4-8F73-D179BF3B6A4E}"/>
               </a:ext>
             </a:extLst>
           </p:cNvPr>
@@ -2017,7 +2017,7 @@
           <p:cNvPr id="5" name="cover-line-1">
             <a:extLst xmlns:a="http://schemas.openxmlformats.org/drawingml/2006/main">
               <a:ext uri="{FF2B5EF4-FFF2-40B4-BE49-F238E27FC236}">
-                <a16:creationId xmlns:a16="http://schemas.microsoft.com/office/drawing/2014/main" id="{05D97ED3-1DE1-4FD7-A819-12DD30BA9B82}"/>
+                <a16:creationId xmlns:a16="http://schemas.microsoft.com/office/drawing/2014/main" id="{262E8A2E-4068-41F5-AC37-B61240170706}"/>
               </a:ext>
             </a:extLst>
           </p:cNvPr>
@@ -2048,7 +2048,7 @@
           <p:cNvPr id="6" name="cover-line-2">
             <a:extLst xmlns:a="http://schemas.openxmlformats.org/drawingml/2006/main">
               <a:ext uri="{FF2B5EF4-FFF2-40B4-BE49-F238E27FC236}">
-                <a16:creationId xmlns:a16="http://schemas.microsoft.com/office/drawing/2014/main" id="{4F53B91A-1DE7-4BFE-A66D-947C4DAC2D5C}"/>
+                <a16:creationId xmlns:a16="http://schemas.microsoft.com/office/drawing/2014/main" id="{00A2D628-5D7F-4367-84DA-4A7143DEEE1C}"/>
               </a:ext>
             </a:extLst>
           </p:cNvPr>
@@ -2079,7 +2079,7 @@
           <p:cNvPr id="7" name="cover-eyebrow">
             <a:extLst xmlns:a="http://schemas.openxmlformats.org/drawingml/2006/main">
               <a:ext uri="{FF2B5EF4-FFF2-40B4-BE49-F238E27FC236}">
-                <a16:creationId xmlns:a16="http://schemas.microsoft.com/office/drawing/2014/main" id="{A7955DB8-0773-423B-9F41-BA7B60D374E2}"/>
+                <a16:creationId xmlns:a16="http://schemas.microsoft.com/office/drawing/2014/main" id="{2620CC43-97BB-4F38-B312-298F39145F40}"/>
               </a:ext>
             </a:extLst>
           </p:cNvPr>
@@ -2137,7 +2137,7 @@
           <p:cNvPr id="8" name="cover-title">
             <a:extLst xmlns:a="http://schemas.openxmlformats.org/drawingml/2006/main">
               <a:ext uri="{FF2B5EF4-FFF2-40B4-BE49-F238E27FC236}">
-                <a16:creationId xmlns:a16="http://schemas.microsoft.com/office/drawing/2014/main" id="{0E9BF783-EF20-4822-B9F3-877661DBE673}"/>
+                <a16:creationId xmlns:a16="http://schemas.microsoft.com/office/drawing/2014/main" id="{DCEF9931-0813-4618-98CB-353455810C37}"/>
               </a:ext>
             </a:extLst>
           </p:cNvPr>
@@ -2195,7 +2195,7 @@
           <p:cNvPr id="9" name="cover-subtitle">
             <a:extLst xmlns:a="http://schemas.openxmlformats.org/drawingml/2006/main">
               <a:ext uri="{FF2B5EF4-FFF2-40B4-BE49-F238E27FC236}">
-                <a16:creationId xmlns:a16="http://schemas.microsoft.com/office/drawing/2014/main" id="{4075DFA0-3695-4F1C-A826-410A127B1CE5}"/>
+                <a16:creationId xmlns:a16="http://schemas.microsoft.com/office/drawing/2014/main" id="{51EA75D0-5EF0-4B15-A18F-CE31F2F8770A}"/>
               </a:ext>
             </a:extLst>
           </p:cNvPr>
@@ -2257,7 +2257,7 @@
           <p:cNvPr id="10" name="cover-lead">
             <a:extLst xmlns:a="http://schemas.openxmlformats.org/drawingml/2006/main">
               <a:ext uri="{FF2B5EF4-FFF2-40B4-BE49-F238E27FC236}">
-                <a16:creationId xmlns:a16="http://schemas.microsoft.com/office/drawing/2014/main" id="{8817B154-7851-4E51-8246-A276A94CC2E5}"/>
+                <a16:creationId xmlns:a16="http://schemas.microsoft.com/office/drawing/2014/main" id="{785E0CBF-70D8-468F-B184-1F681239580B}"/>
               </a:ext>
             </a:extLst>
           </p:cNvPr>
@@ -2315,7 +2315,7 @@
           <p:cNvPr id="11" name="cover-course">
             <a:extLst xmlns:a="http://schemas.openxmlformats.org/drawingml/2006/main">
               <a:ext uri="{FF2B5EF4-FFF2-40B4-BE49-F238E27FC236}">
-                <a16:creationId xmlns:a16="http://schemas.microsoft.com/office/drawing/2014/main" id="{8BB18594-E740-4B59-86EC-FEBC1E92DB2B}"/>
+                <a16:creationId xmlns:a16="http://schemas.microsoft.com/office/drawing/2014/main" id="{8AB14CEA-9CE5-44FF-8D49-C4D38BA661A8}"/>
               </a:ext>
             </a:extLst>
           </p:cNvPr>
@@ -2373,7 +2373,7 @@
           <p:cNvPr id="12" name="cover-id">
             <a:extLst xmlns:a="http://schemas.openxmlformats.org/drawingml/2006/main">
               <a:ext uri="{FF2B5EF4-FFF2-40B4-BE49-F238E27FC236}">
-                <a16:creationId xmlns:a16="http://schemas.microsoft.com/office/drawing/2014/main" id="{105E4DBF-05F1-4AE6-A7AF-EFCAA2E46943}"/>
+                <a16:creationId xmlns:a16="http://schemas.microsoft.com/office/drawing/2014/main" id="{D0B60D32-91AA-4EED-873B-C4057D24CC58}"/>
               </a:ext>
             </a:extLst>
           </p:cNvPr>
@@ -2429,7 +2429,7 @@
     </p:spTree>
     <p:extLst>
       <p:ext uri="{BB962C8B-B14F-4D97-AF65-F5344CB8AC3E}">
-        <p14:creationId xmlns:p14="http://schemas.microsoft.com/office/powerpoint/2010/main" val="10836584"/>
+        <p14:creationId xmlns:p14="http://schemas.microsoft.com/office/powerpoint/2010/main" val="595704117"/>
       </p:ext>
     </p:extLst>
   </p:cSld>
@@ -2460,7 +2460,7 @@
           <p:cNvPr id="1" name="s10-rule">
             <a:extLst xmlns:a="http://schemas.openxmlformats.org/drawingml/2006/main">
               <a:ext uri="{FF2B5EF4-FFF2-40B4-BE49-F238E27FC236}">
-                <a16:creationId xmlns:a16="http://schemas.microsoft.com/office/drawing/2014/main" id="{51B01159-A43D-493E-958E-FE049ADDDE96}"/>
+                <a16:creationId xmlns:a16="http://schemas.microsoft.com/office/drawing/2014/main" id="{28C270BB-A5AD-42C9-9F9D-4D49D6BA8D1A}"/>
               </a:ext>
             </a:extLst>
           </p:cNvPr>
@@ -2493,7 +2493,7 @@
           <p:cNvPr id="2" name="s10-eyebrow">
             <a:extLst xmlns:a="http://schemas.openxmlformats.org/drawingml/2006/main">
               <a:ext uri="{FF2B5EF4-FFF2-40B4-BE49-F238E27FC236}">
-                <a16:creationId xmlns:a16="http://schemas.microsoft.com/office/drawing/2014/main" id="{DEA0CDE2-A4C9-44BF-A36D-607ED9981DBD}"/>
+                <a16:creationId xmlns:a16="http://schemas.microsoft.com/office/drawing/2014/main" id="{15D9C57D-FD27-4865-8D91-188379ED9353}"/>
               </a:ext>
             </a:extLst>
           </p:cNvPr>
@@ -2551,7 +2551,7 @@
           <p:cNvPr id="3" name="s10-title">
             <a:extLst xmlns:a="http://schemas.openxmlformats.org/drawingml/2006/main">
               <a:ext uri="{FF2B5EF4-FFF2-40B4-BE49-F238E27FC236}">
-                <a16:creationId xmlns:a16="http://schemas.microsoft.com/office/drawing/2014/main" id="{750B7EFD-776F-44CF-880C-C09699CC949A}"/>
+                <a16:creationId xmlns:a16="http://schemas.microsoft.com/office/drawing/2014/main" id="{B5B4277A-2BAA-4DDD-B7AA-CC8AC8A5CAC9}"/>
               </a:ext>
             </a:extLst>
           </p:cNvPr>
@@ -2609,7 +2609,7 @@
           <p:cNvPr id="4" name="s10-footer">
             <a:extLst xmlns:a="http://schemas.openxmlformats.org/drawingml/2006/main">
               <a:ext uri="{FF2B5EF4-FFF2-40B4-BE49-F238E27FC236}">
-                <a16:creationId xmlns:a16="http://schemas.microsoft.com/office/drawing/2014/main" id="{0903BF09-3C1D-4379-97BB-D73A568F4DA3}"/>
+                <a16:creationId xmlns:a16="http://schemas.microsoft.com/office/drawing/2014/main" id="{7F9E04EC-8842-4915-B53E-2343092B172E}"/>
               </a:ext>
             </a:extLst>
           </p:cNvPr>
@@ -2640,7 +2640,7 @@
           <p:cNvPr id="5" name="s10-identity">
             <a:extLst xmlns:a="http://schemas.openxmlformats.org/drawingml/2006/main">
               <a:ext uri="{FF2B5EF4-FFF2-40B4-BE49-F238E27FC236}">
-                <a16:creationId xmlns:a16="http://schemas.microsoft.com/office/drawing/2014/main" id="{878F4789-E879-44D9-9B5D-3B835D174FE5}"/>
+                <a16:creationId xmlns:a16="http://schemas.microsoft.com/office/drawing/2014/main" id="{A9171279-6A2C-42A0-A079-8C88D3AEF379}"/>
               </a:ext>
             </a:extLst>
           </p:cNvPr>
@@ -2698,7 +2698,7 @@
           <p:cNvPr id="6" name="practice-circle-0">
             <a:extLst xmlns:a="http://schemas.openxmlformats.org/drawingml/2006/main">
               <a:ext uri="{FF2B5EF4-FFF2-40B4-BE49-F238E27FC236}">
-                <a16:creationId xmlns:a16="http://schemas.microsoft.com/office/drawing/2014/main" id="{4ED2AC00-682F-4199-81D3-D458BA1DF57B}"/>
+                <a16:creationId xmlns:a16="http://schemas.microsoft.com/office/drawing/2014/main" id="{0A0D24DE-CB49-4D26-8EC7-D9562D454724}"/>
               </a:ext>
             </a:extLst>
           </p:cNvPr>
@@ -2731,7 +2731,7 @@
           <p:cNvPr id="7" name="practice-number-0">
             <a:extLst xmlns:a="http://schemas.openxmlformats.org/drawingml/2006/main">
               <a:ext uri="{FF2B5EF4-FFF2-40B4-BE49-F238E27FC236}">
-                <a16:creationId xmlns:a16="http://schemas.microsoft.com/office/drawing/2014/main" id="{C2A2DBBB-8C3A-4447-8C01-B5F9E2FAF4CE}"/>
+                <a16:creationId xmlns:a16="http://schemas.microsoft.com/office/drawing/2014/main" id="{9A457936-7CC9-4382-BDC6-A436AF75BC50}"/>
               </a:ext>
             </a:extLst>
           </p:cNvPr>
@@ -2789,7 +2789,7 @@
           <p:cNvPr id="8" name="practice-item-0">
             <a:extLst xmlns:a="http://schemas.openxmlformats.org/drawingml/2006/main">
               <a:ext uri="{FF2B5EF4-FFF2-40B4-BE49-F238E27FC236}">
-                <a16:creationId xmlns:a16="http://schemas.microsoft.com/office/drawing/2014/main" id="{5EB66D2D-A804-4A6F-82CB-F8F8E3A46C65}"/>
+                <a16:creationId xmlns:a16="http://schemas.microsoft.com/office/drawing/2014/main" id="{21D450A1-2C05-4BE3-9D59-20F259D4D2E3}"/>
               </a:ext>
             </a:extLst>
           </p:cNvPr>
@@ -2853,7 +2853,7 @@
           <p:cNvPr id="9" name="practice-connector-0">
             <a:extLst xmlns:a="http://schemas.openxmlformats.org/drawingml/2006/main">
               <a:ext uri="{FF2B5EF4-FFF2-40B4-BE49-F238E27FC236}">
-                <a16:creationId xmlns:a16="http://schemas.microsoft.com/office/drawing/2014/main" id="{3A8D6AE6-F855-4906-BACF-C42CAC6E706B}"/>
+                <a16:creationId xmlns:a16="http://schemas.microsoft.com/office/drawing/2014/main" id="{587983CC-EC62-4E3A-B38E-D006854535A2}"/>
               </a:ext>
             </a:extLst>
           </p:cNvPr>
@@ -2884,7 +2884,7 @@
           <p:cNvPr id="10" name="practice-circle-1">
             <a:extLst xmlns:a="http://schemas.openxmlformats.org/drawingml/2006/main">
               <a:ext uri="{FF2B5EF4-FFF2-40B4-BE49-F238E27FC236}">
-                <a16:creationId xmlns:a16="http://schemas.microsoft.com/office/drawing/2014/main" id="{21123B31-3D06-4723-BCAA-DE13BC290967}"/>
+                <a16:creationId xmlns:a16="http://schemas.microsoft.com/office/drawing/2014/main" id="{175C78FA-22BF-45EB-872F-CCC819E4D816}"/>
               </a:ext>
             </a:extLst>
           </p:cNvPr>
@@ -2917,7 +2917,7 @@
           <p:cNvPr id="11" name="practice-number-1">
             <a:extLst xmlns:a="http://schemas.openxmlformats.org/drawingml/2006/main">
               <a:ext uri="{FF2B5EF4-FFF2-40B4-BE49-F238E27FC236}">
-                <a16:creationId xmlns:a16="http://schemas.microsoft.com/office/drawing/2014/main" id="{1AE69A98-2D3B-4574-8EC8-7239859E57C1}"/>
+                <a16:creationId xmlns:a16="http://schemas.microsoft.com/office/drawing/2014/main" id="{F7B09537-8485-46AF-8063-65B639421CC8}"/>
               </a:ext>
             </a:extLst>
           </p:cNvPr>
@@ -2975,7 +2975,7 @@
           <p:cNvPr id="12" name="practice-item-1">
             <a:extLst xmlns:a="http://schemas.openxmlformats.org/drawingml/2006/main">
               <a:ext uri="{FF2B5EF4-FFF2-40B4-BE49-F238E27FC236}">
-                <a16:creationId xmlns:a16="http://schemas.microsoft.com/office/drawing/2014/main" id="{5E7D564B-37DE-4EFE-B226-160E64FE9160}"/>
+                <a16:creationId xmlns:a16="http://schemas.microsoft.com/office/drawing/2014/main" id="{7C720159-B355-4504-BE7B-483D59B8E250}"/>
               </a:ext>
             </a:extLst>
           </p:cNvPr>
@@ -3039,7 +3039,7 @@
           <p:cNvPr id="13" name="practice-connector-1">
             <a:extLst xmlns:a="http://schemas.openxmlformats.org/drawingml/2006/main">
               <a:ext uri="{FF2B5EF4-FFF2-40B4-BE49-F238E27FC236}">
-                <a16:creationId xmlns:a16="http://schemas.microsoft.com/office/drawing/2014/main" id="{A41C350B-C80F-4251-8475-A1322E3F1751}"/>
+                <a16:creationId xmlns:a16="http://schemas.microsoft.com/office/drawing/2014/main" id="{CA02D988-F5FD-489F-B3E9-94D3A3D4038B}"/>
               </a:ext>
             </a:extLst>
           </p:cNvPr>
@@ -3070,7 +3070,7 @@
           <p:cNvPr id="14" name="practice-circle-2">
             <a:extLst xmlns:a="http://schemas.openxmlformats.org/drawingml/2006/main">
               <a:ext uri="{FF2B5EF4-FFF2-40B4-BE49-F238E27FC236}">
-                <a16:creationId xmlns:a16="http://schemas.microsoft.com/office/drawing/2014/main" id="{100B4B1C-24DC-456B-AD27-54062AD76F74}"/>
+                <a16:creationId xmlns:a16="http://schemas.microsoft.com/office/drawing/2014/main" id="{EF00D8AC-C6FC-4EF0-A600-9EB25EAD50A7}"/>
               </a:ext>
             </a:extLst>
           </p:cNvPr>
@@ -3103,7 +3103,7 @@
           <p:cNvPr id="15" name="practice-number-2">
             <a:extLst xmlns:a="http://schemas.openxmlformats.org/drawingml/2006/main">
               <a:ext uri="{FF2B5EF4-FFF2-40B4-BE49-F238E27FC236}">
-                <a16:creationId xmlns:a16="http://schemas.microsoft.com/office/drawing/2014/main" id="{000DE37D-81CA-4ED7-96A9-35819F03C0C5}"/>
+                <a16:creationId xmlns:a16="http://schemas.microsoft.com/office/drawing/2014/main" id="{EB161EB0-0B57-491C-B0FB-CAC9A58CA21C}"/>
               </a:ext>
             </a:extLst>
           </p:cNvPr>
@@ -3161,7 +3161,7 @@
           <p:cNvPr id="16" name="practice-item-2">
             <a:extLst xmlns:a="http://schemas.openxmlformats.org/drawingml/2006/main">
               <a:ext uri="{FF2B5EF4-FFF2-40B4-BE49-F238E27FC236}">
-                <a16:creationId xmlns:a16="http://schemas.microsoft.com/office/drawing/2014/main" id="{F99C05AA-967A-4664-9DC1-314895B2C50E}"/>
+                <a16:creationId xmlns:a16="http://schemas.microsoft.com/office/drawing/2014/main" id="{C6B35C88-3E63-4C00-9D4D-DD7219E924C9}"/>
               </a:ext>
             </a:extLst>
           </p:cNvPr>
@@ -3223,7 +3223,7 @@
     </p:spTree>
     <p:extLst>
       <p:ext uri="{BB962C8B-B14F-4D97-AF65-F5344CB8AC3E}">
-        <p14:creationId xmlns:p14="http://schemas.microsoft.com/office/powerpoint/2010/main" val="1141113071"/>
+        <p14:creationId xmlns:p14="http://schemas.microsoft.com/office/powerpoint/2010/main" val="1091538331"/>
       </p:ext>
     </p:extLst>
   </p:cSld>
@@ -3254,7 +3254,7 @@
           <p:cNvPr id="1" name="s11-rule">
             <a:extLst xmlns:a="http://schemas.openxmlformats.org/drawingml/2006/main">
               <a:ext uri="{FF2B5EF4-FFF2-40B4-BE49-F238E27FC236}">
-                <a16:creationId xmlns:a16="http://schemas.microsoft.com/office/drawing/2014/main" id="{0FF87196-0AA3-4DD7-8928-403AB89E8E75}"/>
+                <a16:creationId xmlns:a16="http://schemas.microsoft.com/office/drawing/2014/main" id="{36026DB9-50CB-4E9F-BFD4-FFB99F9ACA27}"/>
               </a:ext>
             </a:extLst>
           </p:cNvPr>
@@ -3287,7 +3287,7 @@
           <p:cNvPr id="2" name="s11-eyebrow">
             <a:extLst xmlns:a="http://schemas.openxmlformats.org/drawingml/2006/main">
               <a:ext uri="{FF2B5EF4-FFF2-40B4-BE49-F238E27FC236}">
-                <a16:creationId xmlns:a16="http://schemas.microsoft.com/office/drawing/2014/main" id="{F11C78E1-65E5-4735-821B-2E3683AEDB8F}"/>
+                <a16:creationId xmlns:a16="http://schemas.microsoft.com/office/drawing/2014/main" id="{AC2B1A37-966F-4233-A2BE-D905C927F35D}"/>
               </a:ext>
             </a:extLst>
           </p:cNvPr>
@@ -3345,7 +3345,7 @@
           <p:cNvPr id="3" name="s11-title">
             <a:extLst xmlns:a="http://schemas.openxmlformats.org/drawingml/2006/main">
               <a:ext uri="{FF2B5EF4-FFF2-40B4-BE49-F238E27FC236}">
-                <a16:creationId xmlns:a16="http://schemas.microsoft.com/office/drawing/2014/main" id="{FBBF43C4-BB92-4A4F-A081-16CA14F565B9}"/>
+                <a16:creationId xmlns:a16="http://schemas.microsoft.com/office/drawing/2014/main" id="{446372A1-6D26-4C11-A183-06D8D19A9A78}"/>
               </a:ext>
             </a:extLst>
           </p:cNvPr>
@@ -3403,7 +3403,7 @@
           <p:cNvPr id="4" name="s11-footer">
             <a:extLst xmlns:a="http://schemas.openxmlformats.org/drawingml/2006/main">
               <a:ext uri="{FF2B5EF4-FFF2-40B4-BE49-F238E27FC236}">
-                <a16:creationId xmlns:a16="http://schemas.microsoft.com/office/drawing/2014/main" id="{B98DB1FC-BE3E-4F37-A5ED-F27802B397D5}"/>
+                <a16:creationId xmlns:a16="http://schemas.microsoft.com/office/drawing/2014/main" id="{CE58E4CE-3714-4EF2-A672-AFDF62E8D312}"/>
               </a:ext>
             </a:extLst>
           </p:cNvPr>
@@ -3434,7 +3434,7 @@
           <p:cNvPr id="5" name="s11-identity">
             <a:extLst xmlns:a="http://schemas.openxmlformats.org/drawingml/2006/main">
               <a:ext uri="{FF2B5EF4-FFF2-40B4-BE49-F238E27FC236}">
-                <a16:creationId xmlns:a16="http://schemas.microsoft.com/office/drawing/2014/main" id="{D0E725F3-F393-46A6-91B6-08353763F462}"/>
+                <a16:creationId xmlns:a16="http://schemas.microsoft.com/office/drawing/2014/main" id="{34A2EF49-7551-4856-81E8-F7F4466B37FA}"/>
               </a:ext>
             </a:extLst>
           </p:cNvPr>
@@ -3492,7 +3492,7 @@
           <p:cNvPr id="6" name="recap-circle-0">
             <a:extLst xmlns:a="http://schemas.openxmlformats.org/drawingml/2006/main">
               <a:ext uri="{FF2B5EF4-FFF2-40B4-BE49-F238E27FC236}">
-                <a16:creationId xmlns:a16="http://schemas.microsoft.com/office/drawing/2014/main" id="{A78BF569-8DDE-42D3-BA25-2EC07BF162A4}"/>
+                <a16:creationId xmlns:a16="http://schemas.microsoft.com/office/drawing/2014/main" id="{744594ED-65EA-49D3-9034-1243FF3285B6}"/>
               </a:ext>
             </a:extLst>
           </p:cNvPr>
@@ -3525,7 +3525,7 @@
           <p:cNvPr id="7" name="recap-number-0">
             <a:extLst xmlns:a="http://schemas.openxmlformats.org/drawingml/2006/main">
               <a:ext uri="{FF2B5EF4-FFF2-40B4-BE49-F238E27FC236}">
-                <a16:creationId xmlns:a16="http://schemas.microsoft.com/office/drawing/2014/main" id="{89C8B96C-5116-4D4B-966D-094DC7E270E4}"/>
+                <a16:creationId xmlns:a16="http://schemas.microsoft.com/office/drawing/2014/main" id="{BCF5BDE2-B940-4C84-8B36-A27CA175BD1C}"/>
               </a:ext>
             </a:extLst>
           </p:cNvPr>
@@ -3583,7 +3583,7 @@
           <p:cNvPr id="8" name="recap-item-0">
             <a:extLst xmlns:a="http://schemas.openxmlformats.org/drawingml/2006/main">
               <a:ext uri="{FF2B5EF4-FFF2-40B4-BE49-F238E27FC236}">
-                <a16:creationId xmlns:a16="http://schemas.microsoft.com/office/drawing/2014/main" id="{6D1EE3A5-2699-4B4C-B39C-8358465A7EC7}"/>
+                <a16:creationId xmlns:a16="http://schemas.microsoft.com/office/drawing/2014/main" id="{E4C91A64-96EB-421F-AFC6-C0B5E2DD5939}"/>
               </a:ext>
             </a:extLst>
           </p:cNvPr>
@@ -3647,7 +3647,7 @@
           <p:cNvPr id="9" name="recap-connector-0">
             <a:extLst xmlns:a="http://schemas.openxmlformats.org/drawingml/2006/main">
               <a:ext uri="{FF2B5EF4-FFF2-40B4-BE49-F238E27FC236}">
-                <a16:creationId xmlns:a16="http://schemas.microsoft.com/office/drawing/2014/main" id="{4AED9580-9E15-4FDF-BACF-BE2DE6D6A8FB}"/>
+                <a16:creationId xmlns:a16="http://schemas.microsoft.com/office/drawing/2014/main" id="{623604E3-AFEA-4276-A47E-9C48323C661E}"/>
               </a:ext>
             </a:extLst>
           </p:cNvPr>
@@ -3678,7 +3678,7 @@
           <p:cNvPr id="10" name="recap-circle-1">
             <a:extLst xmlns:a="http://schemas.openxmlformats.org/drawingml/2006/main">
               <a:ext uri="{FF2B5EF4-FFF2-40B4-BE49-F238E27FC236}">
-                <a16:creationId xmlns:a16="http://schemas.microsoft.com/office/drawing/2014/main" id="{B4463250-69B3-483F-9DF5-AC2610AB0C31}"/>
+                <a16:creationId xmlns:a16="http://schemas.microsoft.com/office/drawing/2014/main" id="{8C645F64-43C4-4DA9-94E8-00F139CCF497}"/>
               </a:ext>
             </a:extLst>
           </p:cNvPr>
@@ -3711,7 +3711,7 @@
           <p:cNvPr id="11" name="recap-number-1">
             <a:extLst xmlns:a="http://schemas.openxmlformats.org/drawingml/2006/main">
               <a:ext uri="{FF2B5EF4-FFF2-40B4-BE49-F238E27FC236}">
-                <a16:creationId xmlns:a16="http://schemas.microsoft.com/office/drawing/2014/main" id="{6ECD1A80-E784-4E69-BB91-43F6788EC9C5}"/>
+                <a16:creationId xmlns:a16="http://schemas.microsoft.com/office/drawing/2014/main" id="{70889F2D-FDB3-4CA3-9DF2-3003119DF3C4}"/>
               </a:ext>
             </a:extLst>
           </p:cNvPr>
@@ -3769,7 +3769,7 @@
           <p:cNvPr id="12" name="recap-item-1">
             <a:extLst xmlns:a="http://schemas.openxmlformats.org/drawingml/2006/main">
               <a:ext uri="{FF2B5EF4-FFF2-40B4-BE49-F238E27FC236}">
-                <a16:creationId xmlns:a16="http://schemas.microsoft.com/office/drawing/2014/main" id="{10497790-C653-4A47-B668-572FED78CF03}"/>
+                <a16:creationId xmlns:a16="http://schemas.microsoft.com/office/drawing/2014/main" id="{F26C7825-3DAC-4C23-AAD2-98A426888F3D}"/>
               </a:ext>
             </a:extLst>
           </p:cNvPr>
@@ -3833,7 +3833,7 @@
           <p:cNvPr id="13" name="recap-connector-1">
             <a:extLst xmlns:a="http://schemas.openxmlformats.org/drawingml/2006/main">
               <a:ext uri="{FF2B5EF4-FFF2-40B4-BE49-F238E27FC236}">
-                <a16:creationId xmlns:a16="http://schemas.microsoft.com/office/drawing/2014/main" id="{510107D7-EF7B-4309-8796-ADDE6008C2B0}"/>
+                <a16:creationId xmlns:a16="http://schemas.microsoft.com/office/drawing/2014/main" id="{C3D6F148-2F99-4FC2-B1A8-E5E1125FF57A}"/>
               </a:ext>
             </a:extLst>
           </p:cNvPr>
@@ -3864,7 +3864,7 @@
           <p:cNvPr id="14" name="recap-circle-2">
             <a:extLst xmlns:a="http://schemas.openxmlformats.org/drawingml/2006/main">
               <a:ext uri="{FF2B5EF4-FFF2-40B4-BE49-F238E27FC236}">
-                <a16:creationId xmlns:a16="http://schemas.microsoft.com/office/drawing/2014/main" id="{A83988EF-73CF-419E-B6DC-CC2D5115E0C4}"/>
+                <a16:creationId xmlns:a16="http://schemas.microsoft.com/office/drawing/2014/main" id="{AB932288-2738-45EC-AE0F-E7CCD486EAAF}"/>
               </a:ext>
             </a:extLst>
           </p:cNvPr>
@@ -3897,7 +3897,7 @@
           <p:cNvPr id="15" name="recap-number-2">
             <a:extLst xmlns:a="http://schemas.openxmlformats.org/drawingml/2006/main">
               <a:ext uri="{FF2B5EF4-FFF2-40B4-BE49-F238E27FC236}">
-                <a16:creationId xmlns:a16="http://schemas.microsoft.com/office/drawing/2014/main" id="{B9992ECB-82F0-4C81-96C9-B7388EB19605}"/>
+                <a16:creationId xmlns:a16="http://schemas.microsoft.com/office/drawing/2014/main" id="{2DF37584-8951-415B-9409-F81A84C1EC37}"/>
               </a:ext>
             </a:extLst>
           </p:cNvPr>
@@ -3955,7 +3955,7 @@
           <p:cNvPr id="16" name="recap-item-2">
             <a:extLst xmlns:a="http://schemas.openxmlformats.org/drawingml/2006/main">
               <a:ext uri="{FF2B5EF4-FFF2-40B4-BE49-F238E27FC236}">
-                <a16:creationId xmlns:a16="http://schemas.microsoft.com/office/drawing/2014/main" id="{4D90ACB0-AB5F-4629-AF43-DE71D51DB8AC}"/>
+                <a16:creationId xmlns:a16="http://schemas.microsoft.com/office/drawing/2014/main" id="{2D92D97A-319F-412F-A5E9-9D9C63BD05B9}"/>
               </a:ext>
             </a:extLst>
           </p:cNvPr>
@@ -4017,7 +4017,7 @@
     </p:spTree>
     <p:extLst>
       <p:ext uri="{BB962C8B-B14F-4D97-AF65-F5344CB8AC3E}">
-        <p14:creationId xmlns:p14="http://schemas.microsoft.com/office/powerpoint/2010/main" val="1919789317"/>
+        <p14:creationId xmlns:p14="http://schemas.microsoft.com/office/powerpoint/2010/main" val="526489658"/>
       </p:ext>
     </p:extLst>
   </p:cSld>
@@ -4048,7 +4048,7 @@
           <p:cNvPr id="1" name="s12-rule">
             <a:extLst xmlns:a="http://schemas.openxmlformats.org/drawingml/2006/main">
               <a:ext uri="{FF2B5EF4-FFF2-40B4-BE49-F238E27FC236}">
-                <a16:creationId xmlns:a16="http://schemas.microsoft.com/office/drawing/2014/main" id="{F98E6445-C0B2-42A7-8752-1F0D633304B5}"/>
+                <a16:creationId xmlns:a16="http://schemas.microsoft.com/office/drawing/2014/main" id="{7D538D24-11BB-4F8E-903D-47F8A79BB6E4}"/>
               </a:ext>
             </a:extLst>
           </p:cNvPr>
@@ -4081,7 +4081,7 @@
           <p:cNvPr id="2" name="s12-eyebrow">
             <a:extLst xmlns:a="http://schemas.openxmlformats.org/drawingml/2006/main">
               <a:ext uri="{FF2B5EF4-FFF2-40B4-BE49-F238E27FC236}">
-                <a16:creationId xmlns:a16="http://schemas.microsoft.com/office/drawing/2014/main" id="{B94CE64E-1829-4912-B16B-4A57D3298345}"/>
+                <a16:creationId xmlns:a16="http://schemas.microsoft.com/office/drawing/2014/main" id="{2EC3C093-DCB8-4C8F-AD7E-B63A3EC6571B}"/>
               </a:ext>
             </a:extLst>
           </p:cNvPr>
@@ -4139,7 +4139,7 @@
           <p:cNvPr id="3" name="s12-title">
             <a:extLst xmlns:a="http://schemas.openxmlformats.org/drawingml/2006/main">
               <a:ext uri="{FF2B5EF4-FFF2-40B4-BE49-F238E27FC236}">
-                <a16:creationId xmlns:a16="http://schemas.microsoft.com/office/drawing/2014/main" id="{D3BD8FB5-7FDE-449C-A169-155A87255181}"/>
+                <a16:creationId xmlns:a16="http://schemas.microsoft.com/office/drawing/2014/main" id="{55D80125-499A-4C7B-B143-F5326AF24447}"/>
               </a:ext>
             </a:extLst>
           </p:cNvPr>
@@ -4197,7 +4197,7 @@
           <p:cNvPr id="4" name="s12-footer">
             <a:extLst xmlns:a="http://schemas.openxmlformats.org/drawingml/2006/main">
               <a:ext uri="{FF2B5EF4-FFF2-40B4-BE49-F238E27FC236}">
-                <a16:creationId xmlns:a16="http://schemas.microsoft.com/office/drawing/2014/main" id="{C6FEC910-24F1-4BF7-B73F-7F5393A9AB49}"/>
+                <a16:creationId xmlns:a16="http://schemas.microsoft.com/office/drawing/2014/main" id="{7EF0F953-1ED3-4D30-9D9D-426D051CB5E3}"/>
               </a:ext>
             </a:extLst>
           </p:cNvPr>
@@ -4228,7 +4228,7 @@
           <p:cNvPr id="5" name="s12-identity">
             <a:extLst xmlns:a="http://schemas.openxmlformats.org/drawingml/2006/main">
               <a:ext uri="{FF2B5EF4-FFF2-40B4-BE49-F238E27FC236}">
-                <a16:creationId xmlns:a16="http://schemas.microsoft.com/office/drawing/2014/main" id="{37170F0F-95DD-4182-B839-D52C0110B6E1}"/>
+                <a16:creationId xmlns:a16="http://schemas.microsoft.com/office/drawing/2014/main" id="{DE4F3A5C-4BBD-4997-9FDF-0A468FE7E91E}"/>
               </a:ext>
             </a:extLst>
           </p:cNvPr>
@@ -4286,7 +4286,7 @@
           <p:cNvPr id="6" name="source-0">
             <a:extLst xmlns:a="http://schemas.openxmlformats.org/drawingml/2006/main">
               <a:ext uri="{FF2B5EF4-FFF2-40B4-BE49-F238E27FC236}">
-                <a16:creationId xmlns:a16="http://schemas.microsoft.com/office/drawing/2014/main" id="{173DEA55-0BDD-4F44-84E2-BD8E40E4096E}"/>
+                <a16:creationId xmlns:a16="http://schemas.microsoft.com/office/drawing/2014/main" id="{EE0B09B8-766A-4A5E-9D0E-EF132F92E5B1}"/>
               </a:ext>
             </a:extLst>
           </p:cNvPr>
@@ -4350,7 +4350,7 @@
           <p:cNvPr id="7" name="source-1">
             <a:extLst xmlns:a="http://schemas.openxmlformats.org/drawingml/2006/main">
               <a:ext uri="{FF2B5EF4-FFF2-40B4-BE49-F238E27FC236}">
-                <a16:creationId xmlns:a16="http://schemas.microsoft.com/office/drawing/2014/main" id="{A0906979-1AE2-4308-8D7B-67D08B84A743}"/>
+                <a16:creationId xmlns:a16="http://schemas.microsoft.com/office/drawing/2014/main" id="{1DB4FE89-90BE-451C-8EE0-97BB253F660E}"/>
               </a:ext>
             </a:extLst>
           </p:cNvPr>
@@ -4414,7 +4414,7 @@
           <p:cNvPr id="8" name="source-2">
             <a:extLst xmlns:a="http://schemas.openxmlformats.org/drawingml/2006/main">
               <a:ext uri="{FF2B5EF4-FFF2-40B4-BE49-F238E27FC236}">
-                <a16:creationId xmlns:a16="http://schemas.microsoft.com/office/drawing/2014/main" id="{F40BB57F-363E-4C06-B1F2-66460B53F628}"/>
+                <a16:creationId xmlns:a16="http://schemas.microsoft.com/office/drawing/2014/main" id="{72221751-C6CF-47F1-B955-45C4B146281A}"/>
               </a:ext>
             </a:extLst>
           </p:cNvPr>
@@ -4478,7 +4478,7 @@
           <p:cNvPr id="9" name="source-3">
             <a:extLst xmlns:a="http://schemas.openxmlformats.org/drawingml/2006/main">
               <a:ext uri="{FF2B5EF4-FFF2-40B4-BE49-F238E27FC236}">
-                <a16:creationId xmlns:a16="http://schemas.microsoft.com/office/drawing/2014/main" id="{94C332EB-7564-41BF-8B1F-547F03B3407D}"/>
+                <a16:creationId xmlns:a16="http://schemas.microsoft.com/office/drawing/2014/main" id="{A023FD49-1EA2-4307-B8E3-290B3580E1D4}"/>
               </a:ext>
             </a:extLst>
           </p:cNvPr>
@@ -4542,7 +4542,7 @@
           <p:cNvPr id="10" name="s12-takeaway-rule">
             <a:extLst xmlns:a="http://schemas.openxmlformats.org/drawingml/2006/main">
               <a:ext uri="{FF2B5EF4-FFF2-40B4-BE49-F238E27FC236}">
-                <a16:creationId xmlns:a16="http://schemas.microsoft.com/office/drawing/2014/main" id="{E3306A5F-1C63-4284-8CC6-E1C3910E5B48}"/>
+                <a16:creationId xmlns:a16="http://schemas.microsoft.com/office/drawing/2014/main" id="{6E88BD4C-E166-4FA3-9D0A-691DE428C6B0}"/>
               </a:ext>
             </a:extLst>
           </p:cNvPr>
@@ -4575,7 +4575,7 @@
           <p:cNvPr id="11" name="s12-takeaway">
             <a:extLst xmlns:a="http://schemas.openxmlformats.org/drawingml/2006/main">
               <a:ext uri="{FF2B5EF4-FFF2-40B4-BE49-F238E27FC236}">
-                <a16:creationId xmlns:a16="http://schemas.microsoft.com/office/drawing/2014/main" id="{537A492C-E393-4177-BF9E-5C948AE5F52E}"/>
+                <a16:creationId xmlns:a16="http://schemas.microsoft.com/office/drawing/2014/main" id="{1F23E7A8-4AF2-4734-80BF-D2665F9B76E8}"/>
               </a:ext>
             </a:extLst>
           </p:cNvPr>
@@ -4600,7 +4600,7 @@
         </p:spPr>
         <p:txBody>
           <a:bodyPr xmlns:a="http://schemas.openxmlformats.org/drawingml/2006/main" lIns="0" tIns="0" rIns="0" bIns="0" anchor="ctr">
-            <a:normAutofit fontScale="100000"/>
+            <a:normAutofit fontScale="95911"/>
           </a:bodyPr>
           <a:lstStyle xmlns:a="http://schemas.openxmlformats.org/drawingml/2006/main"/>
           <a:p xmlns:a="http://schemas.openxmlformats.org/drawingml/2006/main">
@@ -4623,7 +4623,7 @@
                 <a:ea typeface="PingFang SC"/>
                 <a:cs typeface="PingFang SC"/>
               </a:rPr>
-              <a:t>公开幻灯片只使用课程原创文字与原生图形；完整论证、链接和事实边界请见本节讲义。</a:t>
+              <a:t>课程精编页用于讲授主线；播放器中的“原课件”模式保留团队 PowerPoint 精选页、真实图片和可播放视频。</a:t>
             </a:r>
           </a:p>
         </p:txBody>
@@ -4631,7 +4631,7 @@
     </p:spTree>
     <p:extLst>
       <p:ext uri="{BB962C8B-B14F-4D97-AF65-F5344CB8AC3E}">
-        <p14:creationId xmlns:p14="http://schemas.microsoft.com/office/powerpoint/2010/main" val="1885095283"/>
+        <p14:creationId xmlns:p14="http://schemas.microsoft.com/office/powerpoint/2010/main" val="1971538254"/>
       </p:ext>
     </p:extLst>
   </p:cSld>
@@ -4662,7 +4662,7 @@
           <p:cNvPr id="1" name="s2-rule">
             <a:extLst xmlns:a="http://schemas.openxmlformats.org/drawingml/2006/main">
               <a:ext uri="{FF2B5EF4-FFF2-40B4-BE49-F238E27FC236}">
-                <a16:creationId xmlns:a16="http://schemas.microsoft.com/office/drawing/2014/main" id="{4B1A0175-CEC0-4848-84A6-A3C7F479DA7D}"/>
+                <a16:creationId xmlns:a16="http://schemas.microsoft.com/office/drawing/2014/main" id="{D60F9F66-3399-4AA0-B927-09A4C6F67B63}"/>
               </a:ext>
             </a:extLst>
           </p:cNvPr>
@@ -4695,7 +4695,7 @@
           <p:cNvPr id="2" name="s2-eyebrow">
             <a:extLst xmlns:a="http://schemas.openxmlformats.org/drawingml/2006/main">
               <a:ext uri="{FF2B5EF4-FFF2-40B4-BE49-F238E27FC236}">
-                <a16:creationId xmlns:a16="http://schemas.microsoft.com/office/drawing/2014/main" id="{1A7849F0-71F9-4E15-906D-3A14E2E82B88}"/>
+                <a16:creationId xmlns:a16="http://schemas.microsoft.com/office/drawing/2014/main" id="{824A185B-8878-4AEB-91D7-360898BB15DD}"/>
               </a:ext>
             </a:extLst>
           </p:cNvPr>
@@ -4753,7 +4753,7 @@
           <p:cNvPr id="3" name="s2-title">
             <a:extLst xmlns:a="http://schemas.openxmlformats.org/drawingml/2006/main">
               <a:ext uri="{FF2B5EF4-FFF2-40B4-BE49-F238E27FC236}">
-                <a16:creationId xmlns:a16="http://schemas.microsoft.com/office/drawing/2014/main" id="{5C86B859-46E3-4BD1-8141-E838B5B23D0D}"/>
+                <a16:creationId xmlns:a16="http://schemas.microsoft.com/office/drawing/2014/main" id="{002FBF50-F791-4132-806D-5F29429254B5}"/>
               </a:ext>
             </a:extLst>
           </p:cNvPr>
@@ -4811,7 +4811,7 @@
           <p:cNvPr id="4" name="s2-footer">
             <a:extLst xmlns:a="http://schemas.openxmlformats.org/drawingml/2006/main">
               <a:ext uri="{FF2B5EF4-FFF2-40B4-BE49-F238E27FC236}">
-                <a16:creationId xmlns:a16="http://schemas.microsoft.com/office/drawing/2014/main" id="{607AAF1B-21A4-4C12-8E6E-888D410036B5}"/>
+                <a16:creationId xmlns:a16="http://schemas.microsoft.com/office/drawing/2014/main" id="{15942672-1BE1-46B2-8CC0-8699F0DC1B24}"/>
               </a:ext>
             </a:extLst>
           </p:cNvPr>
@@ -4842,7 +4842,7 @@
           <p:cNvPr id="5" name="s2-identity">
             <a:extLst xmlns:a="http://schemas.openxmlformats.org/drawingml/2006/main">
               <a:ext uri="{FF2B5EF4-FFF2-40B4-BE49-F238E27FC236}">
-                <a16:creationId xmlns:a16="http://schemas.microsoft.com/office/drawing/2014/main" id="{910C66CF-AD59-4F5C-B18E-B44C35A8CC21}"/>
+                <a16:creationId xmlns:a16="http://schemas.microsoft.com/office/drawing/2014/main" id="{5623339F-BD92-4810-B12A-3032654D40DB}"/>
               </a:ext>
             </a:extLst>
           </p:cNvPr>
@@ -4900,7 +4900,7 @@
           <p:cNvPr id="6" name="objective-1">
             <a:extLst xmlns:a="http://schemas.openxmlformats.org/drawingml/2006/main">
               <a:ext uri="{FF2B5EF4-FFF2-40B4-BE49-F238E27FC236}">
-                <a16:creationId xmlns:a16="http://schemas.microsoft.com/office/drawing/2014/main" id="{3B08D7D9-D286-4D24-B2FB-169B83F356D3}"/>
+                <a16:creationId xmlns:a16="http://schemas.microsoft.com/office/drawing/2014/main" id="{3ABF8D86-466A-4F04-BE33-648198E743BA}"/>
               </a:ext>
             </a:extLst>
           </p:cNvPr>
@@ -4987,7 +4987,7 @@
           <p:cNvPr id="7" name="objective-2">
             <a:extLst xmlns:a="http://schemas.openxmlformats.org/drawingml/2006/main">
               <a:ext uri="{FF2B5EF4-FFF2-40B4-BE49-F238E27FC236}">
-                <a16:creationId xmlns:a16="http://schemas.microsoft.com/office/drawing/2014/main" id="{12DDCF4B-A2F2-409A-A4C7-00B160C25A91}"/>
+                <a16:creationId xmlns:a16="http://schemas.microsoft.com/office/drawing/2014/main" id="{A3785401-9520-40F1-B133-4C402922FDEA}"/>
               </a:ext>
             </a:extLst>
           </p:cNvPr>
@@ -5074,7 +5074,7 @@
           <p:cNvPr id="8" name="objective-3">
             <a:extLst xmlns:a="http://schemas.openxmlformats.org/drawingml/2006/main">
               <a:ext uri="{FF2B5EF4-FFF2-40B4-BE49-F238E27FC236}">
-                <a16:creationId xmlns:a16="http://schemas.microsoft.com/office/drawing/2014/main" id="{0B1FD452-D35A-4BE2-8BC9-B76318E7C65F}"/>
+                <a16:creationId xmlns:a16="http://schemas.microsoft.com/office/drawing/2014/main" id="{1977B8E9-4E16-4CB8-B424-445B39EEBAF7}"/>
               </a:ext>
             </a:extLst>
           </p:cNvPr>
@@ -5161,7 +5161,7 @@
           <p:cNvPr id="9" name="objective-4">
             <a:extLst xmlns:a="http://schemas.openxmlformats.org/drawingml/2006/main">
               <a:ext uri="{FF2B5EF4-FFF2-40B4-BE49-F238E27FC236}">
-                <a16:creationId xmlns:a16="http://schemas.microsoft.com/office/drawing/2014/main" id="{AC348C58-811A-4D88-9856-15E91B5A67F1}"/>
+                <a16:creationId xmlns:a16="http://schemas.microsoft.com/office/drawing/2014/main" id="{B4FBFCB6-2AA4-4940-AFD3-5019B5C1494D}"/>
               </a:ext>
             </a:extLst>
           </p:cNvPr>
@@ -5246,7 +5246,7 @@
     </p:spTree>
     <p:extLst>
       <p:ext uri="{BB962C8B-B14F-4D97-AF65-F5344CB8AC3E}">
-        <p14:creationId xmlns:p14="http://schemas.microsoft.com/office/powerpoint/2010/main" val="561244598"/>
+        <p14:creationId xmlns:p14="http://schemas.microsoft.com/office/powerpoint/2010/main" val="1601037127"/>
       </p:ext>
     </p:extLst>
   </p:cSld>
@@ -5277,7 +5277,7 @@
           <p:cNvPr id="1" name="s3-rule">
             <a:extLst xmlns:a="http://schemas.openxmlformats.org/drawingml/2006/main">
               <a:ext uri="{FF2B5EF4-FFF2-40B4-BE49-F238E27FC236}">
-                <a16:creationId xmlns:a16="http://schemas.microsoft.com/office/drawing/2014/main" id="{121067E2-6336-4DD6-983F-1A8ED53ABD27}"/>
+                <a16:creationId xmlns:a16="http://schemas.microsoft.com/office/drawing/2014/main" id="{6D2AD7B3-3772-4619-AB89-21E0EABC7DC6}"/>
               </a:ext>
             </a:extLst>
           </p:cNvPr>
@@ -5310,7 +5310,7 @@
           <p:cNvPr id="2" name="s3-eyebrow">
             <a:extLst xmlns:a="http://schemas.openxmlformats.org/drawingml/2006/main">
               <a:ext uri="{FF2B5EF4-FFF2-40B4-BE49-F238E27FC236}">
-                <a16:creationId xmlns:a16="http://schemas.microsoft.com/office/drawing/2014/main" id="{6509E9A8-3A6F-40ED-823C-1C56AA6C0CE4}"/>
+                <a16:creationId xmlns:a16="http://schemas.microsoft.com/office/drawing/2014/main" id="{86F29598-E2C9-4A43-A073-E2BA4CBE2BA0}"/>
               </a:ext>
             </a:extLst>
           </p:cNvPr>
@@ -5368,7 +5368,7 @@
           <p:cNvPr id="3" name="s3-title">
             <a:extLst xmlns:a="http://schemas.openxmlformats.org/drawingml/2006/main">
               <a:ext uri="{FF2B5EF4-FFF2-40B4-BE49-F238E27FC236}">
-                <a16:creationId xmlns:a16="http://schemas.microsoft.com/office/drawing/2014/main" id="{355DA54D-9EEF-4BA0-BBE5-D60FF698FD84}"/>
+                <a16:creationId xmlns:a16="http://schemas.microsoft.com/office/drawing/2014/main" id="{C2A6A8AB-3F58-4A90-827B-C28A769FB3CD}"/>
               </a:ext>
             </a:extLst>
           </p:cNvPr>
@@ -5426,7 +5426,7 @@
           <p:cNvPr id="4" name="s3-footer">
             <a:extLst xmlns:a="http://schemas.openxmlformats.org/drawingml/2006/main">
               <a:ext uri="{FF2B5EF4-FFF2-40B4-BE49-F238E27FC236}">
-                <a16:creationId xmlns:a16="http://schemas.microsoft.com/office/drawing/2014/main" id="{A5118215-9F60-4451-9C18-2C69B7B564D4}"/>
+                <a16:creationId xmlns:a16="http://schemas.microsoft.com/office/drawing/2014/main" id="{5712EDC2-D60C-41BF-B7C9-A4838638DF2A}"/>
               </a:ext>
             </a:extLst>
           </p:cNvPr>
@@ -5457,7 +5457,7 @@
           <p:cNvPr id="5" name="s3-identity">
             <a:extLst xmlns:a="http://schemas.openxmlformats.org/drawingml/2006/main">
               <a:ext uri="{FF2B5EF4-FFF2-40B4-BE49-F238E27FC236}">
-                <a16:creationId xmlns:a16="http://schemas.microsoft.com/office/drawing/2014/main" id="{DFE24633-8BE0-41F0-A9FB-80841AE22925}"/>
+                <a16:creationId xmlns:a16="http://schemas.microsoft.com/office/drawing/2014/main" id="{3DDBBF0C-29A1-404D-A7D6-0A41B761A60C}"/>
               </a:ext>
             </a:extLst>
           </p:cNvPr>
@@ -5515,7 +5515,7 @@
           <p:cNvPr id="6" name="core-no-0">
             <a:extLst xmlns:a="http://schemas.openxmlformats.org/drawingml/2006/main">
               <a:ext uri="{FF2B5EF4-FFF2-40B4-BE49-F238E27FC236}">
-                <a16:creationId xmlns:a16="http://schemas.microsoft.com/office/drawing/2014/main" id="{7E8828F4-4AB6-4E26-9A72-784C3AA7D3EB}"/>
+                <a16:creationId xmlns:a16="http://schemas.microsoft.com/office/drawing/2014/main" id="{1A0A6631-866C-4411-AEF5-62386010D4C6}"/>
               </a:ext>
             </a:extLst>
           </p:cNvPr>
@@ -5573,7 +5573,7 @@
           <p:cNvPr id="7" name="core-label-0">
             <a:extLst xmlns:a="http://schemas.openxmlformats.org/drawingml/2006/main">
               <a:ext uri="{FF2B5EF4-FFF2-40B4-BE49-F238E27FC236}">
-                <a16:creationId xmlns:a16="http://schemas.microsoft.com/office/drawing/2014/main" id="{FE984A42-B406-4FD0-929B-36FE752906C8}"/>
+                <a16:creationId xmlns:a16="http://schemas.microsoft.com/office/drawing/2014/main" id="{A18E18D1-89AB-4CC5-892E-E4C09DC8B23A}"/>
               </a:ext>
             </a:extLst>
           </p:cNvPr>
@@ -5631,7 +5631,7 @@
           <p:cNvPr id="8" name="core-body-0">
             <a:extLst xmlns:a="http://schemas.openxmlformats.org/drawingml/2006/main">
               <a:ext uri="{FF2B5EF4-FFF2-40B4-BE49-F238E27FC236}">
-                <a16:creationId xmlns:a16="http://schemas.microsoft.com/office/drawing/2014/main" id="{2EC19516-B1EA-4513-B910-3F55616F8970}"/>
+                <a16:creationId xmlns:a16="http://schemas.microsoft.com/office/drawing/2014/main" id="{E24F72F0-187A-466F-91BC-A61582A3B198}"/>
               </a:ext>
             </a:extLst>
           </p:cNvPr>
@@ -5695,7 +5695,7 @@
           <p:cNvPr id="9" name="core-no-1">
             <a:extLst xmlns:a="http://schemas.openxmlformats.org/drawingml/2006/main">
               <a:ext uri="{FF2B5EF4-FFF2-40B4-BE49-F238E27FC236}">
-                <a16:creationId xmlns:a16="http://schemas.microsoft.com/office/drawing/2014/main" id="{19CF86D0-D9F1-4BA7-9CB1-DA99ED19390C}"/>
+                <a16:creationId xmlns:a16="http://schemas.microsoft.com/office/drawing/2014/main" id="{EAB14803-E66A-4FA9-82AD-209514B2D0A0}"/>
               </a:ext>
             </a:extLst>
           </p:cNvPr>
@@ -5753,7 +5753,7 @@
           <p:cNvPr id="10" name="core-body-1">
             <a:extLst xmlns:a="http://schemas.openxmlformats.org/drawingml/2006/main">
               <a:ext uri="{FF2B5EF4-FFF2-40B4-BE49-F238E27FC236}">
-                <a16:creationId xmlns:a16="http://schemas.microsoft.com/office/drawing/2014/main" id="{970D36B9-F17B-498C-B578-12CC02647D07}"/>
+                <a16:creationId xmlns:a16="http://schemas.microsoft.com/office/drawing/2014/main" id="{2FBA24E4-4CD0-4369-8EC4-0E698556B5AA}"/>
               </a:ext>
             </a:extLst>
           </p:cNvPr>
@@ -5817,7 +5817,7 @@
           <p:cNvPr id="11" name="core-no-2">
             <a:extLst xmlns:a="http://schemas.openxmlformats.org/drawingml/2006/main">
               <a:ext uri="{FF2B5EF4-FFF2-40B4-BE49-F238E27FC236}">
-                <a16:creationId xmlns:a16="http://schemas.microsoft.com/office/drawing/2014/main" id="{FB1BA0F5-19BC-4450-AB23-3A481A9FEF31}"/>
+                <a16:creationId xmlns:a16="http://schemas.microsoft.com/office/drawing/2014/main" id="{A4B3DB8C-03E4-4EC0-B6F5-85FD36F2ABE5}"/>
               </a:ext>
             </a:extLst>
           </p:cNvPr>
@@ -5875,7 +5875,7 @@
           <p:cNvPr id="12" name="core-body-2">
             <a:extLst xmlns:a="http://schemas.openxmlformats.org/drawingml/2006/main">
               <a:ext uri="{FF2B5EF4-FFF2-40B4-BE49-F238E27FC236}">
-                <a16:creationId xmlns:a16="http://schemas.microsoft.com/office/drawing/2014/main" id="{C83B683C-637F-40AA-B98F-5B4ED731DE42}"/>
+                <a16:creationId xmlns:a16="http://schemas.microsoft.com/office/drawing/2014/main" id="{44985178-06B6-43D9-9390-33E1674BE9B4}"/>
               </a:ext>
             </a:extLst>
           </p:cNvPr>
@@ -5939,7 +5939,7 @@
           <p:cNvPr id="13" name="s3-takeaway-rule">
             <a:extLst xmlns:a="http://schemas.openxmlformats.org/drawingml/2006/main">
               <a:ext uri="{FF2B5EF4-FFF2-40B4-BE49-F238E27FC236}">
-                <a16:creationId xmlns:a16="http://schemas.microsoft.com/office/drawing/2014/main" id="{6F627B29-1745-47E8-8AEA-0238D98B6455}"/>
+                <a16:creationId xmlns:a16="http://schemas.microsoft.com/office/drawing/2014/main" id="{693F641C-B3E0-47C3-836F-3C8D9D61ABFD}"/>
               </a:ext>
             </a:extLst>
           </p:cNvPr>
@@ -5972,7 +5972,7 @@
           <p:cNvPr id="14" name="s3-takeaway">
             <a:extLst xmlns:a="http://schemas.openxmlformats.org/drawingml/2006/main">
               <a:ext uri="{FF2B5EF4-FFF2-40B4-BE49-F238E27FC236}">
-                <a16:creationId xmlns:a16="http://schemas.microsoft.com/office/drawing/2014/main" id="{BC069BAC-9ED5-4509-9573-C1B4E21A009E}"/>
+                <a16:creationId xmlns:a16="http://schemas.microsoft.com/office/drawing/2014/main" id="{FAC993F3-F4B6-4405-8EC4-1AD2B75E30B9}"/>
               </a:ext>
             </a:extLst>
           </p:cNvPr>
@@ -6028,7 +6028,7 @@
     </p:spTree>
     <p:extLst>
       <p:ext uri="{BB962C8B-B14F-4D97-AF65-F5344CB8AC3E}">
-        <p14:creationId xmlns:p14="http://schemas.microsoft.com/office/powerpoint/2010/main" val="444549138"/>
+        <p14:creationId xmlns:p14="http://schemas.microsoft.com/office/powerpoint/2010/main" val="980956412"/>
       </p:ext>
     </p:extLst>
   </p:cSld>
@@ -6059,7 +6059,7 @@
           <p:cNvPr id="1" name="s4-rule">
             <a:extLst xmlns:a="http://schemas.openxmlformats.org/drawingml/2006/main">
               <a:ext uri="{FF2B5EF4-FFF2-40B4-BE49-F238E27FC236}">
-                <a16:creationId xmlns:a16="http://schemas.microsoft.com/office/drawing/2014/main" id="{451DC4D2-C7AA-44A5-99EF-32CF63F1F570}"/>
+                <a16:creationId xmlns:a16="http://schemas.microsoft.com/office/drawing/2014/main" id="{AF0830F7-6229-4363-AE42-F878E1472029}"/>
               </a:ext>
             </a:extLst>
           </p:cNvPr>
@@ -6092,7 +6092,7 @@
           <p:cNvPr id="2" name="s4-eyebrow">
             <a:extLst xmlns:a="http://schemas.openxmlformats.org/drawingml/2006/main">
               <a:ext uri="{FF2B5EF4-FFF2-40B4-BE49-F238E27FC236}">
-                <a16:creationId xmlns:a16="http://schemas.microsoft.com/office/drawing/2014/main" id="{76641E01-CB83-4A91-8066-B511E523F2DD}"/>
+                <a16:creationId xmlns:a16="http://schemas.microsoft.com/office/drawing/2014/main" id="{D427261F-A954-4FAB-B981-837B4718A071}"/>
               </a:ext>
             </a:extLst>
           </p:cNvPr>
@@ -6150,7 +6150,7 @@
           <p:cNvPr id="3" name="s4-title">
             <a:extLst xmlns:a="http://schemas.openxmlformats.org/drawingml/2006/main">
               <a:ext uri="{FF2B5EF4-FFF2-40B4-BE49-F238E27FC236}">
-                <a16:creationId xmlns:a16="http://schemas.microsoft.com/office/drawing/2014/main" id="{4E8F590D-951A-40D6-8E70-0A8FB431BF33}"/>
+                <a16:creationId xmlns:a16="http://schemas.microsoft.com/office/drawing/2014/main" id="{8767821F-AAE0-4EFC-B739-1DA67239B9BC}"/>
               </a:ext>
             </a:extLst>
           </p:cNvPr>
@@ -6208,7 +6208,7 @@
           <p:cNvPr id="4" name="s4-footer">
             <a:extLst xmlns:a="http://schemas.openxmlformats.org/drawingml/2006/main">
               <a:ext uri="{FF2B5EF4-FFF2-40B4-BE49-F238E27FC236}">
-                <a16:creationId xmlns:a16="http://schemas.microsoft.com/office/drawing/2014/main" id="{A11D57E2-7091-4004-9C17-F0600BC6A4C8}"/>
+                <a16:creationId xmlns:a16="http://schemas.microsoft.com/office/drawing/2014/main" id="{1ED34C5C-A7B7-44E7-BA20-92A6378CDC28}"/>
               </a:ext>
             </a:extLst>
           </p:cNvPr>
@@ -6239,7 +6239,7 @@
           <p:cNvPr id="5" name="s4-identity">
             <a:extLst xmlns:a="http://schemas.openxmlformats.org/drawingml/2006/main">
               <a:ext uri="{FF2B5EF4-FFF2-40B4-BE49-F238E27FC236}">
-                <a16:creationId xmlns:a16="http://schemas.microsoft.com/office/drawing/2014/main" id="{052C1CF5-7EE2-4D3F-91C5-71DC49F9C23F}"/>
+                <a16:creationId xmlns:a16="http://schemas.microsoft.com/office/drawing/2014/main" id="{C43529D6-B447-4432-9641-5BD8323860E0}"/>
               </a:ext>
             </a:extLst>
           </p:cNvPr>
@@ -6297,7 +6297,7 @@
           <p:cNvPr id="6" name="core-no-0">
             <a:extLst xmlns:a="http://schemas.openxmlformats.org/drawingml/2006/main">
               <a:ext uri="{FF2B5EF4-FFF2-40B4-BE49-F238E27FC236}">
-                <a16:creationId xmlns:a16="http://schemas.microsoft.com/office/drawing/2014/main" id="{FDFE2643-BDF4-44AA-BDC6-120137B3A761}"/>
+                <a16:creationId xmlns:a16="http://schemas.microsoft.com/office/drawing/2014/main" id="{3F76D290-44AA-4EA0-A56F-5DB1787888F8}"/>
               </a:ext>
             </a:extLst>
           </p:cNvPr>
@@ -6355,7 +6355,7 @@
           <p:cNvPr id="7" name="core-label-0">
             <a:extLst xmlns:a="http://schemas.openxmlformats.org/drawingml/2006/main">
               <a:ext uri="{FF2B5EF4-FFF2-40B4-BE49-F238E27FC236}">
-                <a16:creationId xmlns:a16="http://schemas.microsoft.com/office/drawing/2014/main" id="{A1F7A70E-748A-4D83-A262-0F03D6DD4177}"/>
+                <a16:creationId xmlns:a16="http://schemas.microsoft.com/office/drawing/2014/main" id="{A38A7B6E-0240-4A61-94A4-B3EF2EF67DA0}"/>
               </a:ext>
             </a:extLst>
           </p:cNvPr>
@@ -6413,7 +6413,7 @@
           <p:cNvPr id="8" name="core-body-0">
             <a:extLst xmlns:a="http://schemas.openxmlformats.org/drawingml/2006/main">
               <a:ext uri="{FF2B5EF4-FFF2-40B4-BE49-F238E27FC236}">
-                <a16:creationId xmlns:a16="http://schemas.microsoft.com/office/drawing/2014/main" id="{FEF5A99D-9580-466C-A0A2-21D959705DD2}"/>
+                <a16:creationId xmlns:a16="http://schemas.microsoft.com/office/drawing/2014/main" id="{C688F45B-7328-42EE-B539-3EE18A6D8275}"/>
               </a:ext>
             </a:extLst>
           </p:cNvPr>
@@ -6477,7 +6477,7 @@
           <p:cNvPr id="9" name="core-no-1">
             <a:extLst xmlns:a="http://schemas.openxmlformats.org/drawingml/2006/main">
               <a:ext uri="{FF2B5EF4-FFF2-40B4-BE49-F238E27FC236}">
-                <a16:creationId xmlns:a16="http://schemas.microsoft.com/office/drawing/2014/main" id="{F04A019B-F957-4EED-9959-6977889B7CC6}"/>
+                <a16:creationId xmlns:a16="http://schemas.microsoft.com/office/drawing/2014/main" id="{6CD357C3-1A76-443A-AD7C-02F33D769B0E}"/>
               </a:ext>
             </a:extLst>
           </p:cNvPr>
@@ -6535,7 +6535,7 @@
           <p:cNvPr id="10" name="core-body-1">
             <a:extLst xmlns:a="http://schemas.openxmlformats.org/drawingml/2006/main">
               <a:ext uri="{FF2B5EF4-FFF2-40B4-BE49-F238E27FC236}">
-                <a16:creationId xmlns:a16="http://schemas.microsoft.com/office/drawing/2014/main" id="{442155EF-5D2B-4CF5-9398-EF32A869239B}"/>
+                <a16:creationId xmlns:a16="http://schemas.microsoft.com/office/drawing/2014/main" id="{003E0ED3-3B88-451E-ADCC-E15B74CDCABA}"/>
               </a:ext>
             </a:extLst>
           </p:cNvPr>
@@ -6599,7 +6599,7 @@
           <p:cNvPr id="11" name="core-no-2">
             <a:extLst xmlns:a="http://schemas.openxmlformats.org/drawingml/2006/main">
               <a:ext uri="{FF2B5EF4-FFF2-40B4-BE49-F238E27FC236}">
-                <a16:creationId xmlns:a16="http://schemas.microsoft.com/office/drawing/2014/main" id="{46BBA28C-24F7-4970-AA02-0A7A8B55772B}"/>
+                <a16:creationId xmlns:a16="http://schemas.microsoft.com/office/drawing/2014/main" id="{C6D93892-EC25-4522-96E1-B768022E6824}"/>
               </a:ext>
             </a:extLst>
           </p:cNvPr>
@@ -6657,7 +6657,7 @@
           <p:cNvPr id="12" name="core-body-2">
             <a:extLst xmlns:a="http://schemas.openxmlformats.org/drawingml/2006/main">
               <a:ext uri="{FF2B5EF4-FFF2-40B4-BE49-F238E27FC236}">
-                <a16:creationId xmlns:a16="http://schemas.microsoft.com/office/drawing/2014/main" id="{48754933-FC6B-4DCB-8C0E-E7283206E3C2}"/>
+                <a16:creationId xmlns:a16="http://schemas.microsoft.com/office/drawing/2014/main" id="{560DD548-1B6F-466A-A64D-8AFC9A3DF088}"/>
               </a:ext>
             </a:extLst>
           </p:cNvPr>
@@ -6721,7 +6721,7 @@
           <p:cNvPr id="13" name="s4-takeaway-rule">
             <a:extLst xmlns:a="http://schemas.openxmlformats.org/drawingml/2006/main">
               <a:ext uri="{FF2B5EF4-FFF2-40B4-BE49-F238E27FC236}">
-                <a16:creationId xmlns:a16="http://schemas.microsoft.com/office/drawing/2014/main" id="{4AB11204-8F87-450A-9A54-40E86736B4D4}"/>
+                <a16:creationId xmlns:a16="http://schemas.microsoft.com/office/drawing/2014/main" id="{A6333FCF-5CBB-4C62-9148-E89D659C4E93}"/>
               </a:ext>
             </a:extLst>
           </p:cNvPr>
@@ -6754,7 +6754,7 @@
           <p:cNvPr id="14" name="s4-takeaway">
             <a:extLst xmlns:a="http://schemas.openxmlformats.org/drawingml/2006/main">
               <a:ext uri="{FF2B5EF4-FFF2-40B4-BE49-F238E27FC236}">
-                <a16:creationId xmlns:a16="http://schemas.microsoft.com/office/drawing/2014/main" id="{115D7F66-E3C8-4FDD-A8A7-1928F4772CB6}"/>
+                <a16:creationId xmlns:a16="http://schemas.microsoft.com/office/drawing/2014/main" id="{3640DF2D-462C-453D-8C11-0BFFD5361749}"/>
               </a:ext>
             </a:extLst>
           </p:cNvPr>
@@ -6810,7 +6810,7 @@
     </p:spTree>
     <p:extLst>
       <p:ext uri="{BB962C8B-B14F-4D97-AF65-F5344CB8AC3E}">
-        <p14:creationId xmlns:p14="http://schemas.microsoft.com/office/powerpoint/2010/main" val="1048604826"/>
+        <p14:creationId xmlns:p14="http://schemas.microsoft.com/office/powerpoint/2010/main" val="828657772"/>
       </p:ext>
     </p:extLst>
   </p:cSld>
@@ -6841,7 +6841,7 @@
           <p:cNvPr id="1" name="s5-rule">
             <a:extLst xmlns:a="http://schemas.openxmlformats.org/drawingml/2006/main">
               <a:ext uri="{FF2B5EF4-FFF2-40B4-BE49-F238E27FC236}">
-                <a16:creationId xmlns:a16="http://schemas.microsoft.com/office/drawing/2014/main" id="{51BD56FD-F91F-4EC7-BCEC-19FB8A1FF13D}"/>
+                <a16:creationId xmlns:a16="http://schemas.microsoft.com/office/drawing/2014/main" id="{D67A9B91-A484-497E-AC16-D9FBEBDD7BA1}"/>
               </a:ext>
             </a:extLst>
           </p:cNvPr>
@@ -6874,7 +6874,7 @@
           <p:cNvPr id="2" name="s5-eyebrow">
             <a:extLst xmlns:a="http://schemas.openxmlformats.org/drawingml/2006/main">
               <a:ext uri="{FF2B5EF4-FFF2-40B4-BE49-F238E27FC236}">
-                <a16:creationId xmlns:a16="http://schemas.microsoft.com/office/drawing/2014/main" id="{53D6BA12-4FEE-409D-9D81-936E68B6E70B}"/>
+                <a16:creationId xmlns:a16="http://schemas.microsoft.com/office/drawing/2014/main" id="{F1AC00C9-611B-4D9A-A6F5-52E6E6B0F4E9}"/>
               </a:ext>
             </a:extLst>
           </p:cNvPr>
@@ -6932,7 +6932,7 @@
           <p:cNvPr id="3" name="s5-title">
             <a:extLst xmlns:a="http://schemas.openxmlformats.org/drawingml/2006/main">
               <a:ext uri="{FF2B5EF4-FFF2-40B4-BE49-F238E27FC236}">
-                <a16:creationId xmlns:a16="http://schemas.microsoft.com/office/drawing/2014/main" id="{DAA5186D-E4FC-4211-BE68-6EF223A5CEAC}"/>
+                <a16:creationId xmlns:a16="http://schemas.microsoft.com/office/drawing/2014/main" id="{F70241BA-3AC3-4C38-9963-DE1BB94F53BC}"/>
               </a:ext>
             </a:extLst>
           </p:cNvPr>
@@ -6990,7 +6990,7 @@
           <p:cNvPr id="4" name="s5-footer">
             <a:extLst xmlns:a="http://schemas.openxmlformats.org/drawingml/2006/main">
               <a:ext uri="{FF2B5EF4-FFF2-40B4-BE49-F238E27FC236}">
-                <a16:creationId xmlns:a16="http://schemas.microsoft.com/office/drawing/2014/main" id="{5F089C95-8C86-4F27-92B0-0ACFE747EF3D}"/>
+                <a16:creationId xmlns:a16="http://schemas.microsoft.com/office/drawing/2014/main" id="{E44A870F-74A4-4659-82F1-C70661B3DB7A}"/>
               </a:ext>
             </a:extLst>
           </p:cNvPr>
@@ -7021,7 +7021,7 @@
           <p:cNvPr id="5" name="s5-identity">
             <a:extLst xmlns:a="http://schemas.openxmlformats.org/drawingml/2006/main">
               <a:ext uri="{FF2B5EF4-FFF2-40B4-BE49-F238E27FC236}">
-                <a16:creationId xmlns:a16="http://schemas.microsoft.com/office/drawing/2014/main" id="{9A900957-699D-4A8B-98F9-9D1054783079}"/>
+                <a16:creationId xmlns:a16="http://schemas.microsoft.com/office/drawing/2014/main" id="{111707BC-2F3C-49CF-A808-50983A984B1B}"/>
               </a:ext>
             </a:extLst>
           </p:cNvPr>
@@ -7079,7 +7079,7 @@
           <p:cNvPr id="6" name="core-no-0">
             <a:extLst xmlns:a="http://schemas.openxmlformats.org/drawingml/2006/main">
               <a:ext uri="{FF2B5EF4-FFF2-40B4-BE49-F238E27FC236}">
-                <a16:creationId xmlns:a16="http://schemas.microsoft.com/office/drawing/2014/main" id="{354D691D-8646-466B-90A5-8E858D319F27}"/>
+                <a16:creationId xmlns:a16="http://schemas.microsoft.com/office/drawing/2014/main" id="{D9C49E2B-B955-407E-B130-8038BEA31CA7}"/>
               </a:ext>
             </a:extLst>
           </p:cNvPr>
@@ -7137,7 +7137,7 @@
           <p:cNvPr id="7" name="core-label-0">
             <a:extLst xmlns:a="http://schemas.openxmlformats.org/drawingml/2006/main">
               <a:ext uri="{FF2B5EF4-FFF2-40B4-BE49-F238E27FC236}">
-                <a16:creationId xmlns:a16="http://schemas.microsoft.com/office/drawing/2014/main" id="{F3AAB50C-200E-45F9-BF17-C9BF320B8948}"/>
+                <a16:creationId xmlns:a16="http://schemas.microsoft.com/office/drawing/2014/main" id="{C5574ED5-54D8-4103-88ED-9BD1416651C4}"/>
               </a:ext>
             </a:extLst>
           </p:cNvPr>
@@ -7195,7 +7195,7 @@
           <p:cNvPr id="8" name="core-body-0">
             <a:extLst xmlns:a="http://schemas.openxmlformats.org/drawingml/2006/main">
               <a:ext uri="{FF2B5EF4-FFF2-40B4-BE49-F238E27FC236}">
-                <a16:creationId xmlns:a16="http://schemas.microsoft.com/office/drawing/2014/main" id="{BB76D4F7-0527-4167-AF7A-57C1B8DC7BE0}"/>
+                <a16:creationId xmlns:a16="http://schemas.microsoft.com/office/drawing/2014/main" id="{1AB36376-700D-46ED-ABEC-5EA4112C58B9}"/>
               </a:ext>
             </a:extLst>
           </p:cNvPr>
@@ -7259,7 +7259,7 @@
           <p:cNvPr id="9" name="core-no-1">
             <a:extLst xmlns:a="http://schemas.openxmlformats.org/drawingml/2006/main">
               <a:ext uri="{FF2B5EF4-FFF2-40B4-BE49-F238E27FC236}">
-                <a16:creationId xmlns:a16="http://schemas.microsoft.com/office/drawing/2014/main" id="{84886C55-B172-4BAF-B4C8-4F48FD887338}"/>
+                <a16:creationId xmlns:a16="http://schemas.microsoft.com/office/drawing/2014/main" id="{17C7A511-2B53-497F-B211-15EAA3F3E84A}"/>
               </a:ext>
             </a:extLst>
           </p:cNvPr>
@@ -7317,7 +7317,7 @@
           <p:cNvPr id="10" name="core-body-1">
             <a:extLst xmlns:a="http://schemas.openxmlformats.org/drawingml/2006/main">
               <a:ext uri="{FF2B5EF4-FFF2-40B4-BE49-F238E27FC236}">
-                <a16:creationId xmlns:a16="http://schemas.microsoft.com/office/drawing/2014/main" id="{814336FE-D608-4BF6-BCE4-E3A9D7A0219D}"/>
+                <a16:creationId xmlns:a16="http://schemas.microsoft.com/office/drawing/2014/main" id="{677288E0-6F0B-4FB8-9B8D-27F511591F7A}"/>
               </a:ext>
             </a:extLst>
           </p:cNvPr>
@@ -7381,7 +7381,7 @@
           <p:cNvPr id="11" name="s5-takeaway-rule">
             <a:extLst xmlns:a="http://schemas.openxmlformats.org/drawingml/2006/main">
               <a:ext uri="{FF2B5EF4-FFF2-40B4-BE49-F238E27FC236}">
-                <a16:creationId xmlns:a16="http://schemas.microsoft.com/office/drawing/2014/main" id="{7B339AC7-30F3-47EB-BDAD-42992E18F9F9}"/>
+                <a16:creationId xmlns:a16="http://schemas.microsoft.com/office/drawing/2014/main" id="{170BF1B6-FF62-43B9-A41A-09B48FDDCF20}"/>
               </a:ext>
             </a:extLst>
           </p:cNvPr>
@@ -7414,7 +7414,7 @@
           <p:cNvPr id="12" name="s5-takeaway">
             <a:extLst xmlns:a="http://schemas.openxmlformats.org/drawingml/2006/main">
               <a:ext uri="{FF2B5EF4-FFF2-40B4-BE49-F238E27FC236}">
-                <a16:creationId xmlns:a16="http://schemas.microsoft.com/office/drawing/2014/main" id="{AC9F39BA-B494-456E-9DC6-5E0F77349F61}"/>
+                <a16:creationId xmlns:a16="http://schemas.microsoft.com/office/drawing/2014/main" id="{E66C4C84-C7B0-42FB-B85F-C935B7EE189A}"/>
               </a:ext>
             </a:extLst>
           </p:cNvPr>
@@ -7470,7 +7470,7 @@
     </p:spTree>
     <p:extLst>
       <p:ext uri="{BB962C8B-B14F-4D97-AF65-F5344CB8AC3E}">
-        <p14:creationId xmlns:p14="http://schemas.microsoft.com/office/powerpoint/2010/main" val="39224669"/>
+        <p14:creationId xmlns:p14="http://schemas.microsoft.com/office/powerpoint/2010/main" val="89176860"/>
       </p:ext>
     </p:extLst>
   </p:cSld>
@@ -7501,7 +7501,7 @@
           <p:cNvPr id="1" name="s6-rule">
             <a:extLst xmlns:a="http://schemas.openxmlformats.org/drawingml/2006/main">
               <a:ext uri="{FF2B5EF4-FFF2-40B4-BE49-F238E27FC236}">
-                <a16:creationId xmlns:a16="http://schemas.microsoft.com/office/drawing/2014/main" id="{222F7CC3-7A5E-4678-8DD5-F51945BB93F0}"/>
+                <a16:creationId xmlns:a16="http://schemas.microsoft.com/office/drawing/2014/main" id="{392F458D-1673-4E2E-B0FB-366ABC54C1E4}"/>
               </a:ext>
             </a:extLst>
           </p:cNvPr>
@@ -7534,7 +7534,7 @@
           <p:cNvPr id="2" name="s6-eyebrow">
             <a:extLst xmlns:a="http://schemas.openxmlformats.org/drawingml/2006/main">
               <a:ext uri="{FF2B5EF4-FFF2-40B4-BE49-F238E27FC236}">
-                <a16:creationId xmlns:a16="http://schemas.microsoft.com/office/drawing/2014/main" id="{D34C7BF2-5A65-4290-9236-4153D5303556}"/>
+                <a16:creationId xmlns:a16="http://schemas.microsoft.com/office/drawing/2014/main" id="{985B646D-1E90-462F-8343-FBA11C34F924}"/>
               </a:ext>
             </a:extLst>
           </p:cNvPr>
@@ -7592,7 +7592,7 @@
           <p:cNvPr id="3" name="s6-title">
             <a:extLst xmlns:a="http://schemas.openxmlformats.org/drawingml/2006/main">
               <a:ext uri="{FF2B5EF4-FFF2-40B4-BE49-F238E27FC236}">
-                <a16:creationId xmlns:a16="http://schemas.microsoft.com/office/drawing/2014/main" id="{DA18BC29-064A-4A3F-B9D3-27B2EB0BE800}"/>
+                <a16:creationId xmlns:a16="http://schemas.microsoft.com/office/drawing/2014/main" id="{4FAF5A1C-3E0A-4130-8F0A-CCD9E596A4C7}"/>
               </a:ext>
             </a:extLst>
           </p:cNvPr>
@@ -7650,7 +7650,7 @@
           <p:cNvPr id="4" name="s6-footer">
             <a:extLst xmlns:a="http://schemas.openxmlformats.org/drawingml/2006/main">
               <a:ext uri="{FF2B5EF4-FFF2-40B4-BE49-F238E27FC236}">
-                <a16:creationId xmlns:a16="http://schemas.microsoft.com/office/drawing/2014/main" id="{1A1BDFA3-8A14-47AC-9785-B8D337D57725}"/>
+                <a16:creationId xmlns:a16="http://schemas.microsoft.com/office/drawing/2014/main" id="{4C82B31E-6425-40AE-97BA-8BF663DC572D}"/>
               </a:ext>
             </a:extLst>
           </p:cNvPr>
@@ -7681,7 +7681,7 @@
           <p:cNvPr id="5" name="s6-identity">
             <a:extLst xmlns:a="http://schemas.openxmlformats.org/drawingml/2006/main">
               <a:ext uri="{FF2B5EF4-FFF2-40B4-BE49-F238E27FC236}">
-                <a16:creationId xmlns:a16="http://schemas.microsoft.com/office/drawing/2014/main" id="{1FBCFD83-CE22-4C7C-9DC3-4D98F8638C19}"/>
+                <a16:creationId xmlns:a16="http://schemas.microsoft.com/office/drawing/2014/main" id="{99796483-1D4B-4D5E-BFE8-4058B23F1F69}"/>
               </a:ext>
             </a:extLst>
           </p:cNvPr>
@@ -7739,7 +7739,7 @@
           <p:cNvPr id="6" name="core-no-0">
             <a:extLst xmlns:a="http://schemas.openxmlformats.org/drawingml/2006/main">
               <a:ext uri="{FF2B5EF4-FFF2-40B4-BE49-F238E27FC236}">
-                <a16:creationId xmlns:a16="http://schemas.microsoft.com/office/drawing/2014/main" id="{D40E3511-35C8-4993-A506-44FAF8817EF9}"/>
+                <a16:creationId xmlns:a16="http://schemas.microsoft.com/office/drawing/2014/main" id="{1392D885-C038-4C30-8D8B-2ABE24D4790D}"/>
               </a:ext>
             </a:extLst>
           </p:cNvPr>
@@ -7797,7 +7797,7 @@
           <p:cNvPr id="7" name="core-label-0">
             <a:extLst xmlns:a="http://schemas.openxmlformats.org/drawingml/2006/main">
               <a:ext uri="{FF2B5EF4-FFF2-40B4-BE49-F238E27FC236}">
-                <a16:creationId xmlns:a16="http://schemas.microsoft.com/office/drawing/2014/main" id="{E1EFF362-47AB-4D87-B4A4-88F3030CCA97}"/>
+                <a16:creationId xmlns:a16="http://schemas.microsoft.com/office/drawing/2014/main" id="{7E20598D-8D4D-44EB-BA86-723C446D8AF9}"/>
               </a:ext>
             </a:extLst>
           </p:cNvPr>
@@ -7855,7 +7855,7 @@
           <p:cNvPr id="8" name="core-body-0">
             <a:extLst xmlns:a="http://schemas.openxmlformats.org/drawingml/2006/main">
               <a:ext uri="{FF2B5EF4-FFF2-40B4-BE49-F238E27FC236}">
-                <a16:creationId xmlns:a16="http://schemas.microsoft.com/office/drawing/2014/main" id="{E84C17FE-E9FF-4023-B5D2-F99BC41E4A5D}"/>
+                <a16:creationId xmlns:a16="http://schemas.microsoft.com/office/drawing/2014/main" id="{A9846274-2C21-4AF0-A7DC-8601D1A261B6}"/>
               </a:ext>
             </a:extLst>
           </p:cNvPr>
@@ -7919,7 +7919,7 @@
           <p:cNvPr id="9" name="core-no-1">
             <a:extLst xmlns:a="http://schemas.openxmlformats.org/drawingml/2006/main">
               <a:ext uri="{FF2B5EF4-FFF2-40B4-BE49-F238E27FC236}">
-                <a16:creationId xmlns:a16="http://schemas.microsoft.com/office/drawing/2014/main" id="{AB14C750-DA2D-40D3-BADA-DE09F8491927}"/>
+                <a16:creationId xmlns:a16="http://schemas.microsoft.com/office/drawing/2014/main" id="{DF74BF9A-CEF7-488C-A676-2B676621D8DE}"/>
               </a:ext>
             </a:extLst>
           </p:cNvPr>
@@ -7977,7 +7977,7 @@
           <p:cNvPr id="10" name="core-body-1">
             <a:extLst xmlns:a="http://schemas.openxmlformats.org/drawingml/2006/main">
               <a:ext uri="{FF2B5EF4-FFF2-40B4-BE49-F238E27FC236}">
-                <a16:creationId xmlns:a16="http://schemas.microsoft.com/office/drawing/2014/main" id="{726E6B46-B6C6-4304-AB91-09A096C71FBE}"/>
+                <a16:creationId xmlns:a16="http://schemas.microsoft.com/office/drawing/2014/main" id="{BFB1F58A-BD63-46A5-9CDD-D68E449BC06A}"/>
               </a:ext>
             </a:extLst>
           </p:cNvPr>
@@ -8041,7 +8041,7 @@
           <p:cNvPr id="11" name="s6-takeaway-rule">
             <a:extLst xmlns:a="http://schemas.openxmlformats.org/drawingml/2006/main">
               <a:ext uri="{FF2B5EF4-FFF2-40B4-BE49-F238E27FC236}">
-                <a16:creationId xmlns:a16="http://schemas.microsoft.com/office/drawing/2014/main" id="{BF8E5992-498B-4EFB-9CFD-95C0EA8CF85D}"/>
+                <a16:creationId xmlns:a16="http://schemas.microsoft.com/office/drawing/2014/main" id="{D76B4E1B-364D-45C4-B07E-2C047750D8B1}"/>
               </a:ext>
             </a:extLst>
           </p:cNvPr>
@@ -8074,7 +8074,7 @@
           <p:cNvPr id="12" name="s6-takeaway">
             <a:extLst xmlns:a="http://schemas.openxmlformats.org/drawingml/2006/main">
               <a:ext uri="{FF2B5EF4-FFF2-40B4-BE49-F238E27FC236}">
-                <a16:creationId xmlns:a16="http://schemas.microsoft.com/office/drawing/2014/main" id="{F8999300-1E5C-478E-993E-CA383153970A}"/>
+                <a16:creationId xmlns:a16="http://schemas.microsoft.com/office/drawing/2014/main" id="{CD7B0899-79F5-4A02-9727-5DFC4C05818D}"/>
               </a:ext>
             </a:extLst>
           </p:cNvPr>
@@ -8130,7 +8130,7 @@
     </p:spTree>
     <p:extLst>
       <p:ext uri="{BB962C8B-B14F-4D97-AF65-F5344CB8AC3E}">
-        <p14:creationId xmlns:p14="http://schemas.microsoft.com/office/powerpoint/2010/main" val="255875189"/>
+        <p14:creationId xmlns:p14="http://schemas.microsoft.com/office/powerpoint/2010/main" val="952448008"/>
       </p:ext>
     </p:extLst>
   </p:cSld>
@@ -8161,7 +8161,7 @@
           <p:cNvPr id="1" name="s7-rule">
             <a:extLst xmlns:a="http://schemas.openxmlformats.org/drawingml/2006/main">
               <a:ext uri="{FF2B5EF4-FFF2-40B4-BE49-F238E27FC236}">
-                <a16:creationId xmlns:a16="http://schemas.microsoft.com/office/drawing/2014/main" id="{E07B0B43-4600-4D79-9173-46489456F920}"/>
+                <a16:creationId xmlns:a16="http://schemas.microsoft.com/office/drawing/2014/main" id="{031329D7-0FE2-490E-A929-012975CD8FD8}"/>
               </a:ext>
             </a:extLst>
           </p:cNvPr>
@@ -8194,7 +8194,7 @@
           <p:cNvPr id="2" name="s7-eyebrow">
             <a:extLst xmlns:a="http://schemas.openxmlformats.org/drawingml/2006/main">
               <a:ext uri="{FF2B5EF4-FFF2-40B4-BE49-F238E27FC236}">
-                <a16:creationId xmlns:a16="http://schemas.microsoft.com/office/drawing/2014/main" id="{5A5AB65D-A097-406D-8380-9D181BA28D6E}"/>
+                <a16:creationId xmlns:a16="http://schemas.microsoft.com/office/drawing/2014/main" id="{06881D9C-9923-4727-9B48-99D5A3E9C7AD}"/>
               </a:ext>
             </a:extLst>
           </p:cNvPr>
@@ -8252,7 +8252,7 @@
           <p:cNvPr id="3" name="s7-title">
             <a:extLst xmlns:a="http://schemas.openxmlformats.org/drawingml/2006/main">
               <a:ext uri="{FF2B5EF4-FFF2-40B4-BE49-F238E27FC236}">
-                <a16:creationId xmlns:a16="http://schemas.microsoft.com/office/drawing/2014/main" id="{2400C8F2-8A8A-4220-B38C-C2B8795F9480}"/>
+                <a16:creationId xmlns:a16="http://schemas.microsoft.com/office/drawing/2014/main" id="{8EC161C3-2492-4679-BE7B-AB94D842634B}"/>
               </a:ext>
             </a:extLst>
           </p:cNvPr>
@@ -8310,7 +8310,7 @@
           <p:cNvPr id="4" name="s7-footer">
             <a:extLst xmlns:a="http://schemas.openxmlformats.org/drawingml/2006/main">
               <a:ext uri="{FF2B5EF4-FFF2-40B4-BE49-F238E27FC236}">
-                <a16:creationId xmlns:a16="http://schemas.microsoft.com/office/drawing/2014/main" id="{8880E282-EBAE-4FC8-A46D-D62A2687E30A}"/>
+                <a16:creationId xmlns:a16="http://schemas.microsoft.com/office/drawing/2014/main" id="{42AD4C59-022F-44FC-AB3E-D552589FA04D}"/>
               </a:ext>
             </a:extLst>
           </p:cNvPr>
@@ -8341,7 +8341,7 @@
           <p:cNvPr id="5" name="s7-identity">
             <a:extLst xmlns:a="http://schemas.openxmlformats.org/drawingml/2006/main">
               <a:ext uri="{FF2B5EF4-FFF2-40B4-BE49-F238E27FC236}">
-                <a16:creationId xmlns:a16="http://schemas.microsoft.com/office/drawing/2014/main" id="{AA166EF0-7A74-4077-A92C-DD32823CF1A7}"/>
+                <a16:creationId xmlns:a16="http://schemas.microsoft.com/office/drawing/2014/main" id="{0C2AB6E7-C170-4259-A0B2-A285C6B74638}"/>
               </a:ext>
             </a:extLst>
           </p:cNvPr>
@@ -8399,7 +8399,7 @@
           <p:cNvPr id="6" name="core-no-0">
             <a:extLst xmlns:a="http://schemas.openxmlformats.org/drawingml/2006/main">
               <a:ext uri="{FF2B5EF4-FFF2-40B4-BE49-F238E27FC236}">
-                <a16:creationId xmlns:a16="http://schemas.microsoft.com/office/drawing/2014/main" id="{0BCDBA0F-2015-4B27-A2D2-4954F5C3E33B}"/>
+                <a16:creationId xmlns:a16="http://schemas.microsoft.com/office/drawing/2014/main" id="{8A3F72B8-DA21-4E57-BDAA-8D61920FED2B}"/>
               </a:ext>
             </a:extLst>
           </p:cNvPr>
@@ -8457,7 +8457,7 @@
           <p:cNvPr id="7" name="core-label-0">
             <a:extLst xmlns:a="http://schemas.openxmlformats.org/drawingml/2006/main">
               <a:ext uri="{FF2B5EF4-FFF2-40B4-BE49-F238E27FC236}">
-                <a16:creationId xmlns:a16="http://schemas.microsoft.com/office/drawing/2014/main" id="{71427AA7-2B9B-4DD2-82A9-E0BF6ACBE85B}"/>
+                <a16:creationId xmlns:a16="http://schemas.microsoft.com/office/drawing/2014/main" id="{E01C332C-504E-4971-BFA7-08AF78F88EAD}"/>
               </a:ext>
             </a:extLst>
           </p:cNvPr>
@@ -8515,7 +8515,7 @@
           <p:cNvPr id="8" name="core-body-0">
             <a:extLst xmlns:a="http://schemas.openxmlformats.org/drawingml/2006/main">
               <a:ext uri="{FF2B5EF4-FFF2-40B4-BE49-F238E27FC236}">
-                <a16:creationId xmlns:a16="http://schemas.microsoft.com/office/drawing/2014/main" id="{0EF2D161-BDAB-4BB9-A556-79B6418B6346}"/>
+                <a16:creationId xmlns:a16="http://schemas.microsoft.com/office/drawing/2014/main" id="{E12330EF-4200-4499-A92D-DC79933D8F9D}"/>
               </a:ext>
             </a:extLst>
           </p:cNvPr>
@@ -8579,7 +8579,7 @@
           <p:cNvPr id="9" name="core-no-1">
             <a:extLst xmlns:a="http://schemas.openxmlformats.org/drawingml/2006/main">
               <a:ext uri="{FF2B5EF4-FFF2-40B4-BE49-F238E27FC236}">
-                <a16:creationId xmlns:a16="http://schemas.microsoft.com/office/drawing/2014/main" id="{388A058F-F291-4316-81C1-438F9AF56E06}"/>
+                <a16:creationId xmlns:a16="http://schemas.microsoft.com/office/drawing/2014/main" id="{180E57C9-6127-4DF5-9CBB-E37AC66184F5}"/>
               </a:ext>
             </a:extLst>
           </p:cNvPr>
@@ -8637,7 +8637,7 @@
           <p:cNvPr id="10" name="core-body-1">
             <a:extLst xmlns:a="http://schemas.openxmlformats.org/drawingml/2006/main">
               <a:ext uri="{FF2B5EF4-FFF2-40B4-BE49-F238E27FC236}">
-                <a16:creationId xmlns:a16="http://schemas.microsoft.com/office/drawing/2014/main" id="{15C34962-7117-4A27-B76C-A6F85BA89D95}"/>
+                <a16:creationId xmlns:a16="http://schemas.microsoft.com/office/drawing/2014/main" id="{7117D622-DE52-4636-A67D-5607843AA2E6}"/>
               </a:ext>
             </a:extLst>
           </p:cNvPr>
@@ -8701,7 +8701,7 @@
           <p:cNvPr id="11" name="s7-takeaway-rule">
             <a:extLst xmlns:a="http://schemas.openxmlformats.org/drawingml/2006/main">
               <a:ext uri="{FF2B5EF4-FFF2-40B4-BE49-F238E27FC236}">
-                <a16:creationId xmlns:a16="http://schemas.microsoft.com/office/drawing/2014/main" id="{3C1C980E-7BD7-46AB-A6CD-B957503E1F3F}"/>
+                <a16:creationId xmlns:a16="http://schemas.microsoft.com/office/drawing/2014/main" id="{FC477A62-62A8-4FA7-9A1B-B8AC11826C81}"/>
               </a:ext>
             </a:extLst>
           </p:cNvPr>
@@ -8734,7 +8734,7 @@
           <p:cNvPr id="12" name="s7-takeaway">
             <a:extLst xmlns:a="http://schemas.openxmlformats.org/drawingml/2006/main">
               <a:ext uri="{FF2B5EF4-FFF2-40B4-BE49-F238E27FC236}">
-                <a16:creationId xmlns:a16="http://schemas.microsoft.com/office/drawing/2014/main" id="{088B56EB-F9B4-4133-8273-B092CAA14DA7}"/>
+                <a16:creationId xmlns:a16="http://schemas.microsoft.com/office/drawing/2014/main" id="{A23DC3B4-037E-402C-B97A-AFDC6AD35B2C}"/>
               </a:ext>
             </a:extLst>
           </p:cNvPr>
@@ -8790,7 +8790,7 @@
     </p:spTree>
     <p:extLst>
       <p:ext uri="{BB962C8B-B14F-4D97-AF65-F5344CB8AC3E}">
-        <p14:creationId xmlns:p14="http://schemas.microsoft.com/office/powerpoint/2010/main" val="1348470408"/>
+        <p14:creationId xmlns:p14="http://schemas.microsoft.com/office/powerpoint/2010/main" val="1928288636"/>
       </p:ext>
     </p:extLst>
   </p:cSld>
@@ -8821,7 +8821,7 @@
           <p:cNvPr id="1" name="s8-rule">
             <a:extLst xmlns:a="http://schemas.openxmlformats.org/drawingml/2006/main">
               <a:ext uri="{FF2B5EF4-FFF2-40B4-BE49-F238E27FC236}">
-                <a16:creationId xmlns:a16="http://schemas.microsoft.com/office/drawing/2014/main" id="{A503FCD6-521D-47F9-A637-B4941B079AE9}"/>
+                <a16:creationId xmlns:a16="http://schemas.microsoft.com/office/drawing/2014/main" id="{13C70196-CCED-4F14-805D-891B3B0B520F}"/>
               </a:ext>
             </a:extLst>
           </p:cNvPr>
@@ -8854,7 +8854,7 @@
           <p:cNvPr id="2" name="s8-eyebrow">
             <a:extLst xmlns:a="http://schemas.openxmlformats.org/drawingml/2006/main">
               <a:ext uri="{FF2B5EF4-FFF2-40B4-BE49-F238E27FC236}">
-                <a16:creationId xmlns:a16="http://schemas.microsoft.com/office/drawing/2014/main" id="{8E7B2B36-AF26-43DE-B064-84DD25482D6B}"/>
+                <a16:creationId xmlns:a16="http://schemas.microsoft.com/office/drawing/2014/main" id="{7C63034D-859C-4AEC-8980-230280184770}"/>
               </a:ext>
             </a:extLst>
           </p:cNvPr>
@@ -8912,7 +8912,7 @@
           <p:cNvPr id="3" name="s8-title">
             <a:extLst xmlns:a="http://schemas.openxmlformats.org/drawingml/2006/main">
               <a:ext uri="{FF2B5EF4-FFF2-40B4-BE49-F238E27FC236}">
-                <a16:creationId xmlns:a16="http://schemas.microsoft.com/office/drawing/2014/main" id="{A26A158A-4B3C-4A77-BCBF-72C1967A775E}"/>
+                <a16:creationId xmlns:a16="http://schemas.microsoft.com/office/drawing/2014/main" id="{9C21E232-3EAF-47A9-AAE4-FE799ECB7EFC}"/>
               </a:ext>
             </a:extLst>
           </p:cNvPr>
@@ -8970,7 +8970,7 @@
           <p:cNvPr id="4" name="s8-footer">
             <a:extLst xmlns:a="http://schemas.openxmlformats.org/drawingml/2006/main">
               <a:ext uri="{FF2B5EF4-FFF2-40B4-BE49-F238E27FC236}">
-                <a16:creationId xmlns:a16="http://schemas.microsoft.com/office/drawing/2014/main" id="{14459321-5832-499D-AE98-97E04F6C1EE9}"/>
+                <a16:creationId xmlns:a16="http://schemas.microsoft.com/office/drawing/2014/main" id="{20A33EB7-C6D3-4BCA-AC47-EEDBF4F3F751}"/>
               </a:ext>
             </a:extLst>
           </p:cNvPr>
@@ -9001,7 +9001,7 @@
           <p:cNvPr id="5" name="s8-identity">
             <a:extLst xmlns:a="http://schemas.openxmlformats.org/drawingml/2006/main">
               <a:ext uri="{FF2B5EF4-FFF2-40B4-BE49-F238E27FC236}">
-                <a16:creationId xmlns:a16="http://schemas.microsoft.com/office/drawing/2014/main" id="{BED4824E-4F93-484B-897D-A7EBFFBD8408}"/>
+                <a16:creationId xmlns:a16="http://schemas.microsoft.com/office/drawing/2014/main" id="{69C99D1D-23EF-4AE0-AD17-7CF773DC7244}"/>
               </a:ext>
             </a:extLst>
           </p:cNvPr>
@@ -9059,7 +9059,7 @@
           <p:cNvPr id="6" name="case-title">
             <a:extLst xmlns:a="http://schemas.openxmlformats.org/drawingml/2006/main">
               <a:ext uri="{FF2B5EF4-FFF2-40B4-BE49-F238E27FC236}">
-                <a16:creationId xmlns:a16="http://schemas.microsoft.com/office/drawing/2014/main" id="{5B9DA836-57C2-43DE-8A1A-C0C037E3AF02}"/>
+                <a16:creationId xmlns:a16="http://schemas.microsoft.com/office/drawing/2014/main" id="{60448ACD-3887-47CB-85DB-D0E0384EC643}"/>
               </a:ext>
             </a:extLst>
           </p:cNvPr>
@@ -9123,7 +9123,7 @@
           <p:cNvPr id="7" name="case-row-0">
             <a:extLst xmlns:a="http://schemas.openxmlformats.org/drawingml/2006/main">
               <a:ext uri="{FF2B5EF4-FFF2-40B4-BE49-F238E27FC236}">
-                <a16:creationId xmlns:a16="http://schemas.microsoft.com/office/drawing/2014/main" id="{C46ECFB0-F495-43BD-B524-7B4E5474318C}"/>
+                <a16:creationId xmlns:a16="http://schemas.microsoft.com/office/drawing/2014/main" id="{E545A945-18C4-4E09-BA53-F8ABF8768304}"/>
               </a:ext>
             </a:extLst>
           </p:cNvPr>
@@ -9187,7 +9187,7 @@
           <p:cNvPr id="8" name="case-row-1">
             <a:extLst xmlns:a="http://schemas.openxmlformats.org/drawingml/2006/main">
               <a:ext uri="{FF2B5EF4-FFF2-40B4-BE49-F238E27FC236}">
-                <a16:creationId xmlns:a16="http://schemas.microsoft.com/office/drawing/2014/main" id="{EC4C55DC-AD1C-4A0E-9B1F-22E2EC898D82}"/>
+                <a16:creationId xmlns:a16="http://schemas.microsoft.com/office/drawing/2014/main" id="{3A6BB250-2E5F-435E-9869-600E663D1E88}"/>
               </a:ext>
             </a:extLst>
           </p:cNvPr>
@@ -9251,7 +9251,7 @@
           <p:cNvPr id="9" name="case-row-2">
             <a:extLst xmlns:a="http://schemas.openxmlformats.org/drawingml/2006/main">
               <a:ext uri="{FF2B5EF4-FFF2-40B4-BE49-F238E27FC236}">
-                <a16:creationId xmlns:a16="http://schemas.microsoft.com/office/drawing/2014/main" id="{B80C74F3-806C-4130-8C23-CE55D2F4E495}"/>
+                <a16:creationId xmlns:a16="http://schemas.microsoft.com/office/drawing/2014/main" id="{4735A734-F824-49AA-94CB-E657F4D733F8}"/>
               </a:ext>
             </a:extLst>
           </p:cNvPr>
@@ -9315,7 +9315,7 @@
           <p:cNvPr id="10" name="case-row-3">
             <a:extLst xmlns:a="http://schemas.openxmlformats.org/drawingml/2006/main">
               <a:ext uri="{FF2B5EF4-FFF2-40B4-BE49-F238E27FC236}">
-                <a16:creationId xmlns:a16="http://schemas.microsoft.com/office/drawing/2014/main" id="{472E0F98-0BE1-43D7-8D35-368477B1481C}"/>
+                <a16:creationId xmlns:a16="http://schemas.microsoft.com/office/drawing/2014/main" id="{537B3D04-48DE-41C1-AD58-9651B0B39C60}"/>
               </a:ext>
             </a:extLst>
           </p:cNvPr>
@@ -9379,7 +9379,7 @@
           <p:cNvPr id="11" name="s8-takeaway-rule">
             <a:extLst xmlns:a="http://schemas.openxmlformats.org/drawingml/2006/main">
               <a:ext uri="{FF2B5EF4-FFF2-40B4-BE49-F238E27FC236}">
-                <a16:creationId xmlns:a16="http://schemas.microsoft.com/office/drawing/2014/main" id="{02514BCD-3C55-4007-A52F-7FDFD3B6173C}"/>
+                <a16:creationId xmlns:a16="http://schemas.microsoft.com/office/drawing/2014/main" id="{69648899-65EF-47C3-A292-63D8683FBF08}"/>
               </a:ext>
             </a:extLst>
           </p:cNvPr>
@@ -9412,7 +9412,7 @@
           <p:cNvPr id="12" name="s8-takeaway">
             <a:extLst xmlns:a="http://schemas.openxmlformats.org/drawingml/2006/main">
               <a:ext uri="{FF2B5EF4-FFF2-40B4-BE49-F238E27FC236}">
-                <a16:creationId xmlns:a16="http://schemas.microsoft.com/office/drawing/2014/main" id="{8663A544-A583-4EE1-94B5-DB75B3B1AC1B}"/>
+                <a16:creationId xmlns:a16="http://schemas.microsoft.com/office/drawing/2014/main" id="{3BFAFEF2-5D2F-4483-B4F9-B8053A9DD30A}"/>
               </a:ext>
             </a:extLst>
           </p:cNvPr>
@@ -9468,7 +9468,7 @@
     </p:spTree>
     <p:extLst>
       <p:ext uri="{BB962C8B-B14F-4D97-AF65-F5344CB8AC3E}">
-        <p14:creationId xmlns:p14="http://schemas.microsoft.com/office/powerpoint/2010/main" val="2037485197"/>
+        <p14:creationId xmlns:p14="http://schemas.microsoft.com/office/powerpoint/2010/main" val="1904766124"/>
       </p:ext>
     </p:extLst>
   </p:cSld>
@@ -9499,7 +9499,7 @@
           <p:cNvPr id="1" name="s9-rule">
             <a:extLst xmlns:a="http://schemas.openxmlformats.org/drawingml/2006/main">
               <a:ext uri="{FF2B5EF4-FFF2-40B4-BE49-F238E27FC236}">
-                <a16:creationId xmlns:a16="http://schemas.microsoft.com/office/drawing/2014/main" id="{A8C318BA-960A-44B9-8F7F-2DA8C6BAA3B6}"/>
+                <a16:creationId xmlns:a16="http://schemas.microsoft.com/office/drawing/2014/main" id="{C413E26C-8927-4EDD-8332-4D8081B22869}"/>
               </a:ext>
             </a:extLst>
           </p:cNvPr>
@@ -9532,7 +9532,7 @@
           <p:cNvPr id="2" name="s9-eyebrow">
             <a:extLst xmlns:a="http://schemas.openxmlformats.org/drawingml/2006/main">
               <a:ext uri="{FF2B5EF4-FFF2-40B4-BE49-F238E27FC236}">
-                <a16:creationId xmlns:a16="http://schemas.microsoft.com/office/drawing/2014/main" id="{E453A525-789A-451F-936E-EE91977422C5}"/>
+                <a16:creationId xmlns:a16="http://schemas.microsoft.com/office/drawing/2014/main" id="{5B71F6A5-77C2-4BE8-BE99-783F040CC156}"/>
               </a:ext>
             </a:extLst>
           </p:cNvPr>
@@ -9590,7 +9590,7 @@
           <p:cNvPr id="3" name="s9-title">
             <a:extLst xmlns:a="http://schemas.openxmlformats.org/drawingml/2006/main">
               <a:ext uri="{FF2B5EF4-FFF2-40B4-BE49-F238E27FC236}">
-                <a16:creationId xmlns:a16="http://schemas.microsoft.com/office/drawing/2014/main" id="{9543254C-A8BE-445F-BA0E-CB7EE47F4FC0}"/>
+                <a16:creationId xmlns:a16="http://schemas.microsoft.com/office/drawing/2014/main" id="{1ED691A1-3150-4CCA-9E5E-F3B7288BF3DC}"/>
               </a:ext>
             </a:extLst>
           </p:cNvPr>
@@ -9648,7 +9648,7 @@
           <p:cNvPr id="4" name="s9-footer">
             <a:extLst xmlns:a="http://schemas.openxmlformats.org/drawingml/2006/main">
               <a:ext uri="{FF2B5EF4-FFF2-40B4-BE49-F238E27FC236}">
-                <a16:creationId xmlns:a16="http://schemas.microsoft.com/office/drawing/2014/main" id="{5D52A407-7EB3-4D99-8359-97246202B9C8}"/>
+                <a16:creationId xmlns:a16="http://schemas.microsoft.com/office/drawing/2014/main" id="{5CBCBD7A-F297-4311-9C92-6F346C88947F}"/>
               </a:ext>
             </a:extLst>
           </p:cNvPr>
@@ -9679,7 +9679,7 @@
           <p:cNvPr id="5" name="s9-identity">
             <a:extLst xmlns:a="http://schemas.openxmlformats.org/drawingml/2006/main">
               <a:ext uri="{FF2B5EF4-FFF2-40B4-BE49-F238E27FC236}">
-                <a16:creationId xmlns:a16="http://schemas.microsoft.com/office/drawing/2014/main" id="{33497479-AFF8-43B0-AC4F-B2943C980A83}"/>
+                <a16:creationId xmlns:a16="http://schemas.microsoft.com/office/drawing/2014/main" id="{B0360FDA-5D2E-44AD-84BE-BA5F8376B433}"/>
               </a:ext>
             </a:extLst>
           </p:cNvPr>
@@ -9737,7 +9737,7 @@
           <p:cNvPr id="6" name="case-title">
             <a:extLst xmlns:a="http://schemas.openxmlformats.org/drawingml/2006/main">
               <a:ext uri="{FF2B5EF4-FFF2-40B4-BE49-F238E27FC236}">
-                <a16:creationId xmlns:a16="http://schemas.microsoft.com/office/drawing/2014/main" id="{ACAFC79A-F827-4885-9094-F140E12A246D}"/>
+                <a16:creationId xmlns:a16="http://schemas.microsoft.com/office/drawing/2014/main" id="{97813006-1617-461E-A60E-9A5427F9F789}"/>
               </a:ext>
             </a:extLst>
           </p:cNvPr>
@@ -9801,7 +9801,7 @@
           <p:cNvPr id="7" name="case-row-0">
             <a:extLst xmlns:a="http://schemas.openxmlformats.org/drawingml/2006/main">
               <a:ext uri="{FF2B5EF4-FFF2-40B4-BE49-F238E27FC236}">
-                <a16:creationId xmlns:a16="http://schemas.microsoft.com/office/drawing/2014/main" id="{BA10DCA1-8F8D-4551-B243-876EFD434B16}"/>
+                <a16:creationId xmlns:a16="http://schemas.microsoft.com/office/drawing/2014/main" id="{A4859238-0E5E-43AF-A2DD-B1DBAFD3BA0F}"/>
               </a:ext>
             </a:extLst>
           </p:cNvPr>
@@ -9865,7 +9865,7 @@
           <p:cNvPr id="8" name="case-row-1">
             <a:extLst xmlns:a="http://schemas.openxmlformats.org/drawingml/2006/main">
               <a:ext uri="{FF2B5EF4-FFF2-40B4-BE49-F238E27FC236}">
-                <a16:creationId xmlns:a16="http://schemas.microsoft.com/office/drawing/2014/main" id="{82DA8D35-8A56-498E-9DC5-1F8992522E7D}"/>
+                <a16:creationId xmlns:a16="http://schemas.microsoft.com/office/drawing/2014/main" id="{5D0FF200-9A96-4B1E-B011-8041A64C1225}"/>
               </a:ext>
             </a:extLst>
           </p:cNvPr>
@@ -9929,7 +9929,7 @@
           <p:cNvPr id="9" name="case-row-2">
             <a:extLst xmlns:a="http://schemas.openxmlformats.org/drawingml/2006/main">
               <a:ext uri="{FF2B5EF4-FFF2-40B4-BE49-F238E27FC236}">
-                <a16:creationId xmlns:a16="http://schemas.microsoft.com/office/drawing/2014/main" id="{AF079D24-EE99-4DFC-BBC5-AED588DB1323}"/>
+                <a16:creationId xmlns:a16="http://schemas.microsoft.com/office/drawing/2014/main" id="{A7A0ADD5-401F-46A9-A26E-AB0A8AF2072B}"/>
               </a:ext>
             </a:extLst>
           </p:cNvPr>
@@ -9993,7 +9993,7 @@
           <p:cNvPr id="10" name="case-row-3">
             <a:extLst xmlns:a="http://schemas.openxmlformats.org/drawingml/2006/main">
               <a:ext uri="{FF2B5EF4-FFF2-40B4-BE49-F238E27FC236}">
-                <a16:creationId xmlns:a16="http://schemas.microsoft.com/office/drawing/2014/main" id="{1B726C20-26A7-4F0F-B900-F6C2DFD7C83F}"/>
+                <a16:creationId xmlns:a16="http://schemas.microsoft.com/office/drawing/2014/main" id="{21E3C31D-4324-4789-847D-EEA7E118BAEE}"/>
               </a:ext>
             </a:extLst>
           </p:cNvPr>
@@ -10057,7 +10057,7 @@
           <p:cNvPr id="11" name="s9-takeaway-rule">
             <a:extLst xmlns:a="http://schemas.openxmlformats.org/drawingml/2006/main">
               <a:ext uri="{FF2B5EF4-FFF2-40B4-BE49-F238E27FC236}">
-                <a16:creationId xmlns:a16="http://schemas.microsoft.com/office/drawing/2014/main" id="{A349B2B6-FECC-40C0-98B6-93BC9B67C4A8}"/>
+                <a16:creationId xmlns:a16="http://schemas.microsoft.com/office/drawing/2014/main" id="{75FE3812-2CFD-48CB-A0AD-A0BF807BDF04}"/>
               </a:ext>
             </a:extLst>
           </p:cNvPr>
@@ -10090,7 +10090,7 @@
           <p:cNvPr id="12" name="s9-takeaway">
             <a:extLst xmlns:a="http://schemas.openxmlformats.org/drawingml/2006/main">
               <a:ext uri="{FF2B5EF4-FFF2-40B4-BE49-F238E27FC236}">
-                <a16:creationId xmlns:a16="http://schemas.microsoft.com/office/drawing/2014/main" id="{18BF66FE-697A-47F5-9102-FE031C4C0288}"/>
+                <a16:creationId xmlns:a16="http://schemas.microsoft.com/office/drawing/2014/main" id="{0751BBD0-5797-41D1-80F1-D8BFC1264344}"/>
               </a:ext>
             </a:extLst>
           </p:cNvPr>
@@ -10146,7 +10146,7 @@
     </p:spTree>
     <p:extLst>
       <p:ext uri="{BB962C8B-B14F-4D97-AF65-F5344CB8AC3E}">
-        <p14:creationId xmlns:p14="http://schemas.microsoft.com/office/powerpoint/2010/main" val="1183301078"/>
+        <p14:creationId xmlns:p14="http://schemas.microsoft.com/office/powerpoint/2010/main" val="80611372"/>
       </p:ext>
     </p:extLst>
   </p:cSld>

--- a/docs/public/course-assets/course-pptx/in-002.pptx
+++ b/docs/public/course-assets/course-pptx/in-002.pptx
@@ -2,24 +2,24 @@
 <file path=ppt/presentation.xml><?xml version="1.0" encoding="utf-8"?>
 <p:presentation xmlns:p="http://schemas.openxmlformats.org/presentationml/2006/main">
   <p:sldMasterIdLst>
-    <p:sldMasterId xmlns:r="http://schemas.openxmlformats.org/officeDocument/2006/relationships" id="2147483648" r:id="R88b593751d974e75"/>
+    <p:sldMasterId xmlns:r="http://schemas.openxmlformats.org/officeDocument/2006/relationships" id="2147483648" r:id="Rd6463eb4bc3a4d7d"/>
   </p:sldMasterIdLst>
   <p:notesMasterIdLst>
-    <p:notesMasterId xmlns:r="http://schemas.openxmlformats.org/officeDocument/2006/relationships" r:id="R1d6734759889452f"/>
+    <p:notesMasterId xmlns:r="http://schemas.openxmlformats.org/officeDocument/2006/relationships" r:id="R83f6cefe65374c38"/>
   </p:notesMasterIdLst>
   <p:sldIdLst>
-    <p:sldId xmlns:r="http://schemas.openxmlformats.org/officeDocument/2006/relationships" id="256" r:id="Rb13ae2e015f5420c"/>
-    <p:sldId xmlns:r="http://schemas.openxmlformats.org/officeDocument/2006/relationships" id="257" r:id="R181fe130d05544d7"/>
-    <p:sldId xmlns:r="http://schemas.openxmlformats.org/officeDocument/2006/relationships" id="258" r:id="Ra1d6a3594d9c49e2"/>
-    <p:sldId xmlns:r="http://schemas.openxmlformats.org/officeDocument/2006/relationships" id="259" r:id="Rdd9a2e921978438e"/>
-    <p:sldId xmlns:r="http://schemas.openxmlformats.org/officeDocument/2006/relationships" id="260" r:id="R9f1616eb5f4e4fb4"/>
-    <p:sldId xmlns:r="http://schemas.openxmlformats.org/officeDocument/2006/relationships" id="261" r:id="R6710c9d221b84929"/>
-    <p:sldId xmlns:r="http://schemas.openxmlformats.org/officeDocument/2006/relationships" id="262" r:id="R92859e1c358e4889"/>
-    <p:sldId xmlns:r="http://schemas.openxmlformats.org/officeDocument/2006/relationships" id="263" r:id="R2451d5e255d24886"/>
-    <p:sldId xmlns:r="http://schemas.openxmlformats.org/officeDocument/2006/relationships" id="264" r:id="R62730b39c4a14e2c"/>
-    <p:sldId xmlns:r="http://schemas.openxmlformats.org/officeDocument/2006/relationships" id="265" r:id="R5bc17e507ace4596"/>
-    <p:sldId xmlns:r="http://schemas.openxmlformats.org/officeDocument/2006/relationships" id="266" r:id="R489804f0b3d04660"/>
-    <p:sldId xmlns:r="http://schemas.openxmlformats.org/officeDocument/2006/relationships" id="267" r:id="R36b390b67ede4872"/>
+    <p:sldId xmlns:r="http://schemas.openxmlformats.org/officeDocument/2006/relationships" id="256" r:id="R1788716f44174b2e"/>
+    <p:sldId xmlns:r="http://schemas.openxmlformats.org/officeDocument/2006/relationships" id="257" r:id="Rc0cb49aa2de04b2b"/>
+    <p:sldId xmlns:r="http://schemas.openxmlformats.org/officeDocument/2006/relationships" id="258" r:id="R227714c9b41a4594"/>
+    <p:sldId xmlns:r="http://schemas.openxmlformats.org/officeDocument/2006/relationships" id="259" r:id="R151195894c494fd5"/>
+    <p:sldId xmlns:r="http://schemas.openxmlformats.org/officeDocument/2006/relationships" id="260" r:id="Rccdc80fb6b0e4526"/>
+    <p:sldId xmlns:r="http://schemas.openxmlformats.org/officeDocument/2006/relationships" id="261" r:id="R010832e3fecb4ab9"/>
+    <p:sldId xmlns:r="http://schemas.openxmlformats.org/officeDocument/2006/relationships" id="262" r:id="Rda8cdf61c928475c"/>
+    <p:sldId xmlns:r="http://schemas.openxmlformats.org/officeDocument/2006/relationships" id="263" r:id="Rf8480badd90a44b7"/>
+    <p:sldId xmlns:r="http://schemas.openxmlformats.org/officeDocument/2006/relationships" id="264" r:id="R22efebf7a7c94265"/>
+    <p:sldId xmlns:r="http://schemas.openxmlformats.org/officeDocument/2006/relationships" id="265" r:id="Ra64757cbac3d4f4a"/>
+    <p:sldId xmlns:r="http://schemas.openxmlformats.org/officeDocument/2006/relationships" id="266" r:id="R08b768c6e1d64c35"/>
+    <p:sldId xmlns:r="http://schemas.openxmlformats.org/officeDocument/2006/relationships" id="267" r:id="R1592355488e746cb"/>
   </p:sldIdLst>
   <p:sldSz cx="12192000" cy="6858000"/>
   <p:notesSz cx="6858000" cy="9144000"/>
@@ -1338,7 +1338,7 @@
   </p:cSld>
   <p:clrMap bg1="lt1" tx1="dk1" bg2="lt2" tx2="dk2" accent1="accent1" accent2="accent2" accent3="accent3" accent4="accent4" accent5="accent5" accent6="accent6" hlink="hlink" folHlink="folHlink"/>
   <p:sldLayoutIdLst>
-    <p:sldLayoutId xmlns:r="http://schemas.openxmlformats.org/officeDocument/2006/relationships" id="2147483649" r:id="R9ec54ccf683a4923"/>
+    <p:sldLayoutId xmlns:r="http://schemas.openxmlformats.org/officeDocument/2006/relationships" id="2147483649" r:id="R6d39322748284680"/>
   </p:sldLayoutIdLst>
   <p:txStyles>
     <p:titleStyle>
@@ -1889,7 +1889,7 @@
           <p:cNvPr id="1" name="cover-rule">
             <a:extLst xmlns:a="http://schemas.openxmlformats.org/drawingml/2006/main">
               <a:ext uri="{FF2B5EF4-FFF2-40B4-BE49-F238E27FC236}">
-                <a16:creationId xmlns:a16="http://schemas.microsoft.com/office/drawing/2014/main" id="{93E04176-AED5-430A-B436-71DBFD58224D}"/>
+                <a16:creationId xmlns:a16="http://schemas.microsoft.com/office/drawing/2014/main" id="{13296896-0934-4A05-9B6C-990B928ECECA}"/>
               </a:ext>
             </a:extLst>
           </p:cNvPr>
@@ -1922,7 +1922,7 @@
           <p:cNvPr id="2" name="cover-ring-1">
             <a:extLst xmlns:a="http://schemas.openxmlformats.org/drawingml/2006/main">
               <a:ext uri="{FF2B5EF4-FFF2-40B4-BE49-F238E27FC236}">
-                <a16:creationId xmlns:a16="http://schemas.microsoft.com/office/drawing/2014/main" id="{73D3F9BA-FE77-452B-9BC2-E05D75DDF5B3}"/>
+                <a16:creationId xmlns:a16="http://schemas.microsoft.com/office/drawing/2014/main" id="{77476D73-9FC4-402D-A508-CA9F03B1C500}"/>
               </a:ext>
             </a:extLst>
           </p:cNvPr>
@@ -1953,7 +1953,7 @@
           <p:cNvPr id="3" name="cover-ring-2">
             <a:extLst xmlns:a="http://schemas.openxmlformats.org/drawingml/2006/main">
               <a:ext uri="{FF2B5EF4-FFF2-40B4-BE49-F238E27FC236}">
-                <a16:creationId xmlns:a16="http://schemas.microsoft.com/office/drawing/2014/main" id="{79873EB5-9357-48FA-A49E-E730AC809A68}"/>
+                <a16:creationId xmlns:a16="http://schemas.microsoft.com/office/drawing/2014/main" id="{DBB78EDD-D37D-42AB-8B22-315CB4B7DD2A}"/>
               </a:ext>
             </a:extLst>
           </p:cNvPr>
@@ -1984,7 +1984,7 @@
           <p:cNvPr id="4" name="cover-core">
             <a:extLst xmlns:a="http://schemas.openxmlformats.org/drawingml/2006/main">
               <a:ext uri="{FF2B5EF4-FFF2-40B4-BE49-F238E27FC236}">
-                <a16:creationId xmlns:a16="http://schemas.microsoft.com/office/drawing/2014/main" id="{C98F04FA-DB1C-4FF4-8F73-D179BF3B6A4E}"/>
+                <a16:creationId xmlns:a16="http://schemas.microsoft.com/office/drawing/2014/main" id="{84FCEE38-8BAB-4267-B5F4-B46FF1C8223F}"/>
               </a:ext>
             </a:extLst>
           </p:cNvPr>
@@ -2017,7 +2017,7 @@
           <p:cNvPr id="5" name="cover-line-1">
             <a:extLst xmlns:a="http://schemas.openxmlformats.org/drawingml/2006/main">
               <a:ext uri="{FF2B5EF4-FFF2-40B4-BE49-F238E27FC236}">
-                <a16:creationId xmlns:a16="http://schemas.microsoft.com/office/drawing/2014/main" id="{262E8A2E-4068-41F5-AC37-B61240170706}"/>
+                <a16:creationId xmlns:a16="http://schemas.microsoft.com/office/drawing/2014/main" id="{0AD750D4-B66A-47D5-A07F-3305464544B5}"/>
               </a:ext>
             </a:extLst>
           </p:cNvPr>
@@ -2048,7 +2048,7 @@
           <p:cNvPr id="6" name="cover-line-2">
             <a:extLst xmlns:a="http://schemas.openxmlformats.org/drawingml/2006/main">
               <a:ext uri="{FF2B5EF4-FFF2-40B4-BE49-F238E27FC236}">
-                <a16:creationId xmlns:a16="http://schemas.microsoft.com/office/drawing/2014/main" id="{00A2D628-5D7F-4367-84DA-4A7143DEEE1C}"/>
+                <a16:creationId xmlns:a16="http://schemas.microsoft.com/office/drawing/2014/main" id="{D5F7595D-A212-4F3A-8583-0DB98FF5D320}"/>
               </a:ext>
             </a:extLst>
           </p:cNvPr>
@@ -2079,7 +2079,7 @@
           <p:cNvPr id="7" name="cover-eyebrow">
             <a:extLst xmlns:a="http://schemas.openxmlformats.org/drawingml/2006/main">
               <a:ext uri="{FF2B5EF4-FFF2-40B4-BE49-F238E27FC236}">
-                <a16:creationId xmlns:a16="http://schemas.microsoft.com/office/drawing/2014/main" id="{2620CC43-97BB-4F38-B312-298F39145F40}"/>
+                <a16:creationId xmlns:a16="http://schemas.microsoft.com/office/drawing/2014/main" id="{1988CA2D-4DEE-4231-9372-09D9F1FFC565}"/>
               </a:ext>
             </a:extLst>
           </p:cNvPr>
@@ -2137,7 +2137,7 @@
           <p:cNvPr id="8" name="cover-title">
             <a:extLst xmlns:a="http://schemas.openxmlformats.org/drawingml/2006/main">
               <a:ext uri="{FF2B5EF4-FFF2-40B4-BE49-F238E27FC236}">
-                <a16:creationId xmlns:a16="http://schemas.microsoft.com/office/drawing/2014/main" id="{DCEF9931-0813-4618-98CB-353455810C37}"/>
+                <a16:creationId xmlns:a16="http://schemas.microsoft.com/office/drawing/2014/main" id="{9E842616-3CDE-4512-BCC4-964F96018AE3}"/>
               </a:ext>
             </a:extLst>
           </p:cNvPr>
@@ -2195,7 +2195,7 @@
           <p:cNvPr id="9" name="cover-subtitle">
             <a:extLst xmlns:a="http://schemas.openxmlformats.org/drawingml/2006/main">
               <a:ext uri="{FF2B5EF4-FFF2-40B4-BE49-F238E27FC236}">
-                <a16:creationId xmlns:a16="http://schemas.microsoft.com/office/drawing/2014/main" id="{51EA75D0-5EF0-4B15-A18F-CE31F2F8770A}"/>
+                <a16:creationId xmlns:a16="http://schemas.microsoft.com/office/drawing/2014/main" id="{174D9345-0344-44DD-A7DC-0CA19AFC0A2C}"/>
               </a:ext>
             </a:extLst>
           </p:cNvPr>
@@ -2257,7 +2257,7 @@
           <p:cNvPr id="10" name="cover-lead">
             <a:extLst xmlns:a="http://schemas.openxmlformats.org/drawingml/2006/main">
               <a:ext uri="{FF2B5EF4-FFF2-40B4-BE49-F238E27FC236}">
-                <a16:creationId xmlns:a16="http://schemas.microsoft.com/office/drawing/2014/main" id="{785E0CBF-70D8-468F-B184-1F681239580B}"/>
+                <a16:creationId xmlns:a16="http://schemas.microsoft.com/office/drawing/2014/main" id="{D20C6605-2FD5-4E7A-9B69-1115A7282AF1}"/>
               </a:ext>
             </a:extLst>
           </p:cNvPr>
@@ -2315,7 +2315,7 @@
           <p:cNvPr id="11" name="cover-course">
             <a:extLst xmlns:a="http://schemas.openxmlformats.org/drawingml/2006/main">
               <a:ext uri="{FF2B5EF4-FFF2-40B4-BE49-F238E27FC236}">
-                <a16:creationId xmlns:a16="http://schemas.microsoft.com/office/drawing/2014/main" id="{8AB14CEA-9CE5-44FF-8D49-C4D38BA661A8}"/>
+                <a16:creationId xmlns:a16="http://schemas.microsoft.com/office/drawing/2014/main" id="{4C654A98-BB9C-406A-918D-AC685AB770D8}"/>
               </a:ext>
             </a:extLst>
           </p:cNvPr>
@@ -2373,7 +2373,7 @@
           <p:cNvPr id="12" name="cover-id">
             <a:extLst xmlns:a="http://schemas.openxmlformats.org/drawingml/2006/main">
               <a:ext uri="{FF2B5EF4-FFF2-40B4-BE49-F238E27FC236}">
-                <a16:creationId xmlns:a16="http://schemas.microsoft.com/office/drawing/2014/main" id="{D0B60D32-91AA-4EED-873B-C4057D24CC58}"/>
+                <a16:creationId xmlns:a16="http://schemas.microsoft.com/office/drawing/2014/main" id="{C86F6B90-73DD-4AE0-9D3C-0C1C6CEBEDD5}"/>
               </a:ext>
             </a:extLst>
           </p:cNvPr>
@@ -2429,7 +2429,7 @@
     </p:spTree>
     <p:extLst>
       <p:ext uri="{BB962C8B-B14F-4D97-AF65-F5344CB8AC3E}">
-        <p14:creationId xmlns:p14="http://schemas.microsoft.com/office/powerpoint/2010/main" val="595704117"/>
+        <p14:creationId xmlns:p14="http://schemas.microsoft.com/office/powerpoint/2010/main" val="711938863"/>
       </p:ext>
     </p:extLst>
   </p:cSld>
@@ -2460,7 +2460,7 @@
           <p:cNvPr id="1" name="s10-rule">
             <a:extLst xmlns:a="http://schemas.openxmlformats.org/drawingml/2006/main">
               <a:ext uri="{FF2B5EF4-FFF2-40B4-BE49-F238E27FC236}">
-                <a16:creationId xmlns:a16="http://schemas.microsoft.com/office/drawing/2014/main" id="{28C270BB-A5AD-42C9-9F9D-4D49D6BA8D1A}"/>
+                <a16:creationId xmlns:a16="http://schemas.microsoft.com/office/drawing/2014/main" id="{4DDDB685-8DE0-459A-9652-78B08551C653}"/>
               </a:ext>
             </a:extLst>
           </p:cNvPr>
@@ -2493,7 +2493,7 @@
           <p:cNvPr id="2" name="s10-eyebrow">
             <a:extLst xmlns:a="http://schemas.openxmlformats.org/drawingml/2006/main">
               <a:ext uri="{FF2B5EF4-FFF2-40B4-BE49-F238E27FC236}">
-                <a16:creationId xmlns:a16="http://schemas.microsoft.com/office/drawing/2014/main" id="{15D9C57D-FD27-4865-8D91-188379ED9353}"/>
+                <a16:creationId xmlns:a16="http://schemas.microsoft.com/office/drawing/2014/main" id="{C922A31A-C4EB-4070-9D6E-FF3D4BBF1496}"/>
               </a:ext>
             </a:extLst>
           </p:cNvPr>
@@ -2551,7 +2551,7 @@
           <p:cNvPr id="3" name="s10-title">
             <a:extLst xmlns:a="http://schemas.openxmlformats.org/drawingml/2006/main">
               <a:ext uri="{FF2B5EF4-FFF2-40B4-BE49-F238E27FC236}">
-                <a16:creationId xmlns:a16="http://schemas.microsoft.com/office/drawing/2014/main" id="{B5B4277A-2BAA-4DDD-B7AA-CC8AC8A5CAC9}"/>
+                <a16:creationId xmlns:a16="http://schemas.microsoft.com/office/drawing/2014/main" id="{69822663-AF89-4A45-AD20-565C01FA170A}"/>
               </a:ext>
             </a:extLst>
           </p:cNvPr>
@@ -2609,7 +2609,7 @@
           <p:cNvPr id="4" name="s10-footer">
             <a:extLst xmlns:a="http://schemas.openxmlformats.org/drawingml/2006/main">
               <a:ext uri="{FF2B5EF4-FFF2-40B4-BE49-F238E27FC236}">
-                <a16:creationId xmlns:a16="http://schemas.microsoft.com/office/drawing/2014/main" id="{7F9E04EC-8842-4915-B53E-2343092B172E}"/>
+                <a16:creationId xmlns:a16="http://schemas.microsoft.com/office/drawing/2014/main" id="{6CF79426-9892-4061-B97B-8B50DC7124F4}"/>
               </a:ext>
             </a:extLst>
           </p:cNvPr>
@@ -2640,7 +2640,7 @@
           <p:cNvPr id="5" name="s10-identity">
             <a:extLst xmlns:a="http://schemas.openxmlformats.org/drawingml/2006/main">
               <a:ext uri="{FF2B5EF4-FFF2-40B4-BE49-F238E27FC236}">
-                <a16:creationId xmlns:a16="http://schemas.microsoft.com/office/drawing/2014/main" id="{A9171279-6A2C-42A0-A079-8C88D3AEF379}"/>
+                <a16:creationId xmlns:a16="http://schemas.microsoft.com/office/drawing/2014/main" id="{654FA813-2C7D-4B84-BD31-C1A5C920D7E5}"/>
               </a:ext>
             </a:extLst>
           </p:cNvPr>
@@ -2698,7 +2698,7 @@
           <p:cNvPr id="6" name="practice-circle-0">
             <a:extLst xmlns:a="http://schemas.openxmlformats.org/drawingml/2006/main">
               <a:ext uri="{FF2B5EF4-FFF2-40B4-BE49-F238E27FC236}">
-                <a16:creationId xmlns:a16="http://schemas.microsoft.com/office/drawing/2014/main" id="{0A0D24DE-CB49-4D26-8EC7-D9562D454724}"/>
+                <a16:creationId xmlns:a16="http://schemas.microsoft.com/office/drawing/2014/main" id="{E3A680F8-97BF-4917-B0BD-CFA52A866F5F}"/>
               </a:ext>
             </a:extLst>
           </p:cNvPr>
@@ -2731,7 +2731,7 @@
           <p:cNvPr id="7" name="practice-number-0">
             <a:extLst xmlns:a="http://schemas.openxmlformats.org/drawingml/2006/main">
               <a:ext uri="{FF2B5EF4-FFF2-40B4-BE49-F238E27FC236}">
-                <a16:creationId xmlns:a16="http://schemas.microsoft.com/office/drawing/2014/main" id="{9A457936-7CC9-4382-BDC6-A436AF75BC50}"/>
+                <a16:creationId xmlns:a16="http://schemas.microsoft.com/office/drawing/2014/main" id="{D2DE7F65-41B7-439C-B436-70BB25567BA1}"/>
               </a:ext>
             </a:extLst>
           </p:cNvPr>
@@ -2789,7 +2789,7 @@
           <p:cNvPr id="8" name="practice-item-0">
             <a:extLst xmlns:a="http://schemas.openxmlformats.org/drawingml/2006/main">
               <a:ext uri="{FF2B5EF4-FFF2-40B4-BE49-F238E27FC236}">
-                <a16:creationId xmlns:a16="http://schemas.microsoft.com/office/drawing/2014/main" id="{21D450A1-2C05-4BE3-9D59-20F259D4D2E3}"/>
+                <a16:creationId xmlns:a16="http://schemas.microsoft.com/office/drawing/2014/main" id="{7596F53C-8045-4009-BB0F-DAC59E6C7D9B}"/>
               </a:ext>
             </a:extLst>
           </p:cNvPr>
@@ -2853,7 +2853,7 @@
           <p:cNvPr id="9" name="practice-connector-0">
             <a:extLst xmlns:a="http://schemas.openxmlformats.org/drawingml/2006/main">
               <a:ext uri="{FF2B5EF4-FFF2-40B4-BE49-F238E27FC236}">
-                <a16:creationId xmlns:a16="http://schemas.microsoft.com/office/drawing/2014/main" id="{587983CC-EC62-4E3A-B38E-D006854535A2}"/>
+                <a16:creationId xmlns:a16="http://schemas.microsoft.com/office/drawing/2014/main" id="{10AA0421-44C9-4966-85B5-FDC26EBA87C2}"/>
               </a:ext>
             </a:extLst>
           </p:cNvPr>
@@ -2884,7 +2884,7 @@
           <p:cNvPr id="10" name="practice-circle-1">
             <a:extLst xmlns:a="http://schemas.openxmlformats.org/drawingml/2006/main">
               <a:ext uri="{FF2B5EF4-FFF2-40B4-BE49-F238E27FC236}">
-                <a16:creationId xmlns:a16="http://schemas.microsoft.com/office/drawing/2014/main" id="{175C78FA-22BF-45EB-872F-CCC819E4D816}"/>
+                <a16:creationId xmlns:a16="http://schemas.microsoft.com/office/drawing/2014/main" id="{AA485E76-939B-4541-8D1B-47A74B69461A}"/>
               </a:ext>
             </a:extLst>
           </p:cNvPr>
@@ -2917,7 +2917,7 @@
           <p:cNvPr id="11" name="practice-number-1">
             <a:extLst xmlns:a="http://schemas.openxmlformats.org/drawingml/2006/main">
               <a:ext uri="{FF2B5EF4-FFF2-40B4-BE49-F238E27FC236}">
-                <a16:creationId xmlns:a16="http://schemas.microsoft.com/office/drawing/2014/main" id="{F7B09537-8485-46AF-8063-65B639421CC8}"/>
+                <a16:creationId xmlns:a16="http://schemas.microsoft.com/office/drawing/2014/main" id="{F3A5675C-2301-4DBC-AF86-8B37B9311FEE}"/>
               </a:ext>
             </a:extLst>
           </p:cNvPr>
@@ -2975,7 +2975,7 @@
           <p:cNvPr id="12" name="practice-item-1">
             <a:extLst xmlns:a="http://schemas.openxmlformats.org/drawingml/2006/main">
               <a:ext uri="{FF2B5EF4-FFF2-40B4-BE49-F238E27FC236}">
-                <a16:creationId xmlns:a16="http://schemas.microsoft.com/office/drawing/2014/main" id="{7C720159-B355-4504-BE7B-483D59B8E250}"/>
+                <a16:creationId xmlns:a16="http://schemas.microsoft.com/office/drawing/2014/main" id="{243866E2-426D-48B0-925A-DE757CD5D7E3}"/>
               </a:ext>
             </a:extLst>
           </p:cNvPr>
@@ -3039,7 +3039,7 @@
           <p:cNvPr id="13" name="practice-connector-1">
             <a:extLst xmlns:a="http://schemas.openxmlformats.org/drawingml/2006/main">
               <a:ext uri="{FF2B5EF4-FFF2-40B4-BE49-F238E27FC236}">
-                <a16:creationId xmlns:a16="http://schemas.microsoft.com/office/drawing/2014/main" id="{CA02D988-F5FD-489F-B3E9-94D3A3D4038B}"/>
+                <a16:creationId xmlns:a16="http://schemas.microsoft.com/office/drawing/2014/main" id="{8C4A27BB-5CCF-4E0A-AA4D-BCBC77861728}"/>
               </a:ext>
             </a:extLst>
           </p:cNvPr>
@@ -3070,7 +3070,7 @@
           <p:cNvPr id="14" name="practice-circle-2">
             <a:extLst xmlns:a="http://schemas.openxmlformats.org/drawingml/2006/main">
               <a:ext uri="{FF2B5EF4-FFF2-40B4-BE49-F238E27FC236}">
-                <a16:creationId xmlns:a16="http://schemas.microsoft.com/office/drawing/2014/main" id="{EF00D8AC-C6FC-4EF0-A600-9EB25EAD50A7}"/>
+                <a16:creationId xmlns:a16="http://schemas.microsoft.com/office/drawing/2014/main" id="{9AE94340-7255-421B-8261-4F8DACD74B7D}"/>
               </a:ext>
             </a:extLst>
           </p:cNvPr>
@@ -3103,7 +3103,7 @@
           <p:cNvPr id="15" name="practice-number-2">
             <a:extLst xmlns:a="http://schemas.openxmlformats.org/drawingml/2006/main">
               <a:ext uri="{FF2B5EF4-FFF2-40B4-BE49-F238E27FC236}">
-                <a16:creationId xmlns:a16="http://schemas.microsoft.com/office/drawing/2014/main" id="{EB161EB0-0B57-491C-B0FB-CAC9A58CA21C}"/>
+                <a16:creationId xmlns:a16="http://schemas.microsoft.com/office/drawing/2014/main" id="{7958E6D0-F45D-42B1-84B1-ECEEA9B53529}"/>
               </a:ext>
             </a:extLst>
           </p:cNvPr>
@@ -3161,7 +3161,7 @@
           <p:cNvPr id="16" name="practice-item-2">
             <a:extLst xmlns:a="http://schemas.openxmlformats.org/drawingml/2006/main">
               <a:ext uri="{FF2B5EF4-FFF2-40B4-BE49-F238E27FC236}">
-                <a16:creationId xmlns:a16="http://schemas.microsoft.com/office/drawing/2014/main" id="{C6B35C88-3E63-4C00-9D4D-DD7219E924C9}"/>
+                <a16:creationId xmlns:a16="http://schemas.microsoft.com/office/drawing/2014/main" id="{F8598CFC-E314-4131-87AF-49E14797E995}"/>
               </a:ext>
             </a:extLst>
           </p:cNvPr>
@@ -3223,7 +3223,7 @@
     </p:spTree>
     <p:extLst>
       <p:ext uri="{BB962C8B-B14F-4D97-AF65-F5344CB8AC3E}">
-        <p14:creationId xmlns:p14="http://schemas.microsoft.com/office/powerpoint/2010/main" val="1091538331"/>
+        <p14:creationId xmlns:p14="http://schemas.microsoft.com/office/powerpoint/2010/main" val="1361503647"/>
       </p:ext>
     </p:extLst>
   </p:cSld>
@@ -3254,7 +3254,7 @@
           <p:cNvPr id="1" name="s11-rule">
             <a:extLst xmlns:a="http://schemas.openxmlformats.org/drawingml/2006/main">
               <a:ext uri="{FF2B5EF4-FFF2-40B4-BE49-F238E27FC236}">
-                <a16:creationId xmlns:a16="http://schemas.microsoft.com/office/drawing/2014/main" id="{36026DB9-50CB-4E9F-BFD4-FFB99F9ACA27}"/>
+                <a16:creationId xmlns:a16="http://schemas.microsoft.com/office/drawing/2014/main" id="{6E011149-C35E-4A15-8877-CE4D47FD9C98}"/>
               </a:ext>
             </a:extLst>
           </p:cNvPr>
@@ -3287,7 +3287,7 @@
           <p:cNvPr id="2" name="s11-eyebrow">
             <a:extLst xmlns:a="http://schemas.openxmlformats.org/drawingml/2006/main">
               <a:ext uri="{FF2B5EF4-FFF2-40B4-BE49-F238E27FC236}">
-                <a16:creationId xmlns:a16="http://schemas.microsoft.com/office/drawing/2014/main" id="{AC2B1A37-966F-4233-A2BE-D905C927F35D}"/>
+                <a16:creationId xmlns:a16="http://schemas.microsoft.com/office/drawing/2014/main" id="{134F30DA-2EE4-488D-B484-312A56D57314}"/>
               </a:ext>
             </a:extLst>
           </p:cNvPr>
@@ -3345,7 +3345,7 @@
           <p:cNvPr id="3" name="s11-title">
             <a:extLst xmlns:a="http://schemas.openxmlformats.org/drawingml/2006/main">
               <a:ext uri="{FF2B5EF4-FFF2-40B4-BE49-F238E27FC236}">
-                <a16:creationId xmlns:a16="http://schemas.microsoft.com/office/drawing/2014/main" id="{446372A1-6D26-4C11-A183-06D8D19A9A78}"/>
+                <a16:creationId xmlns:a16="http://schemas.microsoft.com/office/drawing/2014/main" id="{1EC7FF3B-EEDA-442D-BF5C-92175983B723}"/>
               </a:ext>
             </a:extLst>
           </p:cNvPr>
@@ -3403,7 +3403,7 @@
           <p:cNvPr id="4" name="s11-footer">
             <a:extLst xmlns:a="http://schemas.openxmlformats.org/drawingml/2006/main">
               <a:ext uri="{FF2B5EF4-FFF2-40B4-BE49-F238E27FC236}">
-                <a16:creationId xmlns:a16="http://schemas.microsoft.com/office/drawing/2014/main" id="{CE58E4CE-3714-4EF2-A672-AFDF62E8D312}"/>
+                <a16:creationId xmlns:a16="http://schemas.microsoft.com/office/drawing/2014/main" id="{34FCC21E-67EC-40CF-B9A7-948B9CDCFB26}"/>
               </a:ext>
             </a:extLst>
           </p:cNvPr>
@@ -3434,7 +3434,7 @@
           <p:cNvPr id="5" name="s11-identity">
             <a:extLst xmlns:a="http://schemas.openxmlformats.org/drawingml/2006/main">
               <a:ext uri="{FF2B5EF4-FFF2-40B4-BE49-F238E27FC236}">
-                <a16:creationId xmlns:a16="http://schemas.microsoft.com/office/drawing/2014/main" id="{34A2EF49-7551-4856-81E8-F7F4466B37FA}"/>
+                <a16:creationId xmlns:a16="http://schemas.microsoft.com/office/drawing/2014/main" id="{8EF61906-9CC5-4853-B462-2D6E1C87C7AB}"/>
               </a:ext>
             </a:extLst>
           </p:cNvPr>
@@ -3492,7 +3492,7 @@
           <p:cNvPr id="6" name="recap-circle-0">
             <a:extLst xmlns:a="http://schemas.openxmlformats.org/drawingml/2006/main">
               <a:ext uri="{FF2B5EF4-FFF2-40B4-BE49-F238E27FC236}">
-                <a16:creationId xmlns:a16="http://schemas.microsoft.com/office/drawing/2014/main" id="{744594ED-65EA-49D3-9034-1243FF3285B6}"/>
+                <a16:creationId xmlns:a16="http://schemas.microsoft.com/office/drawing/2014/main" id="{E91786B5-B8DB-41ED-A5FB-9E59B1194697}"/>
               </a:ext>
             </a:extLst>
           </p:cNvPr>
@@ -3525,7 +3525,7 @@
           <p:cNvPr id="7" name="recap-number-0">
             <a:extLst xmlns:a="http://schemas.openxmlformats.org/drawingml/2006/main">
               <a:ext uri="{FF2B5EF4-FFF2-40B4-BE49-F238E27FC236}">
-                <a16:creationId xmlns:a16="http://schemas.microsoft.com/office/drawing/2014/main" id="{BCF5BDE2-B940-4C84-8B36-A27CA175BD1C}"/>
+                <a16:creationId xmlns:a16="http://schemas.microsoft.com/office/drawing/2014/main" id="{9B2680C4-B412-4506-BF11-DC0EA670261E}"/>
               </a:ext>
             </a:extLst>
           </p:cNvPr>
@@ -3583,7 +3583,7 @@
           <p:cNvPr id="8" name="recap-item-0">
             <a:extLst xmlns:a="http://schemas.openxmlformats.org/drawingml/2006/main">
               <a:ext uri="{FF2B5EF4-FFF2-40B4-BE49-F238E27FC236}">
-                <a16:creationId xmlns:a16="http://schemas.microsoft.com/office/drawing/2014/main" id="{E4C91A64-96EB-421F-AFC6-C0B5E2DD5939}"/>
+                <a16:creationId xmlns:a16="http://schemas.microsoft.com/office/drawing/2014/main" id="{79D679F5-7E53-4CCB-B7B4-43AE4B8DD407}"/>
               </a:ext>
             </a:extLst>
           </p:cNvPr>
@@ -3647,7 +3647,7 @@
           <p:cNvPr id="9" name="recap-connector-0">
             <a:extLst xmlns:a="http://schemas.openxmlformats.org/drawingml/2006/main">
               <a:ext uri="{FF2B5EF4-FFF2-40B4-BE49-F238E27FC236}">
-                <a16:creationId xmlns:a16="http://schemas.microsoft.com/office/drawing/2014/main" id="{623604E3-AFEA-4276-A47E-9C48323C661E}"/>
+                <a16:creationId xmlns:a16="http://schemas.microsoft.com/office/drawing/2014/main" id="{1DC2CE84-ED33-47D6-99AA-D60AB4858F8A}"/>
               </a:ext>
             </a:extLst>
           </p:cNvPr>
@@ -3678,7 +3678,7 @@
           <p:cNvPr id="10" name="recap-circle-1">
             <a:extLst xmlns:a="http://schemas.openxmlformats.org/drawingml/2006/main">
               <a:ext uri="{FF2B5EF4-FFF2-40B4-BE49-F238E27FC236}">
-                <a16:creationId xmlns:a16="http://schemas.microsoft.com/office/drawing/2014/main" id="{8C645F64-43C4-4DA9-94E8-00F139CCF497}"/>
+                <a16:creationId xmlns:a16="http://schemas.microsoft.com/office/drawing/2014/main" id="{8F8C2AE2-9439-4027-A405-051ACE22A75D}"/>
               </a:ext>
             </a:extLst>
           </p:cNvPr>
@@ -3711,7 +3711,7 @@
           <p:cNvPr id="11" name="recap-number-1">
             <a:extLst xmlns:a="http://schemas.openxmlformats.org/drawingml/2006/main">
               <a:ext uri="{FF2B5EF4-FFF2-40B4-BE49-F238E27FC236}">
-                <a16:creationId xmlns:a16="http://schemas.microsoft.com/office/drawing/2014/main" id="{70889F2D-FDB3-4CA3-9DF2-3003119DF3C4}"/>
+                <a16:creationId xmlns:a16="http://schemas.microsoft.com/office/drawing/2014/main" id="{97A95FDA-AC7B-41FC-85D1-65B8E409F66E}"/>
               </a:ext>
             </a:extLst>
           </p:cNvPr>
@@ -3769,7 +3769,7 @@
           <p:cNvPr id="12" name="recap-item-1">
             <a:extLst xmlns:a="http://schemas.openxmlformats.org/drawingml/2006/main">
               <a:ext uri="{FF2B5EF4-FFF2-40B4-BE49-F238E27FC236}">
-                <a16:creationId xmlns:a16="http://schemas.microsoft.com/office/drawing/2014/main" id="{F26C7825-3DAC-4C23-AAD2-98A426888F3D}"/>
+                <a16:creationId xmlns:a16="http://schemas.microsoft.com/office/drawing/2014/main" id="{2A256F81-5723-4AB0-960F-EF7E415F9F05}"/>
               </a:ext>
             </a:extLst>
           </p:cNvPr>
@@ -3833,7 +3833,7 @@
           <p:cNvPr id="13" name="recap-connector-1">
             <a:extLst xmlns:a="http://schemas.openxmlformats.org/drawingml/2006/main">
               <a:ext uri="{FF2B5EF4-FFF2-40B4-BE49-F238E27FC236}">
-                <a16:creationId xmlns:a16="http://schemas.microsoft.com/office/drawing/2014/main" id="{C3D6F148-2F99-4FC2-B1A8-E5E1125FF57A}"/>
+                <a16:creationId xmlns:a16="http://schemas.microsoft.com/office/drawing/2014/main" id="{B6A69BD4-04FB-4A85-97D0-6BE50311F655}"/>
               </a:ext>
             </a:extLst>
           </p:cNvPr>
@@ -3864,7 +3864,7 @@
           <p:cNvPr id="14" name="recap-circle-2">
             <a:extLst xmlns:a="http://schemas.openxmlformats.org/drawingml/2006/main">
               <a:ext uri="{FF2B5EF4-FFF2-40B4-BE49-F238E27FC236}">
-                <a16:creationId xmlns:a16="http://schemas.microsoft.com/office/drawing/2014/main" id="{AB932288-2738-45EC-AE0F-E7CCD486EAAF}"/>
+                <a16:creationId xmlns:a16="http://schemas.microsoft.com/office/drawing/2014/main" id="{AEA1B24A-9D01-464B-939C-D953B39E367C}"/>
               </a:ext>
             </a:extLst>
           </p:cNvPr>
@@ -3897,7 +3897,7 @@
           <p:cNvPr id="15" name="recap-number-2">
             <a:extLst xmlns:a="http://schemas.openxmlformats.org/drawingml/2006/main">
               <a:ext uri="{FF2B5EF4-FFF2-40B4-BE49-F238E27FC236}">
-                <a16:creationId xmlns:a16="http://schemas.microsoft.com/office/drawing/2014/main" id="{2DF37584-8951-415B-9409-F81A84C1EC37}"/>
+                <a16:creationId xmlns:a16="http://schemas.microsoft.com/office/drawing/2014/main" id="{F236DBA3-35DB-43F9-A7C8-D86185384108}"/>
               </a:ext>
             </a:extLst>
           </p:cNvPr>
@@ -3955,7 +3955,7 @@
           <p:cNvPr id="16" name="recap-item-2">
             <a:extLst xmlns:a="http://schemas.openxmlformats.org/drawingml/2006/main">
               <a:ext uri="{FF2B5EF4-FFF2-40B4-BE49-F238E27FC236}">
-                <a16:creationId xmlns:a16="http://schemas.microsoft.com/office/drawing/2014/main" id="{2D92D97A-319F-412F-A5E9-9D9C63BD05B9}"/>
+                <a16:creationId xmlns:a16="http://schemas.microsoft.com/office/drawing/2014/main" id="{3C6BEA0D-F25A-4BF4-B160-1CECE4AB6445}"/>
               </a:ext>
             </a:extLst>
           </p:cNvPr>
@@ -4017,7 +4017,7 @@
     </p:spTree>
     <p:extLst>
       <p:ext uri="{BB962C8B-B14F-4D97-AF65-F5344CB8AC3E}">
-        <p14:creationId xmlns:p14="http://schemas.microsoft.com/office/powerpoint/2010/main" val="526489658"/>
+        <p14:creationId xmlns:p14="http://schemas.microsoft.com/office/powerpoint/2010/main" val="1022558594"/>
       </p:ext>
     </p:extLst>
   </p:cSld>
@@ -4048,7 +4048,7 @@
           <p:cNvPr id="1" name="s12-rule">
             <a:extLst xmlns:a="http://schemas.openxmlformats.org/drawingml/2006/main">
               <a:ext uri="{FF2B5EF4-FFF2-40B4-BE49-F238E27FC236}">
-                <a16:creationId xmlns:a16="http://schemas.microsoft.com/office/drawing/2014/main" id="{7D538D24-11BB-4F8E-903D-47F8A79BB6E4}"/>
+                <a16:creationId xmlns:a16="http://schemas.microsoft.com/office/drawing/2014/main" id="{CFA4C3C1-48C1-4B58-8767-B6CD945B7EF2}"/>
               </a:ext>
             </a:extLst>
           </p:cNvPr>
@@ -4081,7 +4081,7 @@
           <p:cNvPr id="2" name="s12-eyebrow">
             <a:extLst xmlns:a="http://schemas.openxmlformats.org/drawingml/2006/main">
               <a:ext uri="{FF2B5EF4-FFF2-40B4-BE49-F238E27FC236}">
-                <a16:creationId xmlns:a16="http://schemas.microsoft.com/office/drawing/2014/main" id="{2EC3C093-DCB8-4C8F-AD7E-B63A3EC6571B}"/>
+                <a16:creationId xmlns:a16="http://schemas.microsoft.com/office/drawing/2014/main" id="{AC005329-D075-4AF2-A429-9DE857C8A809}"/>
               </a:ext>
             </a:extLst>
           </p:cNvPr>
@@ -4139,7 +4139,7 @@
           <p:cNvPr id="3" name="s12-title">
             <a:extLst xmlns:a="http://schemas.openxmlformats.org/drawingml/2006/main">
               <a:ext uri="{FF2B5EF4-FFF2-40B4-BE49-F238E27FC236}">
-                <a16:creationId xmlns:a16="http://schemas.microsoft.com/office/drawing/2014/main" id="{55D80125-499A-4C7B-B143-F5326AF24447}"/>
+                <a16:creationId xmlns:a16="http://schemas.microsoft.com/office/drawing/2014/main" id="{347CBEF0-5C7B-4BF5-AB86-0D08D5BD15FD}"/>
               </a:ext>
             </a:extLst>
           </p:cNvPr>
@@ -4197,7 +4197,7 @@
           <p:cNvPr id="4" name="s12-footer">
             <a:extLst xmlns:a="http://schemas.openxmlformats.org/drawingml/2006/main">
               <a:ext uri="{FF2B5EF4-FFF2-40B4-BE49-F238E27FC236}">
-                <a16:creationId xmlns:a16="http://schemas.microsoft.com/office/drawing/2014/main" id="{7EF0F953-1ED3-4D30-9D9D-426D051CB5E3}"/>
+                <a16:creationId xmlns:a16="http://schemas.microsoft.com/office/drawing/2014/main" id="{4445F01F-0552-4927-B1DE-65FAFBD98F95}"/>
               </a:ext>
             </a:extLst>
           </p:cNvPr>
@@ -4228,7 +4228,7 @@
           <p:cNvPr id="5" name="s12-identity">
             <a:extLst xmlns:a="http://schemas.openxmlformats.org/drawingml/2006/main">
               <a:ext uri="{FF2B5EF4-FFF2-40B4-BE49-F238E27FC236}">
-                <a16:creationId xmlns:a16="http://schemas.microsoft.com/office/drawing/2014/main" id="{DE4F3A5C-4BBD-4997-9FDF-0A468FE7E91E}"/>
+                <a16:creationId xmlns:a16="http://schemas.microsoft.com/office/drawing/2014/main" id="{C24F0373-7A6F-4998-97C0-3B219FAB399A}"/>
               </a:ext>
             </a:extLst>
           </p:cNvPr>
@@ -4286,7 +4286,7 @@
           <p:cNvPr id="6" name="source-0">
             <a:extLst xmlns:a="http://schemas.openxmlformats.org/drawingml/2006/main">
               <a:ext uri="{FF2B5EF4-FFF2-40B4-BE49-F238E27FC236}">
-                <a16:creationId xmlns:a16="http://schemas.microsoft.com/office/drawing/2014/main" id="{EE0B09B8-766A-4A5E-9D0E-EF132F92E5B1}"/>
+                <a16:creationId xmlns:a16="http://schemas.microsoft.com/office/drawing/2014/main" id="{98C290C0-78E4-4F49-832B-15763FFF8DCF}"/>
               </a:ext>
             </a:extLst>
           </p:cNvPr>
@@ -4350,7 +4350,7 @@
           <p:cNvPr id="7" name="source-1">
             <a:extLst xmlns:a="http://schemas.openxmlformats.org/drawingml/2006/main">
               <a:ext uri="{FF2B5EF4-FFF2-40B4-BE49-F238E27FC236}">
-                <a16:creationId xmlns:a16="http://schemas.microsoft.com/office/drawing/2014/main" id="{1DB4FE89-90BE-451C-8EE0-97BB253F660E}"/>
+                <a16:creationId xmlns:a16="http://schemas.microsoft.com/office/drawing/2014/main" id="{C4CB6817-C840-4F53-8D56-8701CC77E709}"/>
               </a:ext>
             </a:extLst>
           </p:cNvPr>
@@ -4414,7 +4414,7 @@
           <p:cNvPr id="8" name="source-2">
             <a:extLst xmlns:a="http://schemas.openxmlformats.org/drawingml/2006/main">
               <a:ext uri="{FF2B5EF4-FFF2-40B4-BE49-F238E27FC236}">
-                <a16:creationId xmlns:a16="http://schemas.microsoft.com/office/drawing/2014/main" id="{72221751-C6CF-47F1-B955-45C4B146281A}"/>
+                <a16:creationId xmlns:a16="http://schemas.microsoft.com/office/drawing/2014/main" id="{9E1B5850-4C80-469C-956D-551533212F7C}"/>
               </a:ext>
             </a:extLst>
           </p:cNvPr>
@@ -4478,7 +4478,7 @@
           <p:cNvPr id="9" name="source-3">
             <a:extLst xmlns:a="http://schemas.openxmlformats.org/drawingml/2006/main">
               <a:ext uri="{FF2B5EF4-FFF2-40B4-BE49-F238E27FC236}">
-                <a16:creationId xmlns:a16="http://schemas.microsoft.com/office/drawing/2014/main" id="{A023FD49-1EA2-4307-B8E3-290B3580E1D4}"/>
+                <a16:creationId xmlns:a16="http://schemas.microsoft.com/office/drawing/2014/main" id="{F5CBBB5C-F6C5-4B7E-AF8D-9BE18A3F11C9}"/>
               </a:ext>
             </a:extLst>
           </p:cNvPr>
@@ -4542,7 +4542,7 @@
           <p:cNvPr id="10" name="s12-takeaway-rule">
             <a:extLst xmlns:a="http://schemas.openxmlformats.org/drawingml/2006/main">
               <a:ext uri="{FF2B5EF4-FFF2-40B4-BE49-F238E27FC236}">
-                <a16:creationId xmlns:a16="http://schemas.microsoft.com/office/drawing/2014/main" id="{6E88BD4C-E166-4FA3-9D0A-691DE428C6B0}"/>
+                <a16:creationId xmlns:a16="http://schemas.microsoft.com/office/drawing/2014/main" id="{C7BEFCD4-E6D2-411F-9D67-3C26EF61DA00}"/>
               </a:ext>
             </a:extLst>
           </p:cNvPr>
@@ -4575,7 +4575,7 @@
           <p:cNvPr id="11" name="s12-takeaway">
             <a:extLst xmlns:a="http://schemas.openxmlformats.org/drawingml/2006/main">
               <a:ext uri="{FF2B5EF4-FFF2-40B4-BE49-F238E27FC236}">
-                <a16:creationId xmlns:a16="http://schemas.microsoft.com/office/drawing/2014/main" id="{1F23E7A8-4AF2-4734-80BF-D2665F9B76E8}"/>
+                <a16:creationId xmlns:a16="http://schemas.microsoft.com/office/drawing/2014/main" id="{B5C3E6CB-4F5D-48E0-8710-B24D505CB6E6}"/>
               </a:ext>
             </a:extLst>
           </p:cNvPr>
@@ -4600,7 +4600,7 @@
         </p:spPr>
         <p:txBody>
           <a:bodyPr xmlns:a="http://schemas.openxmlformats.org/drawingml/2006/main" lIns="0" tIns="0" rIns="0" bIns="0" anchor="ctr">
-            <a:normAutofit fontScale="95911"/>
+            <a:normAutofit fontScale="100000"/>
           </a:bodyPr>
           <a:lstStyle xmlns:a="http://schemas.openxmlformats.org/drawingml/2006/main"/>
           <a:p xmlns:a="http://schemas.openxmlformats.org/drawingml/2006/main">
@@ -4623,7 +4623,7 @@
                 <a:ea typeface="PingFang SC"/>
                 <a:cs typeface="PingFang SC"/>
               </a:rPr>
-              <a:t>课程精编页用于讲授主线；播放器中的“原课件”模式保留团队 PowerPoint 精选页、真实图片和可播放视频。</a:t>
+              <a:t>课程正文与幻灯片共享同一知识主线，图片和视频用于帮助理解本节概念与案例。</a:t>
             </a:r>
           </a:p>
         </p:txBody>
@@ -4631,7 +4631,7 @@
     </p:spTree>
     <p:extLst>
       <p:ext uri="{BB962C8B-B14F-4D97-AF65-F5344CB8AC3E}">
-        <p14:creationId xmlns:p14="http://schemas.microsoft.com/office/powerpoint/2010/main" val="1971538254"/>
+        <p14:creationId xmlns:p14="http://schemas.microsoft.com/office/powerpoint/2010/main" val="1213129818"/>
       </p:ext>
     </p:extLst>
   </p:cSld>
@@ -4662,7 +4662,7 @@
           <p:cNvPr id="1" name="s2-rule">
             <a:extLst xmlns:a="http://schemas.openxmlformats.org/drawingml/2006/main">
               <a:ext uri="{FF2B5EF4-FFF2-40B4-BE49-F238E27FC236}">
-                <a16:creationId xmlns:a16="http://schemas.microsoft.com/office/drawing/2014/main" id="{D60F9F66-3399-4AA0-B927-09A4C6F67B63}"/>
+                <a16:creationId xmlns:a16="http://schemas.microsoft.com/office/drawing/2014/main" id="{C337753B-8E9A-454C-9C76-E45F7A4200AF}"/>
               </a:ext>
             </a:extLst>
           </p:cNvPr>
@@ -4695,7 +4695,7 @@
           <p:cNvPr id="2" name="s2-eyebrow">
             <a:extLst xmlns:a="http://schemas.openxmlformats.org/drawingml/2006/main">
               <a:ext uri="{FF2B5EF4-FFF2-40B4-BE49-F238E27FC236}">
-                <a16:creationId xmlns:a16="http://schemas.microsoft.com/office/drawing/2014/main" id="{824A185B-8878-4AEB-91D7-360898BB15DD}"/>
+                <a16:creationId xmlns:a16="http://schemas.microsoft.com/office/drawing/2014/main" id="{9F11DEFA-3644-42BE-AEB0-BF1AF51D6093}"/>
               </a:ext>
             </a:extLst>
           </p:cNvPr>
@@ -4753,7 +4753,7 @@
           <p:cNvPr id="3" name="s2-title">
             <a:extLst xmlns:a="http://schemas.openxmlformats.org/drawingml/2006/main">
               <a:ext uri="{FF2B5EF4-FFF2-40B4-BE49-F238E27FC236}">
-                <a16:creationId xmlns:a16="http://schemas.microsoft.com/office/drawing/2014/main" id="{002FBF50-F791-4132-806D-5F29429254B5}"/>
+                <a16:creationId xmlns:a16="http://schemas.microsoft.com/office/drawing/2014/main" id="{2861969B-19C0-4C09-B47D-94D35ADB6479}"/>
               </a:ext>
             </a:extLst>
           </p:cNvPr>
@@ -4811,7 +4811,7 @@
           <p:cNvPr id="4" name="s2-footer">
             <a:extLst xmlns:a="http://schemas.openxmlformats.org/drawingml/2006/main">
               <a:ext uri="{FF2B5EF4-FFF2-40B4-BE49-F238E27FC236}">
-                <a16:creationId xmlns:a16="http://schemas.microsoft.com/office/drawing/2014/main" id="{15942672-1BE1-46B2-8CC0-8699F0DC1B24}"/>
+                <a16:creationId xmlns:a16="http://schemas.microsoft.com/office/drawing/2014/main" id="{183B98C5-349B-4C1A-B481-135FC6EB64F6}"/>
               </a:ext>
             </a:extLst>
           </p:cNvPr>
@@ -4842,7 +4842,7 @@
           <p:cNvPr id="5" name="s2-identity">
             <a:extLst xmlns:a="http://schemas.openxmlformats.org/drawingml/2006/main">
               <a:ext uri="{FF2B5EF4-FFF2-40B4-BE49-F238E27FC236}">
-                <a16:creationId xmlns:a16="http://schemas.microsoft.com/office/drawing/2014/main" id="{5623339F-BD92-4810-B12A-3032654D40DB}"/>
+                <a16:creationId xmlns:a16="http://schemas.microsoft.com/office/drawing/2014/main" id="{60B53611-E350-442F-B6BE-F66AB1AD6D82}"/>
               </a:ext>
             </a:extLst>
           </p:cNvPr>
@@ -4900,7 +4900,7 @@
           <p:cNvPr id="6" name="objective-1">
             <a:extLst xmlns:a="http://schemas.openxmlformats.org/drawingml/2006/main">
               <a:ext uri="{FF2B5EF4-FFF2-40B4-BE49-F238E27FC236}">
-                <a16:creationId xmlns:a16="http://schemas.microsoft.com/office/drawing/2014/main" id="{3ABF8D86-466A-4F04-BE33-648198E743BA}"/>
+                <a16:creationId xmlns:a16="http://schemas.microsoft.com/office/drawing/2014/main" id="{90F89B82-006D-44F7-B37E-62EDCC1A6E62}"/>
               </a:ext>
             </a:extLst>
           </p:cNvPr>
@@ -4987,7 +4987,7 @@
           <p:cNvPr id="7" name="objective-2">
             <a:extLst xmlns:a="http://schemas.openxmlformats.org/drawingml/2006/main">
               <a:ext uri="{FF2B5EF4-FFF2-40B4-BE49-F238E27FC236}">
-                <a16:creationId xmlns:a16="http://schemas.microsoft.com/office/drawing/2014/main" id="{A3785401-9520-40F1-B133-4C402922FDEA}"/>
+                <a16:creationId xmlns:a16="http://schemas.microsoft.com/office/drawing/2014/main" id="{548ACE8E-15FC-4B5F-9AAC-02D07DD00ACD}"/>
               </a:ext>
             </a:extLst>
           </p:cNvPr>
@@ -5074,7 +5074,7 @@
           <p:cNvPr id="8" name="objective-3">
             <a:extLst xmlns:a="http://schemas.openxmlformats.org/drawingml/2006/main">
               <a:ext uri="{FF2B5EF4-FFF2-40B4-BE49-F238E27FC236}">
-                <a16:creationId xmlns:a16="http://schemas.microsoft.com/office/drawing/2014/main" id="{1977B8E9-4E16-4CB8-B424-445B39EEBAF7}"/>
+                <a16:creationId xmlns:a16="http://schemas.microsoft.com/office/drawing/2014/main" id="{26997FC8-57C2-49E6-8C29-FCC5B1A83D2A}"/>
               </a:ext>
             </a:extLst>
           </p:cNvPr>
@@ -5161,7 +5161,7 @@
           <p:cNvPr id="9" name="objective-4">
             <a:extLst xmlns:a="http://schemas.openxmlformats.org/drawingml/2006/main">
               <a:ext uri="{FF2B5EF4-FFF2-40B4-BE49-F238E27FC236}">
-                <a16:creationId xmlns:a16="http://schemas.microsoft.com/office/drawing/2014/main" id="{B4FBFCB6-2AA4-4940-AFD3-5019B5C1494D}"/>
+                <a16:creationId xmlns:a16="http://schemas.microsoft.com/office/drawing/2014/main" id="{6D9CBE1E-903E-4A6A-89E9-60F1BE1EFE59}"/>
               </a:ext>
             </a:extLst>
           </p:cNvPr>
@@ -5246,7 +5246,7 @@
     </p:spTree>
     <p:extLst>
       <p:ext uri="{BB962C8B-B14F-4D97-AF65-F5344CB8AC3E}">
-        <p14:creationId xmlns:p14="http://schemas.microsoft.com/office/powerpoint/2010/main" val="1601037127"/>
+        <p14:creationId xmlns:p14="http://schemas.microsoft.com/office/powerpoint/2010/main" val="1579506425"/>
       </p:ext>
     </p:extLst>
   </p:cSld>
@@ -5277,7 +5277,7 @@
           <p:cNvPr id="1" name="s3-rule">
             <a:extLst xmlns:a="http://schemas.openxmlformats.org/drawingml/2006/main">
               <a:ext uri="{FF2B5EF4-FFF2-40B4-BE49-F238E27FC236}">
-                <a16:creationId xmlns:a16="http://schemas.microsoft.com/office/drawing/2014/main" id="{6D2AD7B3-3772-4619-AB89-21E0EABC7DC6}"/>
+                <a16:creationId xmlns:a16="http://schemas.microsoft.com/office/drawing/2014/main" id="{E7D892CF-A700-4E19-8214-D9D67470D920}"/>
               </a:ext>
             </a:extLst>
           </p:cNvPr>
@@ -5310,7 +5310,7 @@
           <p:cNvPr id="2" name="s3-eyebrow">
             <a:extLst xmlns:a="http://schemas.openxmlformats.org/drawingml/2006/main">
               <a:ext uri="{FF2B5EF4-FFF2-40B4-BE49-F238E27FC236}">
-                <a16:creationId xmlns:a16="http://schemas.microsoft.com/office/drawing/2014/main" id="{86F29598-E2C9-4A43-A073-E2BA4CBE2BA0}"/>
+                <a16:creationId xmlns:a16="http://schemas.microsoft.com/office/drawing/2014/main" id="{DB9EC954-AA54-406D-92A5-A89DE1426A31}"/>
               </a:ext>
             </a:extLst>
           </p:cNvPr>
@@ -5368,7 +5368,7 @@
           <p:cNvPr id="3" name="s3-title">
             <a:extLst xmlns:a="http://schemas.openxmlformats.org/drawingml/2006/main">
               <a:ext uri="{FF2B5EF4-FFF2-40B4-BE49-F238E27FC236}">
-                <a16:creationId xmlns:a16="http://schemas.microsoft.com/office/drawing/2014/main" id="{C2A6A8AB-3F58-4A90-827B-C28A769FB3CD}"/>
+                <a16:creationId xmlns:a16="http://schemas.microsoft.com/office/drawing/2014/main" id="{B0019BC6-9E59-457A-9694-31FA230675AB}"/>
               </a:ext>
             </a:extLst>
           </p:cNvPr>
@@ -5426,7 +5426,7 @@
           <p:cNvPr id="4" name="s3-footer">
             <a:extLst xmlns:a="http://schemas.openxmlformats.org/drawingml/2006/main">
               <a:ext uri="{FF2B5EF4-FFF2-40B4-BE49-F238E27FC236}">
-                <a16:creationId xmlns:a16="http://schemas.microsoft.com/office/drawing/2014/main" id="{5712EDC2-D60C-41BF-B7C9-A4838638DF2A}"/>
+                <a16:creationId xmlns:a16="http://schemas.microsoft.com/office/drawing/2014/main" id="{B24DE53C-A8E2-4670-A37E-1487FF9DF978}"/>
               </a:ext>
             </a:extLst>
           </p:cNvPr>
@@ -5457,7 +5457,7 @@
           <p:cNvPr id="5" name="s3-identity">
             <a:extLst xmlns:a="http://schemas.openxmlformats.org/drawingml/2006/main">
               <a:ext uri="{FF2B5EF4-FFF2-40B4-BE49-F238E27FC236}">
-                <a16:creationId xmlns:a16="http://schemas.microsoft.com/office/drawing/2014/main" id="{3DDBBF0C-29A1-404D-A7D6-0A41B761A60C}"/>
+                <a16:creationId xmlns:a16="http://schemas.microsoft.com/office/drawing/2014/main" id="{CFCC7A28-3210-426B-9C22-4CC779ADBFD6}"/>
               </a:ext>
             </a:extLst>
           </p:cNvPr>
@@ -5515,7 +5515,7 @@
           <p:cNvPr id="6" name="core-no-0">
             <a:extLst xmlns:a="http://schemas.openxmlformats.org/drawingml/2006/main">
               <a:ext uri="{FF2B5EF4-FFF2-40B4-BE49-F238E27FC236}">
-                <a16:creationId xmlns:a16="http://schemas.microsoft.com/office/drawing/2014/main" id="{1A0A6631-866C-4411-AEF5-62386010D4C6}"/>
+                <a16:creationId xmlns:a16="http://schemas.microsoft.com/office/drawing/2014/main" id="{F44C45E8-298A-4E4A-8B49-8F3CDDD96973}"/>
               </a:ext>
             </a:extLst>
           </p:cNvPr>
@@ -5573,7 +5573,7 @@
           <p:cNvPr id="7" name="core-label-0">
             <a:extLst xmlns:a="http://schemas.openxmlformats.org/drawingml/2006/main">
               <a:ext uri="{FF2B5EF4-FFF2-40B4-BE49-F238E27FC236}">
-                <a16:creationId xmlns:a16="http://schemas.microsoft.com/office/drawing/2014/main" id="{A18E18D1-89AB-4CC5-892E-E4C09DC8B23A}"/>
+                <a16:creationId xmlns:a16="http://schemas.microsoft.com/office/drawing/2014/main" id="{7CE661F6-F304-4028-959A-B55E597EC4D2}"/>
               </a:ext>
             </a:extLst>
           </p:cNvPr>
@@ -5631,7 +5631,7 @@
           <p:cNvPr id="8" name="core-body-0">
             <a:extLst xmlns:a="http://schemas.openxmlformats.org/drawingml/2006/main">
               <a:ext uri="{FF2B5EF4-FFF2-40B4-BE49-F238E27FC236}">
-                <a16:creationId xmlns:a16="http://schemas.microsoft.com/office/drawing/2014/main" id="{E24F72F0-187A-466F-91BC-A61582A3B198}"/>
+                <a16:creationId xmlns:a16="http://schemas.microsoft.com/office/drawing/2014/main" id="{6F8C26C0-F019-4AE5-9C68-7FAA782CBB41}"/>
               </a:ext>
             </a:extLst>
           </p:cNvPr>
@@ -5695,7 +5695,7 @@
           <p:cNvPr id="9" name="core-no-1">
             <a:extLst xmlns:a="http://schemas.openxmlformats.org/drawingml/2006/main">
               <a:ext uri="{FF2B5EF4-FFF2-40B4-BE49-F238E27FC236}">
-                <a16:creationId xmlns:a16="http://schemas.microsoft.com/office/drawing/2014/main" id="{EAB14803-E66A-4FA9-82AD-209514B2D0A0}"/>
+                <a16:creationId xmlns:a16="http://schemas.microsoft.com/office/drawing/2014/main" id="{70CD1391-4030-42D7-B3B6-403195DBDBBD}"/>
               </a:ext>
             </a:extLst>
           </p:cNvPr>
@@ -5753,7 +5753,7 @@
           <p:cNvPr id="10" name="core-body-1">
             <a:extLst xmlns:a="http://schemas.openxmlformats.org/drawingml/2006/main">
               <a:ext uri="{FF2B5EF4-FFF2-40B4-BE49-F238E27FC236}">
-                <a16:creationId xmlns:a16="http://schemas.microsoft.com/office/drawing/2014/main" id="{2FBA24E4-4CD0-4369-8EC4-0E698556B5AA}"/>
+                <a16:creationId xmlns:a16="http://schemas.microsoft.com/office/drawing/2014/main" id="{EF7D9DAA-DEE4-4C90-9992-97E7912B7E79}"/>
               </a:ext>
             </a:extLst>
           </p:cNvPr>
@@ -5817,7 +5817,7 @@
           <p:cNvPr id="11" name="core-no-2">
             <a:extLst xmlns:a="http://schemas.openxmlformats.org/drawingml/2006/main">
               <a:ext uri="{FF2B5EF4-FFF2-40B4-BE49-F238E27FC236}">
-                <a16:creationId xmlns:a16="http://schemas.microsoft.com/office/drawing/2014/main" id="{A4B3DB8C-03E4-4EC0-B6F5-85FD36F2ABE5}"/>
+                <a16:creationId xmlns:a16="http://schemas.microsoft.com/office/drawing/2014/main" id="{08E8836A-E2EA-4974-9477-EC39D2BFDFFA}"/>
               </a:ext>
             </a:extLst>
           </p:cNvPr>
@@ -5875,7 +5875,7 @@
           <p:cNvPr id="12" name="core-body-2">
             <a:extLst xmlns:a="http://schemas.openxmlformats.org/drawingml/2006/main">
               <a:ext uri="{FF2B5EF4-FFF2-40B4-BE49-F238E27FC236}">
-                <a16:creationId xmlns:a16="http://schemas.microsoft.com/office/drawing/2014/main" id="{44985178-06B6-43D9-9390-33E1674BE9B4}"/>
+                <a16:creationId xmlns:a16="http://schemas.microsoft.com/office/drawing/2014/main" id="{6E1F4F93-BEBB-4FDE-B2CA-20DF15E9F78D}"/>
               </a:ext>
             </a:extLst>
           </p:cNvPr>
@@ -5939,7 +5939,7 @@
           <p:cNvPr id="13" name="s3-takeaway-rule">
             <a:extLst xmlns:a="http://schemas.openxmlformats.org/drawingml/2006/main">
               <a:ext uri="{FF2B5EF4-FFF2-40B4-BE49-F238E27FC236}">
-                <a16:creationId xmlns:a16="http://schemas.microsoft.com/office/drawing/2014/main" id="{693F641C-B3E0-47C3-836F-3C8D9D61ABFD}"/>
+                <a16:creationId xmlns:a16="http://schemas.microsoft.com/office/drawing/2014/main" id="{BB9A1425-2B41-49AC-A52D-E826F7D40D73}"/>
               </a:ext>
             </a:extLst>
           </p:cNvPr>
@@ -5972,7 +5972,7 @@
           <p:cNvPr id="14" name="s3-takeaway">
             <a:extLst xmlns:a="http://schemas.openxmlformats.org/drawingml/2006/main">
               <a:ext uri="{FF2B5EF4-FFF2-40B4-BE49-F238E27FC236}">
-                <a16:creationId xmlns:a16="http://schemas.microsoft.com/office/drawing/2014/main" id="{FAC993F3-F4B6-4405-8EC4-1AD2B75E30B9}"/>
+                <a16:creationId xmlns:a16="http://schemas.microsoft.com/office/drawing/2014/main" id="{936642C9-7AB4-4FEB-9DCC-22D900B994B5}"/>
               </a:ext>
             </a:extLst>
           </p:cNvPr>
@@ -6028,7 +6028,7 @@
     </p:spTree>
     <p:extLst>
       <p:ext uri="{BB962C8B-B14F-4D97-AF65-F5344CB8AC3E}">
-        <p14:creationId xmlns:p14="http://schemas.microsoft.com/office/powerpoint/2010/main" val="980956412"/>
+        <p14:creationId xmlns:p14="http://schemas.microsoft.com/office/powerpoint/2010/main" val="211724366"/>
       </p:ext>
     </p:extLst>
   </p:cSld>
@@ -6059,7 +6059,7 @@
           <p:cNvPr id="1" name="s4-rule">
             <a:extLst xmlns:a="http://schemas.openxmlformats.org/drawingml/2006/main">
               <a:ext uri="{FF2B5EF4-FFF2-40B4-BE49-F238E27FC236}">
-                <a16:creationId xmlns:a16="http://schemas.microsoft.com/office/drawing/2014/main" id="{AF0830F7-6229-4363-AE42-F878E1472029}"/>
+                <a16:creationId xmlns:a16="http://schemas.microsoft.com/office/drawing/2014/main" id="{BB784264-92AD-43F7-87FE-FF18C5E8AF20}"/>
               </a:ext>
             </a:extLst>
           </p:cNvPr>
@@ -6092,7 +6092,7 @@
           <p:cNvPr id="2" name="s4-eyebrow">
             <a:extLst xmlns:a="http://schemas.openxmlformats.org/drawingml/2006/main">
               <a:ext uri="{FF2B5EF4-FFF2-40B4-BE49-F238E27FC236}">
-                <a16:creationId xmlns:a16="http://schemas.microsoft.com/office/drawing/2014/main" id="{D427261F-A954-4FAB-B981-837B4718A071}"/>
+                <a16:creationId xmlns:a16="http://schemas.microsoft.com/office/drawing/2014/main" id="{88B13D1A-35F9-4511-A459-10D37F05E049}"/>
               </a:ext>
             </a:extLst>
           </p:cNvPr>
@@ -6150,7 +6150,7 @@
           <p:cNvPr id="3" name="s4-title">
             <a:extLst xmlns:a="http://schemas.openxmlformats.org/drawingml/2006/main">
               <a:ext uri="{FF2B5EF4-FFF2-40B4-BE49-F238E27FC236}">
-                <a16:creationId xmlns:a16="http://schemas.microsoft.com/office/drawing/2014/main" id="{8767821F-AAE0-4EFC-B739-1DA67239B9BC}"/>
+                <a16:creationId xmlns:a16="http://schemas.microsoft.com/office/drawing/2014/main" id="{423AF130-0BBD-4332-9919-1CE12AF445CC}"/>
               </a:ext>
             </a:extLst>
           </p:cNvPr>
@@ -6208,7 +6208,7 @@
           <p:cNvPr id="4" name="s4-footer">
             <a:extLst xmlns:a="http://schemas.openxmlformats.org/drawingml/2006/main">
               <a:ext uri="{FF2B5EF4-FFF2-40B4-BE49-F238E27FC236}">
-                <a16:creationId xmlns:a16="http://schemas.microsoft.com/office/drawing/2014/main" id="{1ED34C5C-A7B7-44E7-BA20-92A6378CDC28}"/>
+                <a16:creationId xmlns:a16="http://schemas.microsoft.com/office/drawing/2014/main" id="{A0AA4D58-25DC-494F-9C03-C6E024FE0F77}"/>
               </a:ext>
             </a:extLst>
           </p:cNvPr>
@@ -6239,7 +6239,7 @@
           <p:cNvPr id="5" name="s4-identity">
             <a:extLst xmlns:a="http://schemas.openxmlformats.org/drawingml/2006/main">
               <a:ext uri="{FF2B5EF4-FFF2-40B4-BE49-F238E27FC236}">
-                <a16:creationId xmlns:a16="http://schemas.microsoft.com/office/drawing/2014/main" id="{C43529D6-B447-4432-9641-5BD8323860E0}"/>
+                <a16:creationId xmlns:a16="http://schemas.microsoft.com/office/drawing/2014/main" id="{FE9E35DC-D47E-464E-A3CF-A86E760EFFF8}"/>
               </a:ext>
             </a:extLst>
           </p:cNvPr>
@@ -6297,7 +6297,7 @@
           <p:cNvPr id="6" name="core-no-0">
             <a:extLst xmlns:a="http://schemas.openxmlformats.org/drawingml/2006/main">
               <a:ext uri="{FF2B5EF4-FFF2-40B4-BE49-F238E27FC236}">
-                <a16:creationId xmlns:a16="http://schemas.microsoft.com/office/drawing/2014/main" id="{3F76D290-44AA-4EA0-A56F-5DB1787888F8}"/>
+                <a16:creationId xmlns:a16="http://schemas.microsoft.com/office/drawing/2014/main" id="{7192BE95-4A97-4883-9E07-60BB42568AF1}"/>
               </a:ext>
             </a:extLst>
           </p:cNvPr>
@@ -6355,7 +6355,7 @@
           <p:cNvPr id="7" name="core-label-0">
             <a:extLst xmlns:a="http://schemas.openxmlformats.org/drawingml/2006/main">
               <a:ext uri="{FF2B5EF4-FFF2-40B4-BE49-F238E27FC236}">
-                <a16:creationId xmlns:a16="http://schemas.microsoft.com/office/drawing/2014/main" id="{A38A7B6E-0240-4A61-94A4-B3EF2EF67DA0}"/>
+                <a16:creationId xmlns:a16="http://schemas.microsoft.com/office/drawing/2014/main" id="{E5854B6D-4E7A-428E-B04D-F95CD7DED03C}"/>
               </a:ext>
             </a:extLst>
           </p:cNvPr>
@@ -6413,7 +6413,7 @@
           <p:cNvPr id="8" name="core-body-0">
             <a:extLst xmlns:a="http://schemas.openxmlformats.org/drawingml/2006/main">
               <a:ext uri="{FF2B5EF4-FFF2-40B4-BE49-F238E27FC236}">
-                <a16:creationId xmlns:a16="http://schemas.microsoft.com/office/drawing/2014/main" id="{C688F45B-7328-42EE-B539-3EE18A6D8275}"/>
+                <a16:creationId xmlns:a16="http://schemas.microsoft.com/office/drawing/2014/main" id="{832EF529-6C90-4CFD-A8C0-87C44188A858}"/>
               </a:ext>
             </a:extLst>
           </p:cNvPr>
@@ -6477,7 +6477,7 @@
           <p:cNvPr id="9" name="core-no-1">
             <a:extLst xmlns:a="http://schemas.openxmlformats.org/drawingml/2006/main">
               <a:ext uri="{FF2B5EF4-FFF2-40B4-BE49-F238E27FC236}">
-                <a16:creationId xmlns:a16="http://schemas.microsoft.com/office/drawing/2014/main" id="{6CD357C3-1A76-443A-AD7C-02F33D769B0E}"/>
+                <a16:creationId xmlns:a16="http://schemas.microsoft.com/office/drawing/2014/main" id="{F7AEA20A-9682-41BB-9ECC-CA78E8BF7FC2}"/>
               </a:ext>
             </a:extLst>
           </p:cNvPr>
@@ -6535,7 +6535,7 @@
           <p:cNvPr id="10" name="core-body-1">
             <a:extLst xmlns:a="http://schemas.openxmlformats.org/drawingml/2006/main">
               <a:ext uri="{FF2B5EF4-FFF2-40B4-BE49-F238E27FC236}">
-                <a16:creationId xmlns:a16="http://schemas.microsoft.com/office/drawing/2014/main" id="{003E0ED3-3B88-451E-ADCC-E15B74CDCABA}"/>
+                <a16:creationId xmlns:a16="http://schemas.microsoft.com/office/drawing/2014/main" id="{4917DBD5-D1A5-4E11-A2EB-DDDEFD542391}"/>
               </a:ext>
             </a:extLst>
           </p:cNvPr>
@@ -6599,7 +6599,7 @@
           <p:cNvPr id="11" name="core-no-2">
             <a:extLst xmlns:a="http://schemas.openxmlformats.org/drawingml/2006/main">
               <a:ext uri="{FF2B5EF4-FFF2-40B4-BE49-F238E27FC236}">
-                <a16:creationId xmlns:a16="http://schemas.microsoft.com/office/drawing/2014/main" id="{C6D93892-EC25-4522-96E1-B768022E6824}"/>
+                <a16:creationId xmlns:a16="http://schemas.microsoft.com/office/drawing/2014/main" id="{EF0FD7E9-F758-4ECD-A426-AC4820132F24}"/>
               </a:ext>
             </a:extLst>
           </p:cNvPr>
@@ -6657,7 +6657,7 @@
           <p:cNvPr id="12" name="core-body-2">
             <a:extLst xmlns:a="http://schemas.openxmlformats.org/drawingml/2006/main">
               <a:ext uri="{FF2B5EF4-FFF2-40B4-BE49-F238E27FC236}">
-                <a16:creationId xmlns:a16="http://schemas.microsoft.com/office/drawing/2014/main" id="{560DD548-1B6F-466A-A64D-8AFC9A3DF088}"/>
+                <a16:creationId xmlns:a16="http://schemas.microsoft.com/office/drawing/2014/main" id="{38337CE9-B818-4EA7-A695-5F853CC17781}"/>
               </a:ext>
             </a:extLst>
           </p:cNvPr>
@@ -6721,7 +6721,7 @@
           <p:cNvPr id="13" name="s4-takeaway-rule">
             <a:extLst xmlns:a="http://schemas.openxmlformats.org/drawingml/2006/main">
               <a:ext uri="{FF2B5EF4-FFF2-40B4-BE49-F238E27FC236}">
-                <a16:creationId xmlns:a16="http://schemas.microsoft.com/office/drawing/2014/main" id="{A6333FCF-5CBB-4C62-9148-E89D659C4E93}"/>
+                <a16:creationId xmlns:a16="http://schemas.microsoft.com/office/drawing/2014/main" id="{1200D8F0-A4D9-4820-884B-5AAD9E229801}"/>
               </a:ext>
             </a:extLst>
           </p:cNvPr>
@@ -6754,7 +6754,7 @@
           <p:cNvPr id="14" name="s4-takeaway">
             <a:extLst xmlns:a="http://schemas.openxmlformats.org/drawingml/2006/main">
               <a:ext uri="{FF2B5EF4-FFF2-40B4-BE49-F238E27FC236}">
-                <a16:creationId xmlns:a16="http://schemas.microsoft.com/office/drawing/2014/main" id="{3640DF2D-462C-453D-8C11-0BFFD5361749}"/>
+                <a16:creationId xmlns:a16="http://schemas.microsoft.com/office/drawing/2014/main" id="{367B6AB0-6D6D-45D8-A5F3-3EE7F0BBF2A4}"/>
               </a:ext>
             </a:extLst>
           </p:cNvPr>
@@ -6810,7 +6810,7 @@
     </p:spTree>
     <p:extLst>
       <p:ext uri="{BB962C8B-B14F-4D97-AF65-F5344CB8AC3E}">
-        <p14:creationId xmlns:p14="http://schemas.microsoft.com/office/powerpoint/2010/main" val="828657772"/>
+        <p14:creationId xmlns:p14="http://schemas.microsoft.com/office/powerpoint/2010/main" val="1875366524"/>
       </p:ext>
     </p:extLst>
   </p:cSld>
@@ -6841,7 +6841,7 @@
           <p:cNvPr id="1" name="s5-rule">
             <a:extLst xmlns:a="http://schemas.openxmlformats.org/drawingml/2006/main">
               <a:ext uri="{FF2B5EF4-FFF2-40B4-BE49-F238E27FC236}">
-                <a16:creationId xmlns:a16="http://schemas.microsoft.com/office/drawing/2014/main" id="{D67A9B91-A484-497E-AC16-D9FBEBDD7BA1}"/>
+                <a16:creationId xmlns:a16="http://schemas.microsoft.com/office/drawing/2014/main" id="{554BE471-04F3-4988-998B-F618049516FA}"/>
               </a:ext>
             </a:extLst>
           </p:cNvPr>
@@ -6874,7 +6874,7 @@
           <p:cNvPr id="2" name="s5-eyebrow">
             <a:extLst xmlns:a="http://schemas.openxmlformats.org/drawingml/2006/main">
               <a:ext uri="{FF2B5EF4-FFF2-40B4-BE49-F238E27FC236}">
-                <a16:creationId xmlns:a16="http://schemas.microsoft.com/office/drawing/2014/main" id="{F1AC00C9-611B-4D9A-A6F5-52E6E6B0F4E9}"/>
+                <a16:creationId xmlns:a16="http://schemas.microsoft.com/office/drawing/2014/main" id="{CA6143AA-4DCD-47AC-82E4-A86953010E4C}"/>
               </a:ext>
             </a:extLst>
           </p:cNvPr>
@@ -6932,7 +6932,7 @@
           <p:cNvPr id="3" name="s5-title">
             <a:extLst xmlns:a="http://schemas.openxmlformats.org/drawingml/2006/main">
               <a:ext uri="{FF2B5EF4-FFF2-40B4-BE49-F238E27FC236}">
-                <a16:creationId xmlns:a16="http://schemas.microsoft.com/office/drawing/2014/main" id="{F70241BA-3AC3-4C38-9963-DE1BB94F53BC}"/>
+                <a16:creationId xmlns:a16="http://schemas.microsoft.com/office/drawing/2014/main" id="{03FF254A-EB9C-4D7B-88DD-5DA7F8CC982B}"/>
               </a:ext>
             </a:extLst>
           </p:cNvPr>
@@ -6990,7 +6990,7 @@
           <p:cNvPr id="4" name="s5-footer">
             <a:extLst xmlns:a="http://schemas.openxmlformats.org/drawingml/2006/main">
               <a:ext uri="{FF2B5EF4-FFF2-40B4-BE49-F238E27FC236}">
-                <a16:creationId xmlns:a16="http://schemas.microsoft.com/office/drawing/2014/main" id="{E44A870F-74A4-4659-82F1-C70661B3DB7A}"/>
+                <a16:creationId xmlns:a16="http://schemas.microsoft.com/office/drawing/2014/main" id="{0819B9AC-6291-43B9-918A-F789B24DE4FB}"/>
               </a:ext>
             </a:extLst>
           </p:cNvPr>
@@ -7021,7 +7021,7 @@
           <p:cNvPr id="5" name="s5-identity">
             <a:extLst xmlns:a="http://schemas.openxmlformats.org/drawingml/2006/main">
               <a:ext uri="{FF2B5EF4-FFF2-40B4-BE49-F238E27FC236}">
-                <a16:creationId xmlns:a16="http://schemas.microsoft.com/office/drawing/2014/main" id="{111707BC-2F3C-49CF-A808-50983A984B1B}"/>
+                <a16:creationId xmlns:a16="http://schemas.microsoft.com/office/drawing/2014/main" id="{D2C74401-A175-4A93-9311-2924E2D8C187}"/>
               </a:ext>
             </a:extLst>
           </p:cNvPr>
@@ -7079,7 +7079,7 @@
           <p:cNvPr id="6" name="core-no-0">
             <a:extLst xmlns:a="http://schemas.openxmlformats.org/drawingml/2006/main">
               <a:ext uri="{FF2B5EF4-FFF2-40B4-BE49-F238E27FC236}">
-                <a16:creationId xmlns:a16="http://schemas.microsoft.com/office/drawing/2014/main" id="{D9C49E2B-B955-407E-B130-8038BEA31CA7}"/>
+                <a16:creationId xmlns:a16="http://schemas.microsoft.com/office/drawing/2014/main" id="{BC95AD8D-C9E7-43C3-97ED-86ADB823A242}"/>
               </a:ext>
             </a:extLst>
           </p:cNvPr>
@@ -7137,7 +7137,7 @@
           <p:cNvPr id="7" name="core-label-0">
             <a:extLst xmlns:a="http://schemas.openxmlformats.org/drawingml/2006/main">
               <a:ext uri="{FF2B5EF4-FFF2-40B4-BE49-F238E27FC236}">
-                <a16:creationId xmlns:a16="http://schemas.microsoft.com/office/drawing/2014/main" id="{C5574ED5-54D8-4103-88ED-9BD1416651C4}"/>
+                <a16:creationId xmlns:a16="http://schemas.microsoft.com/office/drawing/2014/main" id="{61120788-5F4B-45F9-B832-4B8CB59AF13A}"/>
               </a:ext>
             </a:extLst>
           </p:cNvPr>
@@ -7195,7 +7195,7 @@
           <p:cNvPr id="8" name="core-body-0">
             <a:extLst xmlns:a="http://schemas.openxmlformats.org/drawingml/2006/main">
               <a:ext uri="{FF2B5EF4-FFF2-40B4-BE49-F238E27FC236}">
-                <a16:creationId xmlns:a16="http://schemas.microsoft.com/office/drawing/2014/main" id="{1AB36376-700D-46ED-ABEC-5EA4112C58B9}"/>
+                <a16:creationId xmlns:a16="http://schemas.microsoft.com/office/drawing/2014/main" id="{D466D0B4-3B33-4255-97CB-B48C7DFFA0AE}"/>
               </a:ext>
             </a:extLst>
           </p:cNvPr>
@@ -7259,7 +7259,7 @@
           <p:cNvPr id="9" name="core-no-1">
             <a:extLst xmlns:a="http://schemas.openxmlformats.org/drawingml/2006/main">
               <a:ext uri="{FF2B5EF4-FFF2-40B4-BE49-F238E27FC236}">
-                <a16:creationId xmlns:a16="http://schemas.microsoft.com/office/drawing/2014/main" id="{17C7A511-2B53-497F-B211-15EAA3F3E84A}"/>
+                <a16:creationId xmlns:a16="http://schemas.microsoft.com/office/drawing/2014/main" id="{4165C9C3-49DE-4DB2-BFC9-084F36A6EFBC}"/>
               </a:ext>
             </a:extLst>
           </p:cNvPr>
@@ -7317,7 +7317,7 @@
           <p:cNvPr id="10" name="core-body-1">
             <a:extLst xmlns:a="http://schemas.openxmlformats.org/drawingml/2006/main">
               <a:ext uri="{FF2B5EF4-FFF2-40B4-BE49-F238E27FC236}">
-                <a16:creationId xmlns:a16="http://schemas.microsoft.com/office/drawing/2014/main" id="{677288E0-6F0B-4FB8-9B8D-27F511591F7A}"/>
+                <a16:creationId xmlns:a16="http://schemas.microsoft.com/office/drawing/2014/main" id="{42959DC0-09EA-456B-AF12-698463509D6E}"/>
               </a:ext>
             </a:extLst>
           </p:cNvPr>
@@ -7381,7 +7381,7 @@
           <p:cNvPr id="11" name="s5-takeaway-rule">
             <a:extLst xmlns:a="http://schemas.openxmlformats.org/drawingml/2006/main">
               <a:ext uri="{FF2B5EF4-FFF2-40B4-BE49-F238E27FC236}">
-                <a16:creationId xmlns:a16="http://schemas.microsoft.com/office/drawing/2014/main" id="{170BF1B6-FF62-43B9-A41A-09B48FDDCF20}"/>
+                <a16:creationId xmlns:a16="http://schemas.microsoft.com/office/drawing/2014/main" id="{B5DB9384-590D-41C7-AAD1-D2BB21998C78}"/>
               </a:ext>
             </a:extLst>
           </p:cNvPr>
@@ -7414,7 +7414,7 @@
           <p:cNvPr id="12" name="s5-takeaway">
             <a:extLst xmlns:a="http://schemas.openxmlformats.org/drawingml/2006/main">
               <a:ext uri="{FF2B5EF4-FFF2-40B4-BE49-F238E27FC236}">
-                <a16:creationId xmlns:a16="http://schemas.microsoft.com/office/drawing/2014/main" id="{E66C4C84-C7B0-42FB-B85F-C935B7EE189A}"/>
+                <a16:creationId xmlns:a16="http://schemas.microsoft.com/office/drawing/2014/main" id="{37EC0C5F-FF0A-402A-9C35-54D9277355C5}"/>
               </a:ext>
             </a:extLst>
           </p:cNvPr>
@@ -7470,7 +7470,7 @@
     </p:spTree>
     <p:extLst>
       <p:ext uri="{BB962C8B-B14F-4D97-AF65-F5344CB8AC3E}">
-        <p14:creationId xmlns:p14="http://schemas.microsoft.com/office/powerpoint/2010/main" val="89176860"/>
+        <p14:creationId xmlns:p14="http://schemas.microsoft.com/office/powerpoint/2010/main" val="1127753919"/>
       </p:ext>
     </p:extLst>
   </p:cSld>
@@ -7501,7 +7501,7 @@
           <p:cNvPr id="1" name="s6-rule">
             <a:extLst xmlns:a="http://schemas.openxmlformats.org/drawingml/2006/main">
               <a:ext uri="{FF2B5EF4-FFF2-40B4-BE49-F238E27FC236}">
-                <a16:creationId xmlns:a16="http://schemas.microsoft.com/office/drawing/2014/main" id="{392F458D-1673-4E2E-B0FB-366ABC54C1E4}"/>
+                <a16:creationId xmlns:a16="http://schemas.microsoft.com/office/drawing/2014/main" id="{1E8B9F71-487D-4C64-B339-706CFBC3D18D}"/>
               </a:ext>
             </a:extLst>
           </p:cNvPr>
@@ -7534,7 +7534,7 @@
           <p:cNvPr id="2" name="s6-eyebrow">
             <a:extLst xmlns:a="http://schemas.openxmlformats.org/drawingml/2006/main">
               <a:ext uri="{FF2B5EF4-FFF2-40B4-BE49-F238E27FC236}">
-                <a16:creationId xmlns:a16="http://schemas.microsoft.com/office/drawing/2014/main" id="{985B646D-1E90-462F-8343-FBA11C34F924}"/>
+                <a16:creationId xmlns:a16="http://schemas.microsoft.com/office/drawing/2014/main" id="{CE633F5C-3F70-46DA-9331-DA378716AC3A}"/>
               </a:ext>
             </a:extLst>
           </p:cNvPr>
@@ -7592,7 +7592,7 @@
           <p:cNvPr id="3" name="s6-title">
             <a:extLst xmlns:a="http://schemas.openxmlformats.org/drawingml/2006/main">
               <a:ext uri="{FF2B5EF4-FFF2-40B4-BE49-F238E27FC236}">
-                <a16:creationId xmlns:a16="http://schemas.microsoft.com/office/drawing/2014/main" id="{4FAF5A1C-3E0A-4130-8F0A-CCD9E596A4C7}"/>
+                <a16:creationId xmlns:a16="http://schemas.microsoft.com/office/drawing/2014/main" id="{C4176E0E-A2A3-422C-B755-FF45EEA08625}"/>
               </a:ext>
             </a:extLst>
           </p:cNvPr>
@@ -7650,7 +7650,7 @@
           <p:cNvPr id="4" name="s6-footer">
             <a:extLst xmlns:a="http://schemas.openxmlformats.org/drawingml/2006/main">
               <a:ext uri="{FF2B5EF4-FFF2-40B4-BE49-F238E27FC236}">
-                <a16:creationId xmlns:a16="http://schemas.microsoft.com/office/drawing/2014/main" id="{4C82B31E-6425-40AE-97BA-8BF663DC572D}"/>
+                <a16:creationId xmlns:a16="http://schemas.microsoft.com/office/drawing/2014/main" id="{8B3A03FC-8DE1-4CE3-9B30-3932EDBD98EA}"/>
               </a:ext>
             </a:extLst>
           </p:cNvPr>
@@ -7681,7 +7681,7 @@
           <p:cNvPr id="5" name="s6-identity">
             <a:extLst xmlns:a="http://schemas.openxmlformats.org/drawingml/2006/main">
               <a:ext uri="{FF2B5EF4-FFF2-40B4-BE49-F238E27FC236}">
-                <a16:creationId xmlns:a16="http://schemas.microsoft.com/office/drawing/2014/main" id="{99796483-1D4B-4D5E-BFE8-4058B23F1F69}"/>
+                <a16:creationId xmlns:a16="http://schemas.microsoft.com/office/drawing/2014/main" id="{8BAF0D19-F8DA-4645-BD0B-50F2CA9EC521}"/>
               </a:ext>
             </a:extLst>
           </p:cNvPr>
@@ -7739,7 +7739,7 @@
           <p:cNvPr id="6" name="core-no-0">
             <a:extLst xmlns:a="http://schemas.openxmlformats.org/drawingml/2006/main">
               <a:ext uri="{FF2B5EF4-FFF2-40B4-BE49-F238E27FC236}">
-                <a16:creationId xmlns:a16="http://schemas.microsoft.com/office/drawing/2014/main" id="{1392D885-C038-4C30-8D8B-2ABE24D4790D}"/>
+                <a16:creationId xmlns:a16="http://schemas.microsoft.com/office/drawing/2014/main" id="{E7D2C204-86B8-4BF0-87EB-C13A1846D80E}"/>
               </a:ext>
             </a:extLst>
           </p:cNvPr>
@@ -7797,7 +7797,7 @@
           <p:cNvPr id="7" name="core-label-0">
             <a:extLst xmlns:a="http://schemas.openxmlformats.org/drawingml/2006/main">
               <a:ext uri="{FF2B5EF4-FFF2-40B4-BE49-F238E27FC236}">
-                <a16:creationId xmlns:a16="http://schemas.microsoft.com/office/drawing/2014/main" id="{7E20598D-8D4D-44EB-BA86-723C446D8AF9}"/>
+                <a16:creationId xmlns:a16="http://schemas.microsoft.com/office/drawing/2014/main" id="{86C6C8CE-3F9C-42EA-A76F-CE70E27EE097}"/>
               </a:ext>
             </a:extLst>
           </p:cNvPr>
@@ -7855,7 +7855,7 @@
           <p:cNvPr id="8" name="core-body-0">
             <a:extLst xmlns:a="http://schemas.openxmlformats.org/drawingml/2006/main">
               <a:ext uri="{FF2B5EF4-FFF2-40B4-BE49-F238E27FC236}">
-                <a16:creationId xmlns:a16="http://schemas.microsoft.com/office/drawing/2014/main" id="{A9846274-2C21-4AF0-A7DC-8601D1A261B6}"/>
+                <a16:creationId xmlns:a16="http://schemas.microsoft.com/office/drawing/2014/main" id="{B1284FFD-3BB5-44D2-8C91-3E69D3DBB8C1}"/>
               </a:ext>
             </a:extLst>
           </p:cNvPr>
@@ -7919,7 +7919,7 @@
           <p:cNvPr id="9" name="core-no-1">
             <a:extLst xmlns:a="http://schemas.openxmlformats.org/drawingml/2006/main">
               <a:ext uri="{FF2B5EF4-FFF2-40B4-BE49-F238E27FC236}">
-                <a16:creationId xmlns:a16="http://schemas.microsoft.com/office/drawing/2014/main" id="{DF74BF9A-CEF7-488C-A676-2B676621D8DE}"/>
+                <a16:creationId xmlns:a16="http://schemas.microsoft.com/office/drawing/2014/main" id="{8FC7F6D9-F582-4E18-9D9D-2761C2692251}"/>
               </a:ext>
             </a:extLst>
           </p:cNvPr>
@@ -7977,7 +7977,7 @@
           <p:cNvPr id="10" name="core-body-1">
             <a:extLst xmlns:a="http://schemas.openxmlformats.org/drawingml/2006/main">
               <a:ext uri="{FF2B5EF4-FFF2-40B4-BE49-F238E27FC236}">
-                <a16:creationId xmlns:a16="http://schemas.microsoft.com/office/drawing/2014/main" id="{BFB1F58A-BD63-46A5-9CDD-D68E449BC06A}"/>
+                <a16:creationId xmlns:a16="http://schemas.microsoft.com/office/drawing/2014/main" id="{B30BB28A-595B-4AB1-9D4D-D92CEA6FCD09}"/>
               </a:ext>
             </a:extLst>
           </p:cNvPr>
@@ -8041,7 +8041,7 @@
           <p:cNvPr id="11" name="s6-takeaway-rule">
             <a:extLst xmlns:a="http://schemas.openxmlformats.org/drawingml/2006/main">
               <a:ext uri="{FF2B5EF4-FFF2-40B4-BE49-F238E27FC236}">
-                <a16:creationId xmlns:a16="http://schemas.microsoft.com/office/drawing/2014/main" id="{D76B4E1B-364D-45C4-B07E-2C047750D8B1}"/>
+                <a16:creationId xmlns:a16="http://schemas.microsoft.com/office/drawing/2014/main" id="{4DA2FEC5-E528-4A68-8B2A-C716630E11BA}"/>
               </a:ext>
             </a:extLst>
           </p:cNvPr>
@@ -8074,7 +8074,7 @@
           <p:cNvPr id="12" name="s6-takeaway">
             <a:extLst xmlns:a="http://schemas.openxmlformats.org/drawingml/2006/main">
               <a:ext uri="{FF2B5EF4-FFF2-40B4-BE49-F238E27FC236}">
-                <a16:creationId xmlns:a16="http://schemas.microsoft.com/office/drawing/2014/main" id="{CD7B0899-79F5-4A02-9727-5DFC4C05818D}"/>
+                <a16:creationId xmlns:a16="http://schemas.microsoft.com/office/drawing/2014/main" id="{7A6DB180-C9BE-4386-B548-06499A8B6692}"/>
               </a:ext>
             </a:extLst>
           </p:cNvPr>
@@ -8130,7 +8130,7 @@
     </p:spTree>
     <p:extLst>
       <p:ext uri="{BB962C8B-B14F-4D97-AF65-F5344CB8AC3E}">
-        <p14:creationId xmlns:p14="http://schemas.microsoft.com/office/powerpoint/2010/main" val="952448008"/>
+        <p14:creationId xmlns:p14="http://schemas.microsoft.com/office/powerpoint/2010/main" val="264094344"/>
       </p:ext>
     </p:extLst>
   </p:cSld>
@@ -8161,7 +8161,7 @@
           <p:cNvPr id="1" name="s7-rule">
             <a:extLst xmlns:a="http://schemas.openxmlformats.org/drawingml/2006/main">
               <a:ext uri="{FF2B5EF4-FFF2-40B4-BE49-F238E27FC236}">
-                <a16:creationId xmlns:a16="http://schemas.microsoft.com/office/drawing/2014/main" id="{031329D7-0FE2-490E-A929-012975CD8FD8}"/>
+                <a16:creationId xmlns:a16="http://schemas.microsoft.com/office/drawing/2014/main" id="{4ECAE5EC-F59F-4A4B-A819-6BBF7570C98B}"/>
               </a:ext>
             </a:extLst>
           </p:cNvPr>
@@ -8194,7 +8194,7 @@
           <p:cNvPr id="2" name="s7-eyebrow">
             <a:extLst xmlns:a="http://schemas.openxmlformats.org/drawingml/2006/main">
               <a:ext uri="{FF2B5EF4-FFF2-40B4-BE49-F238E27FC236}">
-                <a16:creationId xmlns:a16="http://schemas.microsoft.com/office/drawing/2014/main" id="{06881D9C-9923-4727-9B48-99D5A3E9C7AD}"/>
+                <a16:creationId xmlns:a16="http://schemas.microsoft.com/office/drawing/2014/main" id="{D87F81C1-83C6-4670-83E4-AB2DFA6BD0AB}"/>
               </a:ext>
             </a:extLst>
           </p:cNvPr>
@@ -8252,7 +8252,7 @@
           <p:cNvPr id="3" name="s7-title">
             <a:extLst xmlns:a="http://schemas.openxmlformats.org/drawingml/2006/main">
               <a:ext uri="{FF2B5EF4-FFF2-40B4-BE49-F238E27FC236}">
-                <a16:creationId xmlns:a16="http://schemas.microsoft.com/office/drawing/2014/main" id="{8EC161C3-2492-4679-BE7B-AB94D842634B}"/>
+                <a16:creationId xmlns:a16="http://schemas.microsoft.com/office/drawing/2014/main" id="{D254BB62-E6EE-4289-9742-BADA9C07B4F0}"/>
               </a:ext>
             </a:extLst>
           </p:cNvPr>
@@ -8310,7 +8310,7 @@
           <p:cNvPr id="4" name="s7-footer">
             <a:extLst xmlns:a="http://schemas.openxmlformats.org/drawingml/2006/main">
               <a:ext uri="{FF2B5EF4-FFF2-40B4-BE49-F238E27FC236}">
-                <a16:creationId xmlns:a16="http://schemas.microsoft.com/office/drawing/2014/main" id="{42AD4C59-022F-44FC-AB3E-D552589FA04D}"/>
+                <a16:creationId xmlns:a16="http://schemas.microsoft.com/office/drawing/2014/main" id="{2178B40F-8AE3-4E4F-819E-AB4744D9C551}"/>
               </a:ext>
             </a:extLst>
           </p:cNvPr>
@@ -8341,7 +8341,7 @@
           <p:cNvPr id="5" name="s7-identity">
             <a:extLst xmlns:a="http://schemas.openxmlformats.org/drawingml/2006/main">
               <a:ext uri="{FF2B5EF4-FFF2-40B4-BE49-F238E27FC236}">
-                <a16:creationId xmlns:a16="http://schemas.microsoft.com/office/drawing/2014/main" id="{0C2AB6E7-C170-4259-A0B2-A285C6B74638}"/>
+                <a16:creationId xmlns:a16="http://schemas.microsoft.com/office/drawing/2014/main" id="{8379838F-F50D-4721-BE4F-4A1545F06A2E}"/>
               </a:ext>
             </a:extLst>
           </p:cNvPr>
@@ -8399,7 +8399,7 @@
           <p:cNvPr id="6" name="core-no-0">
             <a:extLst xmlns:a="http://schemas.openxmlformats.org/drawingml/2006/main">
               <a:ext uri="{FF2B5EF4-FFF2-40B4-BE49-F238E27FC236}">
-                <a16:creationId xmlns:a16="http://schemas.microsoft.com/office/drawing/2014/main" id="{8A3F72B8-DA21-4E57-BDAA-8D61920FED2B}"/>
+                <a16:creationId xmlns:a16="http://schemas.microsoft.com/office/drawing/2014/main" id="{B2EDA366-EA48-4C93-A20B-E7BDDAFB61BB}"/>
               </a:ext>
             </a:extLst>
           </p:cNvPr>
@@ -8457,7 +8457,7 @@
           <p:cNvPr id="7" name="core-label-0">
             <a:extLst xmlns:a="http://schemas.openxmlformats.org/drawingml/2006/main">
               <a:ext uri="{FF2B5EF4-FFF2-40B4-BE49-F238E27FC236}">
-                <a16:creationId xmlns:a16="http://schemas.microsoft.com/office/drawing/2014/main" id="{E01C332C-504E-4971-BFA7-08AF78F88EAD}"/>
+                <a16:creationId xmlns:a16="http://schemas.microsoft.com/office/drawing/2014/main" id="{E64A49F1-0BF7-4C68-A892-E92037341DAE}"/>
               </a:ext>
             </a:extLst>
           </p:cNvPr>
@@ -8515,7 +8515,7 @@
           <p:cNvPr id="8" name="core-body-0">
             <a:extLst xmlns:a="http://schemas.openxmlformats.org/drawingml/2006/main">
               <a:ext uri="{FF2B5EF4-FFF2-40B4-BE49-F238E27FC236}">
-                <a16:creationId xmlns:a16="http://schemas.microsoft.com/office/drawing/2014/main" id="{E12330EF-4200-4499-A92D-DC79933D8F9D}"/>
+                <a16:creationId xmlns:a16="http://schemas.microsoft.com/office/drawing/2014/main" id="{59C9901A-0B87-4C64-A228-B7633FDFD55A}"/>
               </a:ext>
             </a:extLst>
           </p:cNvPr>
@@ -8579,7 +8579,7 @@
           <p:cNvPr id="9" name="core-no-1">
             <a:extLst xmlns:a="http://schemas.openxmlformats.org/drawingml/2006/main">
               <a:ext uri="{FF2B5EF4-FFF2-40B4-BE49-F238E27FC236}">
-                <a16:creationId xmlns:a16="http://schemas.microsoft.com/office/drawing/2014/main" id="{180E57C9-6127-4DF5-9CBB-E37AC66184F5}"/>
+                <a16:creationId xmlns:a16="http://schemas.microsoft.com/office/drawing/2014/main" id="{2604C7AE-87EE-4B50-AB9A-AFDB0832EF1E}"/>
               </a:ext>
             </a:extLst>
           </p:cNvPr>
@@ -8637,7 +8637,7 @@
           <p:cNvPr id="10" name="core-body-1">
             <a:extLst xmlns:a="http://schemas.openxmlformats.org/drawingml/2006/main">
               <a:ext uri="{FF2B5EF4-FFF2-40B4-BE49-F238E27FC236}">
-                <a16:creationId xmlns:a16="http://schemas.microsoft.com/office/drawing/2014/main" id="{7117D622-DE52-4636-A67D-5607843AA2E6}"/>
+                <a16:creationId xmlns:a16="http://schemas.microsoft.com/office/drawing/2014/main" id="{66622EFB-ECF1-4859-81D7-2CB16DDAC245}"/>
               </a:ext>
             </a:extLst>
           </p:cNvPr>
@@ -8701,7 +8701,7 @@
           <p:cNvPr id="11" name="s7-takeaway-rule">
             <a:extLst xmlns:a="http://schemas.openxmlformats.org/drawingml/2006/main">
               <a:ext uri="{FF2B5EF4-FFF2-40B4-BE49-F238E27FC236}">
-                <a16:creationId xmlns:a16="http://schemas.microsoft.com/office/drawing/2014/main" id="{FC477A62-62A8-4FA7-9A1B-B8AC11826C81}"/>
+                <a16:creationId xmlns:a16="http://schemas.microsoft.com/office/drawing/2014/main" id="{7526D154-B3A6-4265-AE3A-42BB1083B9B5}"/>
               </a:ext>
             </a:extLst>
           </p:cNvPr>
@@ -8734,7 +8734,7 @@
           <p:cNvPr id="12" name="s7-takeaway">
             <a:extLst xmlns:a="http://schemas.openxmlformats.org/drawingml/2006/main">
               <a:ext uri="{FF2B5EF4-FFF2-40B4-BE49-F238E27FC236}">
-                <a16:creationId xmlns:a16="http://schemas.microsoft.com/office/drawing/2014/main" id="{A23DC3B4-037E-402C-B97A-AFDC6AD35B2C}"/>
+                <a16:creationId xmlns:a16="http://schemas.microsoft.com/office/drawing/2014/main" id="{A79A7782-7369-4AB5-876C-0FFC73C9CD63}"/>
               </a:ext>
             </a:extLst>
           </p:cNvPr>
@@ -8790,7 +8790,7 @@
     </p:spTree>
     <p:extLst>
       <p:ext uri="{BB962C8B-B14F-4D97-AF65-F5344CB8AC3E}">
-        <p14:creationId xmlns:p14="http://schemas.microsoft.com/office/powerpoint/2010/main" val="1928288636"/>
+        <p14:creationId xmlns:p14="http://schemas.microsoft.com/office/powerpoint/2010/main" val="1113622486"/>
       </p:ext>
     </p:extLst>
   </p:cSld>
@@ -8821,7 +8821,7 @@
           <p:cNvPr id="1" name="s8-rule">
             <a:extLst xmlns:a="http://schemas.openxmlformats.org/drawingml/2006/main">
               <a:ext uri="{FF2B5EF4-FFF2-40B4-BE49-F238E27FC236}">
-                <a16:creationId xmlns:a16="http://schemas.microsoft.com/office/drawing/2014/main" id="{13C70196-CCED-4F14-805D-891B3B0B520F}"/>
+                <a16:creationId xmlns:a16="http://schemas.microsoft.com/office/drawing/2014/main" id="{830F053A-BE71-4B4E-8C5E-85CFAC826C86}"/>
               </a:ext>
             </a:extLst>
           </p:cNvPr>
@@ -8854,7 +8854,7 @@
           <p:cNvPr id="2" name="s8-eyebrow">
             <a:extLst xmlns:a="http://schemas.openxmlformats.org/drawingml/2006/main">
               <a:ext uri="{FF2B5EF4-FFF2-40B4-BE49-F238E27FC236}">
-                <a16:creationId xmlns:a16="http://schemas.microsoft.com/office/drawing/2014/main" id="{7C63034D-859C-4AEC-8980-230280184770}"/>
+                <a16:creationId xmlns:a16="http://schemas.microsoft.com/office/drawing/2014/main" id="{17E7BE08-FDB6-4CDD-9729-73EA320A6223}"/>
               </a:ext>
             </a:extLst>
           </p:cNvPr>
@@ -8912,7 +8912,7 @@
           <p:cNvPr id="3" name="s8-title">
             <a:extLst xmlns:a="http://schemas.openxmlformats.org/drawingml/2006/main">
               <a:ext uri="{FF2B5EF4-FFF2-40B4-BE49-F238E27FC236}">
-                <a16:creationId xmlns:a16="http://schemas.microsoft.com/office/drawing/2014/main" id="{9C21E232-3EAF-47A9-AAE4-FE799ECB7EFC}"/>
+                <a16:creationId xmlns:a16="http://schemas.microsoft.com/office/drawing/2014/main" id="{E75D15AC-CB00-47BC-B2E2-4CB27A9D76AC}"/>
               </a:ext>
             </a:extLst>
           </p:cNvPr>
@@ -8970,7 +8970,7 @@
           <p:cNvPr id="4" name="s8-footer">
             <a:extLst xmlns:a="http://schemas.openxmlformats.org/drawingml/2006/main">
               <a:ext uri="{FF2B5EF4-FFF2-40B4-BE49-F238E27FC236}">
-                <a16:creationId xmlns:a16="http://schemas.microsoft.com/office/drawing/2014/main" id="{20A33EB7-C6D3-4BCA-AC47-EEDBF4F3F751}"/>
+                <a16:creationId xmlns:a16="http://schemas.microsoft.com/office/drawing/2014/main" id="{F368981A-9F8B-46D8-AA49-261BD3D6BD10}"/>
               </a:ext>
             </a:extLst>
           </p:cNvPr>
@@ -9001,7 +9001,7 @@
           <p:cNvPr id="5" name="s8-identity">
             <a:extLst xmlns:a="http://schemas.openxmlformats.org/drawingml/2006/main">
               <a:ext uri="{FF2B5EF4-FFF2-40B4-BE49-F238E27FC236}">
-                <a16:creationId xmlns:a16="http://schemas.microsoft.com/office/drawing/2014/main" id="{69C99D1D-23EF-4AE0-AD17-7CF773DC7244}"/>
+                <a16:creationId xmlns:a16="http://schemas.microsoft.com/office/drawing/2014/main" id="{ED608C86-0CF4-4AA4-9207-4CE70AEE2861}"/>
               </a:ext>
             </a:extLst>
           </p:cNvPr>
@@ -9059,7 +9059,7 @@
           <p:cNvPr id="6" name="case-title">
             <a:extLst xmlns:a="http://schemas.openxmlformats.org/drawingml/2006/main">
               <a:ext uri="{FF2B5EF4-FFF2-40B4-BE49-F238E27FC236}">
-                <a16:creationId xmlns:a16="http://schemas.microsoft.com/office/drawing/2014/main" id="{60448ACD-3887-47CB-85DB-D0E0384EC643}"/>
+                <a16:creationId xmlns:a16="http://schemas.microsoft.com/office/drawing/2014/main" id="{FA3B4E00-84C0-4379-A8CE-E90545C22A61}"/>
               </a:ext>
             </a:extLst>
           </p:cNvPr>
@@ -9123,7 +9123,7 @@
           <p:cNvPr id="7" name="case-row-0">
             <a:extLst xmlns:a="http://schemas.openxmlformats.org/drawingml/2006/main">
               <a:ext uri="{FF2B5EF4-FFF2-40B4-BE49-F238E27FC236}">
-                <a16:creationId xmlns:a16="http://schemas.microsoft.com/office/drawing/2014/main" id="{E545A945-18C4-4E09-BA53-F8ABF8768304}"/>
+                <a16:creationId xmlns:a16="http://schemas.microsoft.com/office/drawing/2014/main" id="{E6F3BB4E-4C7D-450C-982F-4E38A3FCDDE9}"/>
               </a:ext>
             </a:extLst>
           </p:cNvPr>
@@ -9187,7 +9187,7 @@
           <p:cNvPr id="8" name="case-row-1">
             <a:extLst xmlns:a="http://schemas.openxmlformats.org/drawingml/2006/main">
               <a:ext uri="{FF2B5EF4-FFF2-40B4-BE49-F238E27FC236}">
-                <a16:creationId xmlns:a16="http://schemas.microsoft.com/office/drawing/2014/main" id="{3A6BB250-2E5F-435E-9869-600E663D1E88}"/>
+                <a16:creationId xmlns:a16="http://schemas.microsoft.com/office/drawing/2014/main" id="{E1DCAF5D-5214-402A-B9D7-ADB8F1EB8F73}"/>
               </a:ext>
             </a:extLst>
           </p:cNvPr>
@@ -9251,7 +9251,7 @@
           <p:cNvPr id="9" name="case-row-2">
             <a:extLst xmlns:a="http://schemas.openxmlformats.org/drawingml/2006/main">
               <a:ext uri="{FF2B5EF4-FFF2-40B4-BE49-F238E27FC236}">
-                <a16:creationId xmlns:a16="http://schemas.microsoft.com/office/drawing/2014/main" id="{4735A734-F824-49AA-94CB-E657F4D733F8}"/>
+                <a16:creationId xmlns:a16="http://schemas.microsoft.com/office/drawing/2014/main" id="{DEFE3D67-606C-4956-A71A-C987C1806DCD}"/>
               </a:ext>
             </a:extLst>
           </p:cNvPr>
@@ -9315,7 +9315,7 @@
           <p:cNvPr id="10" name="case-row-3">
             <a:extLst xmlns:a="http://schemas.openxmlformats.org/drawingml/2006/main">
               <a:ext uri="{FF2B5EF4-FFF2-40B4-BE49-F238E27FC236}">
-                <a16:creationId xmlns:a16="http://schemas.microsoft.com/office/drawing/2014/main" id="{537B3D04-48DE-41C1-AD58-9651B0B39C60}"/>
+                <a16:creationId xmlns:a16="http://schemas.microsoft.com/office/drawing/2014/main" id="{C2D3B187-E522-408E-8916-E7A432BA38E3}"/>
               </a:ext>
             </a:extLst>
           </p:cNvPr>
@@ -9379,7 +9379,7 @@
           <p:cNvPr id="11" name="s8-takeaway-rule">
             <a:extLst xmlns:a="http://schemas.openxmlformats.org/drawingml/2006/main">
               <a:ext uri="{FF2B5EF4-FFF2-40B4-BE49-F238E27FC236}">
-                <a16:creationId xmlns:a16="http://schemas.microsoft.com/office/drawing/2014/main" id="{69648899-65EF-47C3-A292-63D8683FBF08}"/>
+                <a16:creationId xmlns:a16="http://schemas.microsoft.com/office/drawing/2014/main" id="{0B9AA6A2-0CE4-4884-9C93-732377E1EE0E}"/>
               </a:ext>
             </a:extLst>
           </p:cNvPr>
@@ -9412,7 +9412,7 @@
           <p:cNvPr id="12" name="s8-takeaway">
             <a:extLst xmlns:a="http://schemas.openxmlformats.org/drawingml/2006/main">
               <a:ext uri="{FF2B5EF4-FFF2-40B4-BE49-F238E27FC236}">
-                <a16:creationId xmlns:a16="http://schemas.microsoft.com/office/drawing/2014/main" id="{3BFAFEF2-5D2F-4483-B4F9-B8053A9DD30A}"/>
+                <a16:creationId xmlns:a16="http://schemas.microsoft.com/office/drawing/2014/main" id="{6C64EEDB-6B58-4AE3-8191-04BD37D821BB}"/>
               </a:ext>
             </a:extLst>
           </p:cNvPr>
@@ -9468,7 +9468,7 @@
     </p:spTree>
     <p:extLst>
       <p:ext uri="{BB962C8B-B14F-4D97-AF65-F5344CB8AC3E}">
-        <p14:creationId xmlns:p14="http://schemas.microsoft.com/office/powerpoint/2010/main" val="1904766124"/>
+        <p14:creationId xmlns:p14="http://schemas.microsoft.com/office/powerpoint/2010/main" val="1386777791"/>
       </p:ext>
     </p:extLst>
   </p:cSld>
@@ -9499,7 +9499,7 @@
           <p:cNvPr id="1" name="s9-rule">
             <a:extLst xmlns:a="http://schemas.openxmlformats.org/drawingml/2006/main">
               <a:ext uri="{FF2B5EF4-FFF2-40B4-BE49-F238E27FC236}">
-                <a16:creationId xmlns:a16="http://schemas.microsoft.com/office/drawing/2014/main" id="{C413E26C-8927-4EDD-8332-4D8081B22869}"/>
+                <a16:creationId xmlns:a16="http://schemas.microsoft.com/office/drawing/2014/main" id="{19ABECD9-8057-4D5A-B330-573D223CE588}"/>
               </a:ext>
             </a:extLst>
           </p:cNvPr>
@@ -9532,7 +9532,7 @@
           <p:cNvPr id="2" name="s9-eyebrow">
             <a:extLst xmlns:a="http://schemas.openxmlformats.org/drawingml/2006/main">
               <a:ext uri="{FF2B5EF4-FFF2-40B4-BE49-F238E27FC236}">
-                <a16:creationId xmlns:a16="http://schemas.microsoft.com/office/drawing/2014/main" id="{5B71F6A5-77C2-4BE8-BE99-783F040CC156}"/>
+                <a16:creationId xmlns:a16="http://schemas.microsoft.com/office/drawing/2014/main" id="{16FDABDF-1A9A-4762-B067-2DBC9A00D694}"/>
               </a:ext>
             </a:extLst>
           </p:cNvPr>
@@ -9590,7 +9590,7 @@
           <p:cNvPr id="3" name="s9-title">
             <a:extLst xmlns:a="http://schemas.openxmlformats.org/drawingml/2006/main">
               <a:ext uri="{FF2B5EF4-FFF2-40B4-BE49-F238E27FC236}">
-                <a16:creationId xmlns:a16="http://schemas.microsoft.com/office/drawing/2014/main" id="{1ED691A1-3150-4CCA-9E5E-F3B7288BF3DC}"/>
+                <a16:creationId xmlns:a16="http://schemas.microsoft.com/office/drawing/2014/main" id="{3A685470-DF74-4968-AEC2-D0932D6E202A}"/>
               </a:ext>
             </a:extLst>
           </p:cNvPr>
@@ -9648,7 +9648,7 @@
           <p:cNvPr id="4" name="s9-footer">
             <a:extLst xmlns:a="http://schemas.openxmlformats.org/drawingml/2006/main">
               <a:ext uri="{FF2B5EF4-FFF2-40B4-BE49-F238E27FC236}">
-                <a16:creationId xmlns:a16="http://schemas.microsoft.com/office/drawing/2014/main" id="{5CBCBD7A-F297-4311-9C92-6F346C88947F}"/>
+                <a16:creationId xmlns:a16="http://schemas.microsoft.com/office/drawing/2014/main" id="{522F5A9B-AC5A-4738-84ED-54ADA76F1067}"/>
               </a:ext>
             </a:extLst>
           </p:cNvPr>
@@ -9679,7 +9679,7 @@
           <p:cNvPr id="5" name="s9-identity">
             <a:extLst xmlns:a="http://schemas.openxmlformats.org/drawingml/2006/main">
               <a:ext uri="{FF2B5EF4-FFF2-40B4-BE49-F238E27FC236}">
-                <a16:creationId xmlns:a16="http://schemas.microsoft.com/office/drawing/2014/main" id="{B0360FDA-5D2E-44AD-84BE-BA5F8376B433}"/>
+                <a16:creationId xmlns:a16="http://schemas.microsoft.com/office/drawing/2014/main" id="{23E81006-D251-4B1A-95B2-702527DDE07C}"/>
               </a:ext>
             </a:extLst>
           </p:cNvPr>
@@ -9737,7 +9737,7 @@
           <p:cNvPr id="6" name="case-title">
             <a:extLst xmlns:a="http://schemas.openxmlformats.org/drawingml/2006/main">
               <a:ext uri="{FF2B5EF4-FFF2-40B4-BE49-F238E27FC236}">
-                <a16:creationId xmlns:a16="http://schemas.microsoft.com/office/drawing/2014/main" id="{97813006-1617-461E-A60E-9A5427F9F789}"/>
+                <a16:creationId xmlns:a16="http://schemas.microsoft.com/office/drawing/2014/main" id="{61BEC13A-20BD-4DD1-B986-63ACF9D163EA}"/>
               </a:ext>
             </a:extLst>
           </p:cNvPr>
@@ -9801,7 +9801,7 @@
           <p:cNvPr id="7" name="case-row-0">
             <a:extLst xmlns:a="http://schemas.openxmlformats.org/drawingml/2006/main">
               <a:ext uri="{FF2B5EF4-FFF2-40B4-BE49-F238E27FC236}">
-                <a16:creationId xmlns:a16="http://schemas.microsoft.com/office/drawing/2014/main" id="{A4859238-0E5E-43AF-A2DD-B1DBAFD3BA0F}"/>
+                <a16:creationId xmlns:a16="http://schemas.microsoft.com/office/drawing/2014/main" id="{000D2DAE-0BD5-4626-BA8F-29EC6F4EAE5E}"/>
               </a:ext>
             </a:extLst>
           </p:cNvPr>
@@ -9865,7 +9865,7 @@
           <p:cNvPr id="8" name="case-row-1">
             <a:extLst xmlns:a="http://schemas.openxmlformats.org/drawingml/2006/main">
               <a:ext uri="{FF2B5EF4-FFF2-40B4-BE49-F238E27FC236}">
-                <a16:creationId xmlns:a16="http://schemas.microsoft.com/office/drawing/2014/main" id="{5D0FF200-9A96-4B1E-B011-8041A64C1225}"/>
+                <a16:creationId xmlns:a16="http://schemas.microsoft.com/office/drawing/2014/main" id="{9D9E68B3-87D7-4A55-9D85-E0F55EE62FC0}"/>
               </a:ext>
             </a:extLst>
           </p:cNvPr>
@@ -9929,7 +9929,7 @@
           <p:cNvPr id="9" name="case-row-2">
             <a:extLst xmlns:a="http://schemas.openxmlformats.org/drawingml/2006/main">
               <a:ext uri="{FF2B5EF4-FFF2-40B4-BE49-F238E27FC236}">
-                <a16:creationId xmlns:a16="http://schemas.microsoft.com/office/drawing/2014/main" id="{A7A0ADD5-401F-46A9-A26E-AB0A8AF2072B}"/>
+                <a16:creationId xmlns:a16="http://schemas.microsoft.com/office/drawing/2014/main" id="{7F7F6683-169D-457D-88FF-7BCDACAE4814}"/>
               </a:ext>
             </a:extLst>
           </p:cNvPr>
@@ -9993,7 +9993,7 @@
           <p:cNvPr id="10" name="case-row-3">
             <a:extLst xmlns:a="http://schemas.openxmlformats.org/drawingml/2006/main">
               <a:ext uri="{FF2B5EF4-FFF2-40B4-BE49-F238E27FC236}">
-                <a16:creationId xmlns:a16="http://schemas.microsoft.com/office/drawing/2014/main" id="{21E3C31D-4324-4789-847D-EEA7E118BAEE}"/>
+                <a16:creationId xmlns:a16="http://schemas.microsoft.com/office/drawing/2014/main" id="{1A316CB5-1F54-479D-AFAF-04695A60CD22}"/>
               </a:ext>
             </a:extLst>
           </p:cNvPr>
@@ -10057,7 +10057,7 @@
           <p:cNvPr id="11" name="s9-takeaway-rule">
             <a:extLst xmlns:a="http://schemas.openxmlformats.org/drawingml/2006/main">
               <a:ext uri="{FF2B5EF4-FFF2-40B4-BE49-F238E27FC236}">
-                <a16:creationId xmlns:a16="http://schemas.microsoft.com/office/drawing/2014/main" id="{75FE3812-2CFD-48CB-A0AD-A0BF807BDF04}"/>
+                <a16:creationId xmlns:a16="http://schemas.microsoft.com/office/drawing/2014/main" id="{98EFEDFE-4157-4515-8EC0-D476EF6C33F7}"/>
               </a:ext>
             </a:extLst>
           </p:cNvPr>
@@ -10090,7 +10090,7 @@
           <p:cNvPr id="12" name="s9-takeaway">
             <a:extLst xmlns:a="http://schemas.openxmlformats.org/drawingml/2006/main">
               <a:ext uri="{FF2B5EF4-FFF2-40B4-BE49-F238E27FC236}">
-                <a16:creationId xmlns:a16="http://schemas.microsoft.com/office/drawing/2014/main" id="{0751BBD0-5797-41D1-80F1-D8BFC1264344}"/>
+                <a16:creationId xmlns:a16="http://schemas.microsoft.com/office/drawing/2014/main" id="{E13A5439-7F77-4732-BCAA-6C06807D7B05}"/>
               </a:ext>
             </a:extLst>
           </p:cNvPr>
@@ -10146,7 +10146,7 @@
     </p:spTree>
     <p:extLst>
       <p:ext uri="{BB962C8B-B14F-4D97-AF65-F5344CB8AC3E}">
-        <p14:creationId xmlns:p14="http://schemas.microsoft.com/office/powerpoint/2010/main" val="80611372"/>
+        <p14:creationId xmlns:p14="http://schemas.microsoft.com/office/powerpoint/2010/main" val="1405742470"/>
       </p:ext>
     </p:extLst>
   </p:cSld>
